--- a/survey/PB_Health_Survey_Slides.pptx
+++ b/survey/PB_Health_Survey_Slides.pptx
@@ -165,7 +165,7 @@
               <c:strCache>
                 <c:ptCount val="1"/>
                 <c:pt idx="0">
-                  <c:v>Responses</c:v>
+                  <c:v>People surveyed</c:v>
                 </c:pt>
               </c:strCache>
             </c:strRef>
@@ -224,7 +224,7 @@
             <a:lstStyle/>
             <a:p>
               <a:pPr>
-                <a:defRPr sz="1600" b="0">
+                <a:defRPr sz="1400" b="0">
                   <a:solidFill>
                     <a:srgbClr val="EA4722"/>
                   </a:solidFill>
@@ -242,7 +242,7 @@
           <c:showBubbleSize val="0"/>
           <c:showLeaderLines val="1"/>
         </c:dLbls>
-        <c:gapWidth val="70"/>
+        <c:gapWidth val="60"/>
         <c:axId val="-2068027336"/>
         <c:axId val="-2113994440"/>
       </c:barChart>
@@ -287,11 +287,187 @@
       <c:valAx>
         <c:axId val="-2113994440"/>
         <c:scaling>
-          <c:max val="27.0"/>
+          <c:max val="26.0"/>
           <c:min val="0.0"/>
         </c:scaling>
         <c:delete/>
         <c:axPos val="l"/>
+        <c:majorTickMark val="out"/>
+        <c:minorTickMark val="none"/>
+        <c:tickLblPos val="nextTo"/>
+        <c:crossAx val="-2068027336"/>
+        <c:crosses val="autoZero"/>
+      </c:valAx>
+    </c:plotArea>
+    <c:dispBlanksAs val="gap"/>
+  </c:chart>
+  <c:txPr>
+    <a:bodyPr/>
+    <a:lstStyle/>
+    <a:p>
+      <a:pPr>
+        <a:defRPr sz="1000">
+          <a:solidFill>
+            <a:srgbClr val="1A1A1A"/>
+          </a:solidFill>
+          <a:latin typeface="DM Sans"/>
+        </a:defRPr>
+      </a:pPr>
+      <a:endParaRPr lang="en-US"/>
+    </a:p>
+  </c:txPr>
+  <c:externalData r:id="rId1">
+    <c:autoUpdate val="0"/>
+  </c:externalData>
+</c:chartSpace>
+</file>
+
+<file path=ppt/charts/chart2.xml><?xml version="1.0" encoding="utf-8"?>
+<c:chartSpace xmlns:c="http://schemas.openxmlformats.org/drawingml/2006/chart" xmlns:a="http://schemas.openxmlformats.org/drawingml/2006/main" xmlns:r="http://schemas.openxmlformats.org/officeDocument/2006/relationships">
+  <c:date1904 val="0"/>
+  <c:chart>
+    <c:autoTitleDeleted val="1"/>
+    <c:plotArea>
+      <c:barChart>
+        <c:barDir val="bar"/>
+        <c:grouping val="clustered"/>
+        <c:varyColors val="0"/>
+        <c:ser>
+          <c:idx val="0"/>
+          <c:order val="0"/>
+          <c:tx>
+            <c:strRef>
+              <c:f>Sheet1!$B$1</c:f>
+              <c:strCache>
+                <c:ptCount val="1"/>
+                <c:pt idx="0">
+                  <c:v>Share of those who knew</c:v>
+                </c:pt>
+              </c:strCache>
+            </c:strRef>
+          </c:tx>
+          <c:spPr>
+            <a:solidFill>
+              <a:srgbClr val="01579E"/>
+            </a:solidFill>
+          </c:spPr>
+          <c:cat>
+            <c:strRef>
+              <c:f>Sheet1!$A$2:$A$5</c:f>
+              <c:strCache>
+                <c:ptCount val="4"/>
+                <c:pt idx="0">
+                  <c:v>Standee / posters</c:v>
+                </c:pt>
+                <c:pt idx="1">
+                  <c:v>Colleague</c:v>
+                </c:pt>
+                <c:pt idx="2">
+                  <c:v>Office email</c:v>
+                </c:pt>
+                <c:pt idx="3">
+                  <c:v>Social media</c:v>
+                </c:pt>
+              </c:strCache>
+            </c:strRef>
+          </c:cat>
+          <c:val>
+            <c:numRef>
+              <c:f>Sheet1!$B$2:$B$5</c:f>
+              <c:numCache>
+                <c:formatCode>General</c:formatCode>
+                <c:ptCount val="4"/>
+                <c:pt idx="0">
+                  <c:v>0.6333333333333333</c:v>
+                </c:pt>
+                <c:pt idx="1">
+                  <c:v>0.21666666666666667</c:v>
+                </c:pt>
+                <c:pt idx="2">
+                  <c:v>0.11666666666666667</c:v>
+                </c:pt>
+                <c:pt idx="3">
+                  <c:v>0.03333333333333333</c:v>
+                </c:pt>
+              </c:numCache>
+            </c:numRef>
+          </c:val>
+        </c:ser>
+        <c:dLbls>
+          <c:numFmt formatCode="0%" sourceLinked="0"/>
+          <c:txPr>
+            <a:bodyPr/>
+            <a:lstStyle/>
+            <a:p>
+              <a:pPr>
+                <a:defRPr sz="1400" b="0">
+                  <a:solidFill>
+                    <a:srgbClr val="EA4722"/>
+                  </a:solidFill>
+                  <a:latin typeface="Nunito ExtraBold"/>
+                </a:defRPr>
+              </a:pPr>
+            </a:p>
+          </c:txPr>
+          <c:dLblPos val="outEnd"/>
+          <c:showLegendKey val="0"/>
+          <c:showVal val="1"/>
+          <c:showCatName val="0"/>
+          <c:showSerName val="0"/>
+          <c:showPercent val="0"/>
+          <c:showBubbleSize val="0"/>
+          <c:showLeaderLines val="1"/>
+        </c:dLbls>
+        <c:gapWidth val="60"/>
+        <c:axId val="-2068027336"/>
+        <c:axId val="-2113994440"/>
+      </c:barChart>
+      <c:catAx>
+        <c:axId val="-2068027336"/>
+        <c:scaling>
+          <c:orientation val="maxMin"/>
+        </c:scaling>
+        <c:delete val="0"/>
+        <c:axPos val="l"/>
+        <c:majorTickMark val="none"/>
+        <c:minorTickMark val="none"/>
+        <c:tickLblPos val="nextTo"/>
+        <c:spPr>
+          <a:ln>
+            <a:solidFill>
+              <a:srgbClr val="808080"/>
+            </a:solidFill>
+          </a:ln>
+        </c:spPr>
+        <c:txPr>
+          <a:bodyPr/>
+          <a:lstStyle/>
+          <a:p>
+            <a:pPr>
+              <a:defRPr sz="1000">
+                <a:solidFill>
+                  <a:srgbClr val="000000"/>
+                </a:solidFill>
+                <a:latin typeface="DM Sans ExtraBold"/>
+              </a:defRPr>
+            </a:pPr>
+          </a:p>
+        </c:txPr>
+        <c:crossAx val="-2113994440"/>
+        <c:crosses val="autoZero"/>
+        <c:auto val="1"/>
+        <c:lblAlgn val="ctr"/>
+        <c:lblOffset val="100"/>
+        <c:noMultiLvlLbl val="0"/>
+      </c:catAx>
+      <c:valAx>
+        <c:axId val="-2113994440"/>
+        <c:scaling>
+          <c:max val="0.78"/>
+          <c:min val="0.0"/>
+        </c:scaling>
+        <c:delete/>
+        <c:axPos val="b"/>
         <c:majorTickMark val="out"/>
         <c:minorTickMark val="none"/>
         <c:tickLblPos val="nextTo"/>
@@ -3720,7 +3896,7 @@
                 </a:solidFill>
                 <a:latin typeface="Nunito ExtraBold"/>
               </a:rPr>
-              <a:t>Survey coverage by building</a:t>
+              <a:t>Who we surveyed and how they heard about us</a:t>
             </a:r>
             <a:endParaRPr lang="en-IN" sz="1900">
               <a:solidFill>
@@ -3733,10 +3909,10 @@
       </p:sp>
       <p:sp>
         <p:nvSpPr>
-          <p:cNvPr id="9" name="TextBox 8">
+          <p:cNvPr id="20" name="Label PEOPLE SURVEYED">
             <a:extLst>
               <a:ext uri="{FF2B5EF4-FFF2-40B4-BE49-F238E27FC236}">
-                <a16:creationId xmlns:a16="http://schemas.microsoft.com/office/drawing/2014/main" id="{BE056F41-F4FF-4EE3-8A61-95CF19C493C9}"/>
+                <a16:creationId xmlns:a16="http://schemas.microsoft.com/office/drawing/2014/main" id="{00E28BCF-A616-487D-A74F-A1750555F9E9}"/>
               </a:ext>
             </a:extLst>
           </p:cNvPr>
@@ -3745,8 +3921,8 @@
         </p:nvSpPr>
         <p:spPr>
           <a:xfrm>
-            <a:off x="533400" y="863600"/>
-            <a:ext cx="1905000" cy="431800"/>
+            <a:off x="533400" y="896112"/>
+            <a:ext cx="4069080" cy="152400"/>
           </a:xfrm>
           <a:prstGeom prst="rect">
             <a:avLst/>
@@ -3754,26 +3930,174 @@
           <a:noFill/>
         </p:spPr>
         <p:txBody>
-          <a:bodyPr vertOverflow="overflow" vert="horz" wrap="square" lIns="0" tIns="0" rIns="0" bIns="0" rtlCol="0" anchor="b" anchorCtr="0">
+          <a:bodyPr vertOverflow="overflow" vert="horz" wrap="square" lIns="0" tIns="0" rIns="0" bIns="0" rtlCol="0" anchor="t" anchorCtr="0">
             <a:noAutofit/>
           </a:bodyPr>
           <a:lstStyle/>
           <a:p>
             <a:r>
-              <a:rPr lang="en-IN" sz="2800">
+              <a:rPr lang="en-GB" sz="900">
                 <a:solidFill>
-                  <a:srgbClr val="EA4722"/>
+                  <a:srgbClr val="000000"/>
                 </a:solidFill>
-                <a:latin typeface="Nunito ExtraBold"/>
+                <a:latin typeface="DM Sans ExtraBold"/>
               </a:rPr>
-              <a:t>57</a:t>
+              <a:t>PEOPLE SURVEYED IN EACH BUILDING</a:t>
             </a:r>
-          </a:p>
-        </p:txBody>
-      </p:sp>
-      <p:sp>
-        <p:nvSpPr>
-          <p:cNvPr id="10" name="TextBox 9">
+            <a:endParaRPr lang="en-IN" sz="900">
+              <a:solidFill>
+                <a:srgbClr val="000000"/>
+              </a:solidFill>
+              <a:latin typeface="DM Sans ExtraBold"/>
+            </a:endParaRPr>
+          </a:p>
+        </p:txBody>
+      </p:sp>
+      <p:sp>
+        <p:nvSpPr>
+          <p:cNvPr id="22" name="Label HOW THEY HEARD">
+            <a:extLst>
+              <a:ext uri="{FF2B5EF4-FFF2-40B4-BE49-F238E27FC236}">
+                <a16:creationId xmlns:a16="http://schemas.microsoft.com/office/drawing/2014/main" id="{00E28BCF-A616-487D-A74F-A1750555F9E9}"/>
+              </a:ext>
+            </a:extLst>
+          </p:cNvPr>
+          <p:cNvSpPr txBox="1"/>
+          <p:nvPr/>
+        </p:nvSpPr>
+        <p:spPr>
+          <a:xfrm>
+            <a:off x="5013960" y="896112"/>
+            <a:ext cx="3596640" cy="152400"/>
+          </a:xfrm>
+          <a:prstGeom prst="rect">
+            <a:avLst/>
+          </a:prstGeom>
+          <a:noFill/>
+        </p:spPr>
+        <p:txBody>
+          <a:bodyPr vertOverflow="overflow" vert="horz" wrap="square" lIns="0" tIns="0" rIns="0" bIns="0" rtlCol="0" anchor="t" anchorCtr="0">
+            <a:noAutofit/>
+          </a:bodyPr>
+          <a:lstStyle/>
+          <a:p>
+            <a:r>
+              <a:rPr lang="en-GB" sz="900">
+                <a:solidFill>
+                  <a:srgbClr val="000000"/>
+                </a:solidFill>
+                <a:latin typeface="DM Sans ExtraBold"/>
+              </a:rPr>
+              <a:t>HOW THEY FIRST HEARD ABOUT PB HEALTH</a:t>
+            </a:r>
+            <a:endParaRPr lang="en-IN" sz="900">
+              <a:solidFill>
+                <a:srgbClr val="000000"/>
+              </a:solidFill>
+              <a:latin typeface="DM Sans ExtraBold"/>
+            </a:endParaRPr>
+          </a:p>
+        </p:txBody>
+      </p:sp>
+      <p:pic>
+        <p:nvPicPr>
+          <p:cNvPr id="4" name="Picture 3" descr="footer-gradient.png">
+            <a:extLst>
+              <a:ext uri="{FF2B5EF4-FFF2-40B4-BE49-F238E27FC236}">
+                <a16:creationId xmlns:a16="http://schemas.microsoft.com/office/drawing/2014/main" id="{07CD63EE-4FCA-0F03-55C7-9D4648F89DDE}"/>
+              </a:ext>
+            </a:extLst>
+          </p:cNvPr>
+          <p:cNvPicPr>
+            <a:picLocks noChangeAspect="1"/>
+          </p:cNvPicPr>
+          <p:nvPr/>
+        </p:nvPicPr>
+        <p:blipFill>
+          <a:blip r:embed="rId2"/>
+          <a:stretch>
+            <a:fillRect/>
+          </a:stretch>
+        </p:blipFill>
+        <p:spPr>
+          <a:xfrm>
+            <a:off x="0" y="5056632"/>
+            <a:ext cx="9144000" cy="91440"/>
+          </a:xfrm>
+          <a:prstGeom prst="rect">
+            <a:avLst/>
+          </a:prstGeom>
+        </p:spPr>
+      </p:pic>
+      <p:pic>
+        <p:nvPicPr>
+          <p:cNvPr id="12" name="Picture 11" descr="accent-bar.png">
+            <a:extLst>
+              <a:ext uri="{FF2B5EF4-FFF2-40B4-BE49-F238E27FC236}">
+                <a16:creationId xmlns:a16="http://schemas.microsoft.com/office/drawing/2014/main" id="{4E66AF87-7625-E3CB-46A7-267C6F1CC086}"/>
+              </a:ext>
+            </a:extLst>
+          </p:cNvPr>
+          <p:cNvPicPr>
+            <a:picLocks noChangeAspect="1"/>
+          </p:cNvPicPr>
+          <p:nvPr/>
+        </p:nvPicPr>
+        <p:blipFill>
+          <a:blip r:embed="rId3"/>
+          <a:stretch>
+            <a:fillRect/>
+          </a:stretch>
+        </p:blipFill>
+        <p:spPr>
+          <a:xfrm>
+            <a:off x="398780" y="670347"/>
+            <a:ext cx="8430260" cy="54864"/>
+          </a:xfrm>
+          <a:prstGeom prst="rect">
+            <a:avLst/>
+          </a:prstGeom>
+        </p:spPr>
+      </p:pic>
+      <p:graphicFrame>
+        <p:nvGraphicFramePr>
+          <p:cNvPr id="23" name="Chart People surveyed by building"/>
+          <p:cNvGraphicFramePr>
+            <a:graphicFrameLocks noGrp="1"/>
+          </p:cNvGraphicFramePr>
+          <p:nvPr/>
+        </p:nvGraphicFramePr>
+        <p:xfrm>
+          <a:off x="533400" y="1097280"/>
+          <a:ext cx="4069080" cy="3520440"/>
+        </p:xfrm>
+        <a:graphic>
+          <a:graphicData uri="http://schemas.openxmlformats.org/drawingml/2006/chart">
+            <c:chart xmlns:c="http://schemas.openxmlformats.org/drawingml/2006/chart" r:id="rId4"/>
+          </a:graphicData>
+        </a:graphic>
+      </p:graphicFrame>
+      <p:graphicFrame>
+        <p:nvGraphicFramePr>
+          <p:cNvPr id="24" name="Chart How they heard"/>
+          <p:cNvGraphicFramePr>
+            <a:graphicFrameLocks noGrp="1"/>
+          </p:cNvGraphicFramePr>
+          <p:nvPr/>
+        </p:nvGraphicFramePr>
+        <p:xfrm>
+          <a:off x="5013960" y="1097280"/>
+          <a:ext cx="3596640" cy="3520440"/>
+        </p:xfrm>
+        <a:graphic>
+          <a:graphicData uri="http://schemas.openxmlformats.org/drawingml/2006/chart">
+            <c:chart xmlns:c="http://schemas.openxmlformats.org/drawingml/2006/chart" r:id="rId5"/>
+          </a:graphicData>
+        </a:graphic>
+      </p:graphicFrame>
+      <p:sp>
+        <p:nvSpPr>
+          <p:cNvPr id="10" name="Footnote">
             <a:extLst>
               <a:ext uri="{FF2B5EF4-FFF2-40B4-BE49-F238E27FC236}">
                 <a16:creationId xmlns:a16="http://schemas.microsoft.com/office/drawing/2014/main" id="{DFA84389-5132-406E-8999-14D4F1F2C4EB}"/>
@@ -3785,8 +4109,8 @@
         </p:nvSpPr>
         <p:spPr>
           <a:xfrm>
-            <a:off x="533400" y="1320800"/>
-            <a:ext cx="2011680" cy="203200"/>
+            <a:off x="533400" y="4791456"/>
+            <a:ext cx="8077200" cy="150000"/>
           </a:xfrm>
           <a:prstGeom prst="rect">
             <a:avLst/>
@@ -3800,23 +4124,59 @@
           <a:lstStyle/>
           <a:p>
             <a:r>
-              <a:rPr lang="en-IN" sz="1100">
+              <a:rPr lang="en-IN" sz="800">
                 <a:solidFill>
                   <a:srgbClr val="666666"/>
                 </a:solidFill>
                 <a:latin typeface="DM Sans"/>
               </a:rPr>
-              <a:t>responses in 4 buildings</a:t>
+              <a:t>Survey on 22 Oct 2026, 62 people. The building chart leaves out 5 people from P-135 (4) and P-113 (1). How they heard counts the 60 who knew about the hospital.</a:t>
             </a:r>
           </a:p>
         </p:txBody>
       </p:sp>
-      <p:sp>
-        <p:nvSpPr>
-          <p:cNvPr id="11" name="TextBox 10">
+    </p:spTree>
+    <p:extLst>
+      <p:ext uri="{BB962C8B-B14F-4D97-AF65-F5344CB8AC3E}">
+        <p14:creationId xmlns:p14="http://schemas.microsoft.com/office/powerpoint/2010/main" val="3388007066"/>
+      </p:ext>
+    </p:extLst>
+  </p:cSld>
+  <p:clrMapOvr>
+    <a:masterClrMapping/>
+  </p:clrMapOvr>
+</p:sld>
+</file>
+
+<file path=ppt/slides/slide2.xml><?xml version="1.0" encoding="utf-8"?>
+<p:sld xmlns:a="http://schemas.openxmlformats.org/drawingml/2006/main" xmlns:r="http://schemas.openxmlformats.org/officeDocument/2006/relationships" xmlns:p="http://schemas.openxmlformats.org/presentationml/2006/main">
+  <p:cSld>
+    <p:spTree>
+      <p:nvGrpSpPr>
+        <p:cNvPr id="1" name="">
+          <a:extLst>
+            <a:ext uri="{FF2B5EF4-FFF2-40B4-BE49-F238E27FC236}">
+              <a16:creationId xmlns:a16="http://schemas.microsoft.com/office/drawing/2014/main" id="{12F601AA-8799-E1FC-7C8C-0891EEFB6D20}"/>
+            </a:ext>
+          </a:extLst>
+        </p:cNvPr>
+        <p:cNvGrpSpPr/>
+        <p:nvPr/>
+      </p:nvGrpSpPr>
+      <p:grpSpPr>
+        <a:xfrm>
+          <a:off x="0" y="0"/>
+          <a:ext cx="0" cy="0"/>
+          <a:chOff x="0" y="0"/>
+          <a:chExt cx="0" cy="0"/>
+        </a:xfrm>
+      </p:grpSpPr>
+      <p:sp>
+        <p:nvSpPr>
+          <p:cNvPr id="2" name="TextBox 1">
             <a:extLst>
               <a:ext uri="{FF2B5EF4-FFF2-40B4-BE49-F238E27FC236}">
-                <a16:creationId xmlns:a16="http://schemas.microsoft.com/office/drawing/2014/main" id="{ACDB843F-302B-4B3E-851F-F40C2E776B71}"/>
+                <a16:creationId xmlns:a16="http://schemas.microsoft.com/office/drawing/2014/main" id="{33BCFFC0-586F-871E-09C6-3368EAD85CC6}"/>
               </a:ext>
             </a:extLst>
           </p:cNvPr>
@@ -3825,8 +4185,8 @@
         </p:nvSpPr>
         <p:spPr>
           <a:xfrm>
-            <a:off x="2590800" y="863600"/>
-            <a:ext cx="1905000" cy="431800"/>
+            <a:off x="533400" y="165100"/>
+            <a:ext cx="5588000" cy="165100"/>
           </a:xfrm>
           <a:prstGeom prst="rect">
             <a:avLst/>
@@ -3834,29 +4194,29 @@
           <a:noFill/>
         </p:spPr>
         <p:txBody>
-          <a:bodyPr vertOverflow="overflow" vert="horz" wrap="square" lIns="0" tIns="0" rIns="0" bIns="0" rtlCol="0" anchor="b" anchorCtr="0">
+          <a:bodyPr vertOverflow="overflow" vert="horz" wrap="square" lIns="0" tIns="0" rIns="0" bIns="0" rtlCol="0" anchor="t" anchorCtr="0">
             <a:noAutofit/>
           </a:bodyPr>
           <a:lstStyle/>
           <a:p>
             <a:r>
-              <a:rPr lang="en-IN" sz="2800">
+              <a:rPr lang="en-IN" sz="900">
                 <a:solidFill>
                   <a:srgbClr val="EA4722"/>
                 </a:solidFill>
-                <a:latin typeface="Nunito ExtraBold"/>
+                <a:latin typeface="DM Sans ExtraBold"/>
               </a:rPr>
-              <a:t>18</a:t>
+              <a:t>PB HEALTH  ·  EMPLOYEE AWARENESS SURVEY</a:t>
             </a:r>
           </a:p>
         </p:txBody>
       </p:sp>
       <p:sp>
         <p:nvSpPr>
-          <p:cNvPr id="13" name="TextBox 12">
+          <p:cNvPr id="3" name="TextBox 2">
             <a:extLst>
               <a:ext uri="{FF2B5EF4-FFF2-40B4-BE49-F238E27FC236}">
-                <a16:creationId xmlns:a16="http://schemas.microsoft.com/office/drawing/2014/main" id="{7A8A9C49-0FF0-485B-971E-48FF5D2045CD}"/>
+                <a16:creationId xmlns:a16="http://schemas.microsoft.com/office/drawing/2014/main" id="{74E00F0D-A742-5411-1DF2-52DE292A0FEF}"/>
               </a:ext>
             </a:extLst>
           </p:cNvPr>
@@ -3865,8 +4225,8 @@
         </p:nvSpPr>
         <p:spPr>
           <a:xfrm>
-            <a:off x="2590800" y="1320800"/>
-            <a:ext cx="2011680" cy="203200"/>
+            <a:off x="533400" y="330200"/>
+            <a:ext cx="7874000" cy="330200"/>
           </a:xfrm>
           <a:prstGeom prst="rect">
             <a:avLst/>
@@ -3874,243 +4234,32 @@
           <a:noFill/>
         </p:spPr>
         <p:txBody>
-          <a:bodyPr vertOverflow="overflow" vert="horz" wrap="square" lIns="0" tIns="0" rIns="0" bIns="0" rtlCol="0" anchor="t" anchorCtr="0">
-            <a:noAutofit/>
-          </a:bodyPr>
-          <a:lstStyle/>
-          <a:p>
-            <a:r>
-              <a:rPr lang="en-IN" sz="1100">
-                <a:solidFill>
-                  <a:srgbClr val="666666"/>
-                </a:solidFill>
-                <a:latin typeface="DM Sans"/>
-              </a:rPr>
-              <a:t>floors covered</a:t>
-            </a:r>
-          </a:p>
-        </p:txBody>
-      </p:sp>
-      <p:sp>
-        <p:nvSpPr>
-          <p:cNvPr id="14" name="TextBox 13">
-            <a:extLst>
-              <a:ext uri="{FF2B5EF4-FFF2-40B4-BE49-F238E27FC236}">
-                <a16:creationId xmlns:a16="http://schemas.microsoft.com/office/drawing/2014/main" id="{8F744575-D490-4F48-94B1-D0F6B4617010}"/>
-              </a:ext>
-            </a:extLst>
-          </p:cNvPr>
-          <p:cNvSpPr txBox="1"/>
-          <p:nvPr/>
-        </p:nvSpPr>
-        <p:spPr>
-          <a:xfrm>
-            <a:off x="4648200" y="863600"/>
-            <a:ext cx="1905000" cy="431800"/>
-          </a:xfrm>
-          <a:prstGeom prst="rect">
-            <a:avLst/>
-          </a:prstGeom>
-          <a:noFill/>
-        </p:spPr>
-        <p:txBody>
           <a:bodyPr vertOverflow="overflow" vert="horz" wrap="square" lIns="0" tIns="0" rIns="0" bIns="0" rtlCol="0" anchor="b" anchorCtr="0">
             <a:noAutofit/>
           </a:bodyPr>
           <a:lstStyle/>
           <a:p>
             <a:r>
-              <a:rPr lang="en-IN" sz="2800">
+              <a:rPr lang="en-GB" sz="1900">
                 <a:solidFill>
-                  <a:srgbClr val="EA4722"/>
+                  <a:srgbClr val="000000"/>
                 </a:solidFill>
                 <a:latin typeface="Nunito ExtraBold"/>
               </a:rPr>
-              <a:t>1,953</a:t>
+              <a:t>People know the hospital, but not its benefits</a:t>
             </a:r>
-          </a:p>
-        </p:txBody>
-      </p:sp>
-      <p:sp>
-        <p:nvSpPr>
-          <p:cNvPr id="15" name="TextBox 14">
-            <a:extLst>
-              <a:ext uri="{FF2B5EF4-FFF2-40B4-BE49-F238E27FC236}">
-                <a16:creationId xmlns:a16="http://schemas.microsoft.com/office/drawing/2014/main" id="{DF9C92D8-4F68-405A-BBD7-956A4934A822}"/>
-              </a:ext>
-            </a:extLst>
-          </p:cNvPr>
-          <p:cNvSpPr txBox="1"/>
-          <p:nvPr/>
-        </p:nvSpPr>
-        <p:spPr>
-          <a:xfrm>
-            <a:off x="4648200" y="1320800"/>
-            <a:ext cx="2011680" cy="203200"/>
-          </a:xfrm>
-          <a:prstGeom prst="rect">
-            <a:avLst/>
-          </a:prstGeom>
-          <a:noFill/>
-        </p:spPr>
-        <p:txBody>
-          <a:bodyPr vertOverflow="overflow" vert="horz" wrap="square" lIns="0" tIns="0" rIns="0" bIns="0" rtlCol="0" anchor="t" anchorCtr="0">
-            <a:noAutofit/>
-          </a:bodyPr>
-          <a:lstStyle/>
-          <a:p>
-            <a:r>
-              <a:rPr lang="en-GB" sz="1100">
-                <a:solidFill>
-                  <a:srgbClr val="666666"/>
-                </a:solidFill>
-                <a:latin typeface="DM Sans"/>
-              </a:rPr>
-              <a:t>seats in these buildings</a:t>
-            </a:r>
-            <a:endParaRPr lang="en-IN" sz="1100">
+            <a:endParaRPr lang="en-IN" sz="1900">
               <a:solidFill>
-                <a:srgbClr val="666666"/>
+                <a:srgbClr val="000000"/>
               </a:solidFill>
-              <a:latin typeface="DM Sans"/>
+              <a:latin typeface="Nunito ExtraBold"/>
             </a:endParaRPr>
           </a:p>
         </p:txBody>
       </p:sp>
       <p:sp>
         <p:nvSpPr>
-          <p:cNvPr id="16" name="TextBox 15">
-            <a:extLst>
-              <a:ext uri="{FF2B5EF4-FFF2-40B4-BE49-F238E27FC236}">
-                <a16:creationId xmlns:a16="http://schemas.microsoft.com/office/drawing/2014/main" id="{4BD01BBB-493C-4695-8F15-0098C2FF6A50}"/>
-              </a:ext>
-            </a:extLst>
-          </p:cNvPr>
-          <p:cNvSpPr txBox="1"/>
-          <p:nvPr/>
-        </p:nvSpPr>
-        <p:spPr>
-          <a:xfrm>
-            <a:off x="6705600" y="863600"/>
-            <a:ext cx="1905000" cy="431800"/>
-          </a:xfrm>
-          <a:prstGeom prst="rect">
-            <a:avLst/>
-          </a:prstGeom>
-          <a:noFill/>
-        </p:spPr>
-        <p:txBody>
-          <a:bodyPr vertOverflow="overflow" vert="horz" wrap="square" lIns="0" tIns="0" rIns="0" bIns="0" rtlCol="0" anchor="b" anchorCtr="0">
-            <a:noAutofit/>
-          </a:bodyPr>
-          <a:lstStyle/>
-          <a:p>
-            <a:r>
-              <a:rPr lang="en-IN" sz="2800">
-                <a:solidFill>
-                  <a:srgbClr val="EA4722"/>
-                </a:solidFill>
-                <a:latin typeface="Nunito ExtraBold"/>
-              </a:rPr>
-              <a:t>2.9%</a:t>
-            </a:r>
-          </a:p>
-        </p:txBody>
-      </p:sp>
-      <p:sp>
-        <p:nvSpPr>
-          <p:cNvPr id="17" name="TextBox 16">
-            <a:extLst>
-              <a:ext uri="{FF2B5EF4-FFF2-40B4-BE49-F238E27FC236}">
-                <a16:creationId xmlns:a16="http://schemas.microsoft.com/office/drawing/2014/main" id="{57594894-A9EE-466D-9DA8-5594E62C7334}"/>
-              </a:ext>
-            </a:extLst>
-          </p:cNvPr>
-          <p:cNvSpPr txBox="1"/>
-          <p:nvPr/>
-        </p:nvSpPr>
-        <p:spPr>
-          <a:xfrm>
-            <a:off x="6705600" y="1320800"/>
-            <a:ext cx="2011680" cy="203200"/>
-          </a:xfrm>
-          <a:prstGeom prst="rect">
-            <a:avLst/>
-          </a:prstGeom>
-          <a:noFill/>
-        </p:spPr>
-        <p:txBody>
-          <a:bodyPr vertOverflow="overflow" vert="horz" wrap="square" lIns="0" tIns="0" rIns="0" bIns="0" rtlCol="0" anchor="t" anchorCtr="0">
-            <a:noAutofit/>
-          </a:bodyPr>
-          <a:lstStyle/>
-          <a:p>
-            <a:r>
-              <a:rPr lang="en-IN" sz="1100">
-                <a:solidFill>
-                  <a:srgbClr val="666666"/>
-                </a:solidFill>
-                <a:latin typeface="DM Sans"/>
-              </a:rPr>
-              <a:t>of seats reached</a:t>
-            </a:r>
-          </a:p>
-        </p:txBody>
-      </p:sp>
-      <p:sp>
-        <p:nvSpPr>
-          <p:cNvPr id="18" name="Rectangle 17">
-            <a:extLst>
-              <a:ext uri="{FF2B5EF4-FFF2-40B4-BE49-F238E27FC236}">
-                <a16:creationId xmlns:a16="http://schemas.microsoft.com/office/drawing/2014/main" id="{1EE0392D-5F01-4E42-A237-6774F1A6B0FC}"/>
-              </a:ext>
-            </a:extLst>
-          </p:cNvPr>
-          <p:cNvSpPr/>
-          <p:nvPr/>
-        </p:nvSpPr>
-        <p:spPr>
-          <a:xfrm>
-            <a:off x="533400" y="1591056"/>
-            <a:ext cx="8077200" cy="9525"/>
-          </a:xfrm>
-          <a:prstGeom prst="rect">
-            <a:avLst/>
-          </a:prstGeom>
-          <a:solidFill>
-            <a:srgbClr val="E0E0E0"/>
-          </a:solidFill>
-          <a:ln w="9525" cap="flat" cmpd="sng" algn="ctr">
-            <a:noFill/>
-            <a:prstDash val="solid"/>
-          </a:ln>
-        </p:spPr>
-        <p:style>
-          <a:lnRef idx="1">
-            <a:schemeClr val="accent1"/>
-          </a:lnRef>
-          <a:fillRef idx="3">
-            <a:schemeClr val="accent1"/>
-          </a:fillRef>
-          <a:effectRef idx="2">
-            <a:schemeClr val="accent1"/>
-          </a:effectRef>
-          <a:fontRef idx="minor">
-            <a:schemeClr val="lt1"/>
-          </a:fontRef>
-        </p:style>
-        <p:txBody>
-          <a:bodyPr vertOverflow="clip" horzOverflow="clip" rtlCol="0" anchor="t"/>
-          <a:lstStyle/>
-          <a:p>
-            <a:pPr algn="l"/>
-            <a:endParaRPr lang="en-IN"/>
-          </a:p>
-        </p:txBody>
-      </p:sp>
-      <p:sp>
-        <p:nvSpPr>
-          <p:cNvPr id="20" name="Label RESPONSES BY BUILDING">
+          <p:cNvPr id="20" name="Label WHAT EMPLOYEES KNOW">
             <a:extLst>
               <a:ext uri="{FF2B5EF4-FFF2-40B4-BE49-F238E27FC236}">
                 <a16:creationId xmlns:a16="http://schemas.microsoft.com/office/drawing/2014/main" id="{00E28BCF-A616-487D-A74F-A1750555F9E9}"/>
@@ -4122,8 +4271,8 @@
         </p:nvSpPr>
         <p:spPr>
           <a:xfrm>
-            <a:off x="530352" y="1700784"/>
-            <a:ext cx="4480560" cy="152400"/>
+            <a:off x="533400" y="896112"/>
+            <a:ext cx="4754880" cy="152400"/>
           </a:xfrm>
           <a:prstGeom prst="rect">
             <a:avLst/>
@@ -4143,7 +4292,7 @@
                 </a:solidFill>
                 <a:latin typeface="DM Sans ExtraBold"/>
               </a:rPr>
-              <a:t>RESPONSES BY BUILDING</a:t>
+              <a:t>WHAT EMPLOYEES KNOW AND DO  ·  % OF PEOPLE IN EACH BUILDING</a:t>
             </a:r>
             <a:endParaRPr lang="en-IN" sz="900">
               <a:solidFill>
@@ -4154,55 +4303,9 @@
           </a:p>
         </p:txBody>
       </p:sp>
-      <p:sp>
-        <p:nvSpPr>
-          <p:cNvPr id="22" name="Label COVERAGE BY BUILDING">
-            <a:extLst>
-              <a:ext uri="{FF2B5EF4-FFF2-40B4-BE49-F238E27FC236}">
-                <a16:creationId xmlns:a16="http://schemas.microsoft.com/office/drawing/2014/main" id="{00E28BCF-A616-487D-A74F-A1750555F9E9}"/>
-              </a:ext>
-            </a:extLst>
-          </p:cNvPr>
-          <p:cNvSpPr txBox="1"/>
-          <p:nvPr/>
-        </p:nvSpPr>
-        <p:spPr>
-          <a:xfrm>
-            <a:off x="5376672" y="1700784"/>
-            <a:ext cx="3233928" cy="152400"/>
-          </a:xfrm>
-          <a:prstGeom prst="rect">
-            <a:avLst/>
-          </a:prstGeom>
-          <a:noFill/>
-        </p:spPr>
-        <p:txBody>
-          <a:bodyPr vertOverflow="overflow" vert="horz" wrap="square" lIns="0" tIns="0" rIns="0" bIns="0" rtlCol="0" anchor="t" anchorCtr="0">
-            <a:noAutofit/>
-          </a:bodyPr>
-          <a:lstStyle/>
-          <a:p>
-            <a:r>
-              <a:rPr lang="en-GB" sz="900">
-                <a:solidFill>
-                  <a:srgbClr val="000000"/>
-                </a:solidFill>
-                <a:latin typeface="DM Sans ExtraBold"/>
-              </a:rPr>
-              <a:t>COVERAGE BY BUILDING</a:t>
-            </a:r>
-            <a:endParaRPr lang="en-IN" sz="900">
-              <a:solidFill>
-                <a:srgbClr val="000000"/>
-              </a:solidFill>
-              <a:latin typeface="DM Sans ExtraBold"/>
-            </a:endParaRPr>
-          </a:p>
-        </p:txBody>
-      </p:sp>
       <p:graphicFrame>
         <p:nvGraphicFramePr>
-          <p:cNvPr id="23" name="Table COVERAGE BY BUILDING">
+          <p:cNvPr id="21" name="Table WHAT EMPLOYEES KNOW">
             <a:extLst>
               <a:ext uri="{FF2B5EF4-FFF2-40B4-BE49-F238E27FC236}">
                 <a16:creationId xmlns:a16="http://schemas.microsoft.com/office/drawing/2014/main" id="{463CAD2E-FEF6-4422-A95C-5F17A77C5A02}"/>
@@ -4215,20 +4318,23 @@
           <p:nvPr/>
         </p:nvGraphicFramePr>
         <p:xfrm>
-          <a:off x="5376672" y="1883664"/>
-          <a:ext cx="3233928" cy="2212848"/>
+          <a:off x="533400" y="1097280"/>
+          <a:ext cx="8077200" cy="3474720"/>
         </p:xfrm>
         <a:graphic>
           <a:graphicData uri="http://schemas.openxmlformats.org/drawingml/2006/table">
             <a:tbl>
               <a:tblPr/>
               <a:tblGrid>
-                <a:gridCol w="1097280"/>
-                <a:gridCol w="712216"/>
-                <a:gridCol w="712216"/>
-                <a:gridCol w="712216"/>
+                <a:gridCol w="2011680"/>
+                <a:gridCol w="548640"/>
+                <a:gridCol w="548640"/>
+                <a:gridCol w="548640"/>
+                <a:gridCol w="548640"/>
+                <a:gridCol w="548640"/>
+                <a:gridCol w="3322320"/>
               </a:tblGrid>
-              <a:tr h="365760">
+              <a:tr h="384048">
                 <a:tc>
                   <a:txBody>
                     <a:bodyPr/>
@@ -4257,7 +4363,7 @@
                     <a:bodyPr/>
                     <a:lstStyle/>
                     <a:p>
-                      <a:pPr algn="r"/>
+                      <a:pPr algn="ctr"/>
                       <a:r>
                         <a:rPr lang="en-IN" sz="900" b="0">
                           <a:solidFill>
@@ -4265,11 +4371,11 @@
                           </a:solidFill>
                           <a:latin typeface="DM Sans ExtraBold"/>
                         </a:rPr>
-                        <a:t>Responses</a:t>
+                        <a:t>P-84</a:t>
                       </a:r>
                     </a:p>
                     <a:p>
-                      <a:pPr algn="r"/>
+                      <a:pPr algn="ctr"/>
                       <a:r>
                         <a:rPr lang="en-IN" sz="1000" b="1">
                           <a:solidFill>
@@ -4277,7 +4383,7 @@
                           </a:solidFill>
                           <a:latin typeface="DM Sans"/>
                         </a:rPr>
-                        <a:t>57</a:t>
+                        <a:t>23</a:t>
                       </a:r>
                     </a:p>
                   </a:txBody>
@@ -4300,7 +4406,7 @@
                     <a:bodyPr/>
                     <a:lstStyle/>
                     <a:p>
-                      <a:pPr algn="r"/>
+                      <a:pPr algn="ctr"/>
                       <a:r>
                         <a:rPr lang="en-IN" sz="900" b="0">
                           <a:solidFill>
@@ -4308,11 +4414,11 @@
                           </a:solidFill>
                           <a:latin typeface="DM Sans ExtraBold"/>
                         </a:rPr>
-                        <a:t>Seats</a:t>
+                        <a:t>P-120</a:t>
                       </a:r>
                     </a:p>
                     <a:p>
-                      <a:pPr algn="r"/>
+                      <a:pPr algn="ctr"/>
                       <a:r>
                         <a:rPr lang="en-IN" sz="1000" b="1">
                           <a:solidFill>
@@ -4320,7 +4426,7 @@
                           </a:solidFill>
                           <a:latin typeface="DM Sans"/>
                         </a:rPr>
-                        <a:t>1,953</a:t>
+                        <a:t>13</a:t>
                       </a:r>
                     </a:p>
                   </a:txBody>
@@ -4343,7 +4449,7 @@
                     <a:bodyPr/>
                     <a:lstStyle/>
                     <a:p>
-                      <a:pPr algn="r"/>
+                      <a:pPr algn="ctr"/>
                       <a:r>
                         <a:rPr lang="en-IN" sz="900" b="0">
                           <a:solidFill>
@@ -4351,11 +4457,11 @@
                           </a:solidFill>
                           <a:latin typeface="DM Sans ExtraBold"/>
                         </a:rPr>
-                        <a:t>Coverage</a:t>
+                        <a:t>P-116</a:t>
                       </a:r>
                     </a:p>
                     <a:p>
-                      <a:pPr algn="r"/>
+                      <a:pPr algn="ctr"/>
                       <a:r>
                         <a:rPr lang="en-IN" sz="1000" b="1">
                           <a:solidFill>
@@ -4363,7 +4469,7 @@
                           </a:solidFill>
                           <a:latin typeface="DM Sans"/>
                         </a:rPr>
-                        <a:t>2.9%</a:t>
+                        <a:t>11</a:t>
                       </a:r>
                     </a:p>
                   </a:txBody>
@@ -4381,9 +4487,126 @@
                     <a:lnBlToTr w="0"/>
                   </a:tcPr>
                 </a:tc>
+                <a:tc>
+                  <a:txBody>
+                    <a:bodyPr/>
+                    <a:lstStyle/>
+                    <a:p>
+                      <a:pPr algn="ctr"/>
+                      <a:r>
+                        <a:rPr lang="en-IN" sz="900" b="0">
+                          <a:solidFill>
+                            <a:srgbClr val="000000"/>
+                          </a:solidFill>
+                          <a:latin typeface="DM Sans ExtraBold"/>
+                        </a:rPr>
+                        <a:t>P-119</a:t>
+                      </a:r>
+                    </a:p>
+                    <a:p>
+                      <a:pPr algn="ctr"/>
+                      <a:r>
+                        <a:rPr lang="en-IN" sz="1000" b="1">
+                          <a:solidFill>
+                            <a:srgbClr val="EA4722"/>
+                          </a:solidFill>
+                          <a:latin typeface="DM Sans"/>
+                        </a:rPr>
+                        <a:t>10</a:t>
+                      </a:r>
+                    </a:p>
+                  </a:txBody>
+                  <a:tcPr marL="45720" marR="54864" marT="22860" marB="22860" anchor="b">
+                    <a:lnL w="0"/>
+                    <a:lnR w="0"/>
+                    <a:lnT w="0"/>
+                    <a:lnB w="12700" cap="flat" cmpd="sng" algn="ctr">
+                      <a:solidFill>
+                        <a:srgbClr val="1A1A1A"/>
+                      </a:solidFill>
+                      <a:prstDash val="solid"/>
+                    </a:lnB>
+                    <a:lnTlToBr w="0"/>
+                    <a:lnBlToTr w="0"/>
+                  </a:tcPr>
+                </a:tc>
+                <a:tc>
+                  <a:txBody>
+                    <a:bodyPr/>
+                    <a:lstStyle/>
+                    <a:p>
+                      <a:pPr algn="ctr"/>
+                      <a:r>
+                        <a:rPr lang="en-IN" sz="900" b="0">
+                          <a:solidFill>
+                            <a:srgbClr val="000000"/>
+                          </a:solidFill>
+                          <a:latin typeface="DM Sans ExtraBold"/>
+                        </a:rPr>
+                        <a:t>All</a:t>
+                      </a:r>
+                    </a:p>
+                    <a:p>
+                      <a:pPr algn="ctr"/>
+                      <a:r>
+                        <a:rPr lang="en-IN" sz="1000" b="1">
+                          <a:solidFill>
+                            <a:srgbClr val="EA4722"/>
+                          </a:solidFill>
+                          <a:latin typeface="DM Sans"/>
+                        </a:rPr>
+                        <a:t>62</a:t>
+                      </a:r>
+                    </a:p>
+                  </a:txBody>
+                  <a:tcPr marL="45720" marR="54864" marT="22860" marB="22860" anchor="b">
+                    <a:lnL w="0"/>
+                    <a:lnR w="0"/>
+                    <a:lnT w="0"/>
+                    <a:lnB w="12700" cap="flat" cmpd="sng" algn="ctr">
+                      <a:solidFill>
+                        <a:srgbClr val="1A1A1A"/>
+                      </a:solidFill>
+                      <a:prstDash val="solid"/>
+                    </a:lnB>
+                    <a:lnTlToBr w="0"/>
+                    <a:lnBlToTr w="0"/>
+                  </a:tcPr>
+                </a:tc>
+                <a:tc>
+                  <a:txBody>
+                    <a:bodyPr/>
+                    <a:lstStyle/>
+                    <a:p>
+                      <a:pPr algn="l"/>
+                      <a:r>
+                        <a:rPr lang="en-IN" sz="900" b="0">
+                          <a:solidFill>
+                            <a:srgbClr val="000000"/>
+                          </a:solidFill>
+                          <a:latin typeface="DM Sans ExtraBold"/>
+                        </a:rPr>
+                        <a:t>WHAT IT TELLS US</a:t>
+                      </a:r>
+                    </a:p>
+                  </a:txBody>
+                  <a:tcPr marL="182880" marR="54864" marT="22860" marB="22860" anchor="b">
+                    <a:lnL w="0"/>
+                    <a:lnR w="0"/>
+                    <a:lnT w="0"/>
+                    <a:lnB w="12700" cap="flat" cmpd="sng" algn="ctr">
+                      <a:solidFill>
+                        <a:srgbClr val="1A1A1A"/>
+                      </a:solidFill>
+                      <a:prstDash val="solid"/>
+                    </a:lnB>
+                    <a:lnTlToBr w="0"/>
+                    <a:lnBlToTr w="0"/>
+                  </a:tcPr>
+                </a:tc>
               </a:tr>
-              <a:tr h="173736">
-                <a:tc gridSpan="4">
+              <a:tr h="201168">
+                <a:tc gridSpan="7">
                   <a:txBody>
                     <a:bodyPr/>
                     <a:lstStyle/>
@@ -4396,7 +4619,7 @@
                           </a:solidFill>
                           <a:latin typeface="DM Sans ExtraBold"/>
                         </a:rPr>
-                        <a:t>RESPONSES AND SEATS</a:t>
+                        <a:t>THE HOSPITAL</a:t>
                       </a:r>
                     </a:p>
                   </a:txBody>
@@ -4439,14 +4662,329 @@
                   </a:txBody>
                   <a:tcPr/>
                 </a:tc>
+                <a:tc hMerge="1">
+                  <a:txBody>
+                    <a:bodyPr/>
+                    <a:lstStyle/>
+                    <a:p>
+                      <a:endParaRPr lang="en-IN"/>
+                    </a:p>
+                  </a:txBody>
+                  <a:tcPr/>
+                </a:tc>
+                <a:tc hMerge="1">
+                  <a:txBody>
+                    <a:bodyPr/>
+                    <a:lstStyle/>
+                    <a:p>
+                      <a:endParaRPr lang="en-IN"/>
+                    </a:p>
+                  </a:txBody>
+                  <a:tcPr/>
+                </a:tc>
+                <a:tc hMerge="1">
+                  <a:txBody>
+                    <a:bodyPr/>
+                    <a:lstStyle/>
+                    <a:p>
+                      <a:endParaRPr lang="en-IN"/>
+                    </a:p>
+                  </a:txBody>
+                  <a:tcPr/>
+                </a:tc>
               </a:tr>
-              <a:tr h="187452">
+              <a:tr h="310896">
                 <a:tc>
                   <a:txBody>
                     <a:bodyPr/>
                     <a:lstStyle/>
                     <a:p>
                       <a:pPr algn="l"/>
+                      <a:r>
+                        <a:rPr lang="en-IN" sz="1050" b="0">
+                          <a:solidFill>
+                            <a:srgbClr val="1A1A1A"/>
+                          </a:solidFill>
+                          <a:latin typeface="DM Sans"/>
+                        </a:rPr>
+                        <a:t>Knows about the hospital</a:t>
+                      </a:r>
+                    </a:p>
+                  </a:txBody>
+                  <a:tcPr marL="45720" marR="54864" marT="22860" marB="22860" anchor="ctr">
+                    <a:lnL w="0"/>
+                    <a:lnR w="0"/>
+                    <a:lnT w="0"/>
+                    <a:lnB w="9525" cap="flat" cmpd="sng" algn="ctr">
+                      <a:solidFill>
+                        <a:srgbClr val="E0E0E0"/>
+                      </a:solidFill>
+                      <a:prstDash val="solid"/>
+                    </a:lnB>
+                    <a:lnTlToBr w="0"/>
+                    <a:lnBlToTr w="0"/>
+                  </a:tcPr>
+                </a:tc>
+                <a:tc>
+                  <a:txBody>
+                    <a:bodyPr/>
+                    <a:lstStyle/>
+                    <a:p>
+                      <a:pPr algn="ctr"/>
+                      <a:r>
+                        <a:rPr lang="en-IN" sz="1050" b="0">
+                          <a:solidFill>
+                            <a:srgbClr val="1A1A1A"/>
+                          </a:solidFill>
+                          <a:latin typeface="DM Sans"/>
+                        </a:rPr>
+                        <a:t>100%</a:t>
+                      </a:r>
+                    </a:p>
+                  </a:txBody>
+                  <a:tcPr marL="45720" marR="54864" marT="22860" marB="22860" anchor="ctr">
+                    <a:lnL w="25400" cap="flat" cmpd="sng" algn="ctr">
+                      <a:solidFill>
+                        <a:srgbClr val="FFFFFF"/>
+                      </a:solidFill>
+                      <a:prstDash val="solid"/>
+                    </a:lnL>
+                    <a:lnR w="25400" cap="flat" cmpd="sng" algn="ctr">
+                      <a:solidFill>
+                        <a:srgbClr val="FFFFFF"/>
+                      </a:solidFill>
+                      <a:prstDash val="solid"/>
+                    </a:lnR>
+                    <a:lnT w="25400" cap="flat" cmpd="sng" algn="ctr">
+                      <a:solidFill>
+                        <a:srgbClr val="FFFFFF"/>
+                      </a:solidFill>
+                      <a:prstDash val="solid"/>
+                    </a:lnT>
+                    <a:lnB w="25400" cap="flat" cmpd="sng" algn="ctr">
+                      <a:solidFill>
+                        <a:srgbClr val="FFFFFF"/>
+                      </a:solidFill>
+                      <a:prstDash val="solid"/>
+                    </a:lnB>
+                    <a:lnTlToBr w="0"/>
+                    <a:lnBlToTr w="0"/>
+                    <a:solidFill>
+                      <a:srgbClr val="D6E4F0"/>
+                    </a:solidFill>
+                  </a:tcPr>
+                </a:tc>
+                <a:tc>
+                  <a:txBody>
+                    <a:bodyPr/>
+                    <a:lstStyle/>
+                    <a:p>
+                      <a:pPr algn="ctr"/>
+                      <a:r>
+                        <a:rPr lang="en-IN" sz="1050" b="0">
+                          <a:solidFill>
+                            <a:srgbClr val="1A1A1A"/>
+                          </a:solidFill>
+                          <a:latin typeface="DM Sans"/>
+                        </a:rPr>
+                        <a:t>100%</a:t>
+                      </a:r>
+                    </a:p>
+                  </a:txBody>
+                  <a:tcPr marL="45720" marR="54864" marT="22860" marB="22860" anchor="ctr">
+                    <a:lnL w="25400" cap="flat" cmpd="sng" algn="ctr">
+                      <a:solidFill>
+                        <a:srgbClr val="FFFFFF"/>
+                      </a:solidFill>
+                      <a:prstDash val="solid"/>
+                    </a:lnL>
+                    <a:lnR w="25400" cap="flat" cmpd="sng" algn="ctr">
+                      <a:solidFill>
+                        <a:srgbClr val="FFFFFF"/>
+                      </a:solidFill>
+                      <a:prstDash val="solid"/>
+                    </a:lnR>
+                    <a:lnT w="25400" cap="flat" cmpd="sng" algn="ctr">
+                      <a:solidFill>
+                        <a:srgbClr val="FFFFFF"/>
+                      </a:solidFill>
+                      <a:prstDash val="solid"/>
+                    </a:lnT>
+                    <a:lnB w="25400" cap="flat" cmpd="sng" algn="ctr">
+                      <a:solidFill>
+                        <a:srgbClr val="FFFFFF"/>
+                      </a:solidFill>
+                      <a:prstDash val="solid"/>
+                    </a:lnB>
+                    <a:lnTlToBr w="0"/>
+                    <a:lnBlToTr w="0"/>
+                    <a:solidFill>
+                      <a:srgbClr val="D6E4F0"/>
+                    </a:solidFill>
+                  </a:tcPr>
+                </a:tc>
+                <a:tc>
+                  <a:txBody>
+                    <a:bodyPr/>
+                    <a:lstStyle/>
+                    <a:p>
+                      <a:pPr algn="ctr"/>
+                      <a:r>
+                        <a:rPr lang="en-IN" sz="1050" b="0">
+                          <a:solidFill>
+                            <a:srgbClr val="1A1A1A"/>
+                          </a:solidFill>
+                          <a:latin typeface="DM Sans"/>
+                        </a:rPr>
+                        <a:t>91%</a:t>
+                      </a:r>
+                    </a:p>
+                  </a:txBody>
+                  <a:tcPr marL="45720" marR="54864" marT="22860" marB="22860" anchor="ctr">
+                    <a:lnL w="25400" cap="flat" cmpd="sng" algn="ctr">
+                      <a:solidFill>
+                        <a:srgbClr val="FFFFFF"/>
+                      </a:solidFill>
+                      <a:prstDash val="solid"/>
+                    </a:lnL>
+                    <a:lnR w="25400" cap="flat" cmpd="sng" algn="ctr">
+                      <a:solidFill>
+                        <a:srgbClr val="FFFFFF"/>
+                      </a:solidFill>
+                      <a:prstDash val="solid"/>
+                    </a:lnR>
+                    <a:lnT w="25400" cap="flat" cmpd="sng" algn="ctr">
+                      <a:solidFill>
+                        <a:srgbClr val="FFFFFF"/>
+                      </a:solidFill>
+                      <a:prstDash val="solid"/>
+                    </a:lnT>
+                    <a:lnB w="25400" cap="flat" cmpd="sng" algn="ctr">
+                      <a:solidFill>
+                        <a:srgbClr val="FFFFFF"/>
+                      </a:solidFill>
+                      <a:prstDash val="solid"/>
+                    </a:lnB>
+                    <a:lnTlToBr w="0"/>
+                    <a:lnBlToTr w="0"/>
+                    <a:solidFill>
+                      <a:srgbClr val="D6E4F0"/>
+                    </a:solidFill>
+                  </a:tcPr>
+                </a:tc>
+                <a:tc>
+                  <a:txBody>
+                    <a:bodyPr/>
+                    <a:lstStyle/>
+                    <a:p>
+                      <a:pPr algn="ctr"/>
+                      <a:r>
+                        <a:rPr lang="en-IN" sz="1050" b="0">
+                          <a:solidFill>
+                            <a:srgbClr val="1A1A1A"/>
+                          </a:solidFill>
+                          <a:latin typeface="DM Sans"/>
+                        </a:rPr>
+                        <a:t>100%</a:t>
+                      </a:r>
+                    </a:p>
+                  </a:txBody>
+                  <a:tcPr marL="45720" marR="54864" marT="22860" marB="22860" anchor="ctr">
+                    <a:lnL w="25400" cap="flat" cmpd="sng" algn="ctr">
+                      <a:solidFill>
+                        <a:srgbClr val="FFFFFF"/>
+                      </a:solidFill>
+                      <a:prstDash val="solid"/>
+                    </a:lnL>
+                    <a:lnR w="25400" cap="flat" cmpd="sng" algn="ctr">
+                      <a:solidFill>
+                        <a:srgbClr val="FFFFFF"/>
+                      </a:solidFill>
+                      <a:prstDash val="solid"/>
+                    </a:lnR>
+                    <a:lnT w="25400" cap="flat" cmpd="sng" algn="ctr">
+                      <a:solidFill>
+                        <a:srgbClr val="FFFFFF"/>
+                      </a:solidFill>
+                      <a:prstDash val="solid"/>
+                    </a:lnT>
+                    <a:lnB w="25400" cap="flat" cmpd="sng" algn="ctr">
+                      <a:solidFill>
+                        <a:srgbClr val="FFFFFF"/>
+                      </a:solidFill>
+                      <a:prstDash val="solid"/>
+                    </a:lnB>
+                    <a:lnTlToBr w="0"/>
+                    <a:lnBlToTr w="0"/>
+                    <a:solidFill>
+                      <a:srgbClr val="D6E4F0"/>
+                    </a:solidFill>
+                  </a:tcPr>
+                </a:tc>
+                <a:tc>
+                  <a:txBody>
+                    <a:bodyPr/>
+                    <a:lstStyle/>
+                    <a:p>
+                      <a:pPr algn="ctr"/>
+                      <a:r>
+                        <a:rPr lang="en-IN" sz="1050" b="1">
+                          <a:solidFill>
+                            <a:srgbClr val="1A1A1A"/>
+                          </a:solidFill>
+                          <a:latin typeface="DM Sans"/>
+                        </a:rPr>
+                        <a:t>97%</a:t>
+                      </a:r>
+                    </a:p>
+                  </a:txBody>
+                  <a:tcPr marL="45720" marR="54864" marT="22860" marB="22860" anchor="ctr">
+                    <a:lnL w="25400" cap="flat" cmpd="sng" algn="ctr">
+                      <a:solidFill>
+                        <a:srgbClr val="FFFFFF"/>
+                      </a:solidFill>
+                      <a:prstDash val="solid"/>
+                    </a:lnL>
+                    <a:lnR w="25400" cap="flat" cmpd="sng" algn="ctr">
+                      <a:solidFill>
+                        <a:srgbClr val="FFFFFF"/>
+                      </a:solidFill>
+                      <a:prstDash val="solid"/>
+                    </a:lnR>
+                    <a:lnT w="25400" cap="flat" cmpd="sng" algn="ctr">
+                      <a:solidFill>
+                        <a:srgbClr val="FFFFFF"/>
+                      </a:solidFill>
+                      <a:prstDash val="solid"/>
+                    </a:lnT>
+                    <a:lnB w="25400" cap="flat" cmpd="sng" algn="ctr">
+                      <a:solidFill>
+                        <a:srgbClr val="FFFFFF"/>
+                      </a:solidFill>
+                      <a:prstDash val="solid"/>
+                    </a:lnB>
+                    <a:lnTlToBr w="0"/>
+                    <a:lnBlToTr w="0"/>
+                    <a:solidFill>
+                      <a:srgbClr val="D6E4F0"/>
+                    </a:solidFill>
+                  </a:tcPr>
+                </a:tc>
+                <a:tc rowSpan="3">
+                  <a:txBody>
+                    <a:bodyPr/>
+                    <a:lstStyle/>
+                    <a:p>
+                      <a:pPr algn="l"/>
+                      <a:r>
+                        <a:rPr lang="en-IN" sz="1000" b="0">
+                          <a:solidFill>
+                            <a:srgbClr val="1A1A1A"/>
+                          </a:solidFill>
+                          <a:latin typeface="DM Sans ExtraBold"/>
+                        </a:rPr>
+                        <a:t>Not the problem. </a:t>
+                      </a:r>
                       <a:r>
                         <a:rPr lang="en-IN" sz="1000" b="0">
                           <a:solidFill>
@@ -4454,7 +4992,35 @@
                           </a:solidFill>
                           <a:latin typeface="DM Sans"/>
                         </a:rPr>
-                        <a:t>P-84</a:t>
+                        <a:t>97% know PB Health has its own hospital and 98% know it is at IFFCO Chowk.</a:t>
+                      </a:r>
+                    </a:p>
+                  </a:txBody>
+                  <a:tcPr marL="182880" marR="45720" marT="22860" marB="22860" anchor="ctr">
+                    <a:lnL w="0"/>
+                    <a:lnR w="0"/>
+                    <a:lnT w="0"/>
+                    <a:lnB w="0"/>
+                    <a:lnTlToBr w="0"/>
+                    <a:lnBlToTr w="0"/>
+                  </a:tcPr>
+                </a:tc>
+              </a:tr>
+              <a:tr h="310896">
+                <a:tc>
+                  <a:txBody>
+                    <a:bodyPr/>
+                    <a:lstStyle/>
+                    <a:p>
+                      <a:pPr algn="l"/>
+                      <a:r>
+                        <a:rPr lang="en-IN" sz="1050" b="0">
+                          <a:solidFill>
+                            <a:srgbClr val="1A1A1A"/>
+                          </a:solidFill>
+                          <a:latin typeface="DM Sans"/>
+                        </a:rPr>
+                        <a:t>Knows it is at IFFCO Chowk</a:t>
                       </a:r>
                     </a:p>
                   </a:txBody>
@@ -4477,15 +5043,272 @@
                     <a:bodyPr/>
                     <a:lstStyle/>
                     <a:p>
-                      <a:pPr algn="r"/>
+                      <a:pPr algn="ctr"/>
                       <a:r>
-                        <a:rPr lang="en-IN" sz="1000" b="0">
+                        <a:rPr lang="en-IN" sz="1050" b="0">
                           <a:solidFill>
                             <a:srgbClr val="1A1A1A"/>
                           </a:solidFill>
                           <a:latin typeface="DM Sans"/>
                         </a:rPr>
-                        <a:t>23</a:t>
+                        <a:t>100%</a:t>
+                      </a:r>
+                    </a:p>
+                  </a:txBody>
+                  <a:tcPr marL="45720" marR="54864" marT="22860" marB="22860" anchor="ctr">
+                    <a:lnL w="25400" cap="flat" cmpd="sng" algn="ctr">
+                      <a:solidFill>
+                        <a:srgbClr val="FFFFFF"/>
+                      </a:solidFill>
+                      <a:prstDash val="solid"/>
+                    </a:lnL>
+                    <a:lnR w="25400" cap="flat" cmpd="sng" algn="ctr">
+                      <a:solidFill>
+                        <a:srgbClr val="FFFFFF"/>
+                      </a:solidFill>
+                      <a:prstDash val="solid"/>
+                    </a:lnR>
+                    <a:lnT w="25400" cap="flat" cmpd="sng" algn="ctr">
+                      <a:solidFill>
+                        <a:srgbClr val="FFFFFF"/>
+                      </a:solidFill>
+                      <a:prstDash val="solid"/>
+                    </a:lnT>
+                    <a:lnB w="25400" cap="flat" cmpd="sng" algn="ctr">
+                      <a:solidFill>
+                        <a:srgbClr val="FFFFFF"/>
+                      </a:solidFill>
+                      <a:prstDash val="solid"/>
+                    </a:lnB>
+                    <a:lnTlToBr w="0"/>
+                    <a:lnBlToTr w="0"/>
+                    <a:solidFill>
+                      <a:srgbClr val="D6E4F0"/>
+                    </a:solidFill>
+                  </a:tcPr>
+                </a:tc>
+                <a:tc>
+                  <a:txBody>
+                    <a:bodyPr/>
+                    <a:lstStyle/>
+                    <a:p>
+                      <a:pPr algn="ctr"/>
+                      <a:r>
+                        <a:rPr lang="en-IN" sz="1050" b="0">
+                          <a:solidFill>
+                            <a:srgbClr val="1A1A1A"/>
+                          </a:solidFill>
+                          <a:latin typeface="DM Sans"/>
+                        </a:rPr>
+                        <a:t>100%</a:t>
+                      </a:r>
+                    </a:p>
+                  </a:txBody>
+                  <a:tcPr marL="45720" marR="54864" marT="22860" marB="22860" anchor="ctr">
+                    <a:lnL w="25400" cap="flat" cmpd="sng" algn="ctr">
+                      <a:solidFill>
+                        <a:srgbClr val="FFFFFF"/>
+                      </a:solidFill>
+                      <a:prstDash val="solid"/>
+                    </a:lnL>
+                    <a:lnR w="25400" cap="flat" cmpd="sng" algn="ctr">
+                      <a:solidFill>
+                        <a:srgbClr val="FFFFFF"/>
+                      </a:solidFill>
+                      <a:prstDash val="solid"/>
+                    </a:lnR>
+                    <a:lnT w="25400" cap="flat" cmpd="sng" algn="ctr">
+                      <a:solidFill>
+                        <a:srgbClr val="FFFFFF"/>
+                      </a:solidFill>
+                      <a:prstDash val="solid"/>
+                    </a:lnT>
+                    <a:lnB w="25400" cap="flat" cmpd="sng" algn="ctr">
+                      <a:solidFill>
+                        <a:srgbClr val="FFFFFF"/>
+                      </a:solidFill>
+                      <a:prstDash val="solid"/>
+                    </a:lnB>
+                    <a:lnTlToBr w="0"/>
+                    <a:lnBlToTr w="0"/>
+                    <a:solidFill>
+                      <a:srgbClr val="D6E4F0"/>
+                    </a:solidFill>
+                  </a:tcPr>
+                </a:tc>
+                <a:tc>
+                  <a:txBody>
+                    <a:bodyPr/>
+                    <a:lstStyle/>
+                    <a:p>
+                      <a:pPr algn="ctr"/>
+                      <a:r>
+                        <a:rPr lang="en-IN" sz="1050" b="0">
+                          <a:solidFill>
+                            <a:srgbClr val="1A1A1A"/>
+                          </a:solidFill>
+                          <a:latin typeface="DM Sans"/>
+                        </a:rPr>
+                        <a:t>100%</a:t>
+                      </a:r>
+                    </a:p>
+                  </a:txBody>
+                  <a:tcPr marL="45720" marR="54864" marT="22860" marB="22860" anchor="ctr">
+                    <a:lnL w="25400" cap="flat" cmpd="sng" algn="ctr">
+                      <a:solidFill>
+                        <a:srgbClr val="FFFFFF"/>
+                      </a:solidFill>
+                      <a:prstDash val="solid"/>
+                    </a:lnL>
+                    <a:lnR w="25400" cap="flat" cmpd="sng" algn="ctr">
+                      <a:solidFill>
+                        <a:srgbClr val="FFFFFF"/>
+                      </a:solidFill>
+                      <a:prstDash val="solid"/>
+                    </a:lnR>
+                    <a:lnT w="25400" cap="flat" cmpd="sng" algn="ctr">
+                      <a:solidFill>
+                        <a:srgbClr val="FFFFFF"/>
+                      </a:solidFill>
+                      <a:prstDash val="solid"/>
+                    </a:lnT>
+                    <a:lnB w="25400" cap="flat" cmpd="sng" algn="ctr">
+                      <a:solidFill>
+                        <a:srgbClr val="FFFFFF"/>
+                      </a:solidFill>
+                      <a:prstDash val="solid"/>
+                    </a:lnB>
+                    <a:lnTlToBr w="0"/>
+                    <a:lnBlToTr w="0"/>
+                    <a:solidFill>
+                      <a:srgbClr val="D6E4F0"/>
+                    </a:solidFill>
+                  </a:tcPr>
+                </a:tc>
+                <a:tc>
+                  <a:txBody>
+                    <a:bodyPr/>
+                    <a:lstStyle/>
+                    <a:p>
+                      <a:pPr algn="ctr"/>
+                      <a:r>
+                        <a:rPr lang="en-IN" sz="1050" b="0">
+                          <a:solidFill>
+                            <a:srgbClr val="1A1A1A"/>
+                          </a:solidFill>
+                          <a:latin typeface="DM Sans"/>
+                        </a:rPr>
+                        <a:t>100%</a:t>
+                      </a:r>
+                    </a:p>
+                  </a:txBody>
+                  <a:tcPr marL="45720" marR="54864" marT="22860" marB="22860" anchor="ctr">
+                    <a:lnL w="25400" cap="flat" cmpd="sng" algn="ctr">
+                      <a:solidFill>
+                        <a:srgbClr val="FFFFFF"/>
+                      </a:solidFill>
+                      <a:prstDash val="solid"/>
+                    </a:lnL>
+                    <a:lnR w="25400" cap="flat" cmpd="sng" algn="ctr">
+                      <a:solidFill>
+                        <a:srgbClr val="FFFFFF"/>
+                      </a:solidFill>
+                      <a:prstDash val="solid"/>
+                    </a:lnR>
+                    <a:lnT w="25400" cap="flat" cmpd="sng" algn="ctr">
+                      <a:solidFill>
+                        <a:srgbClr val="FFFFFF"/>
+                      </a:solidFill>
+                      <a:prstDash val="solid"/>
+                    </a:lnT>
+                    <a:lnB w="25400" cap="flat" cmpd="sng" algn="ctr">
+                      <a:solidFill>
+                        <a:srgbClr val="FFFFFF"/>
+                      </a:solidFill>
+                      <a:prstDash val="solid"/>
+                    </a:lnB>
+                    <a:lnTlToBr w="0"/>
+                    <a:lnBlToTr w="0"/>
+                    <a:solidFill>
+                      <a:srgbClr val="D6E4F0"/>
+                    </a:solidFill>
+                  </a:tcPr>
+                </a:tc>
+                <a:tc>
+                  <a:txBody>
+                    <a:bodyPr/>
+                    <a:lstStyle/>
+                    <a:p>
+                      <a:pPr algn="ctr"/>
+                      <a:r>
+                        <a:rPr lang="en-IN" sz="1050" b="1">
+                          <a:solidFill>
+                            <a:srgbClr val="1A1A1A"/>
+                          </a:solidFill>
+                          <a:latin typeface="DM Sans"/>
+                        </a:rPr>
+                        <a:t>98%</a:t>
+                      </a:r>
+                    </a:p>
+                  </a:txBody>
+                  <a:tcPr marL="45720" marR="54864" marT="22860" marB="22860" anchor="ctr">
+                    <a:lnL w="25400" cap="flat" cmpd="sng" algn="ctr">
+                      <a:solidFill>
+                        <a:srgbClr val="FFFFFF"/>
+                      </a:solidFill>
+                      <a:prstDash val="solid"/>
+                    </a:lnL>
+                    <a:lnR w="25400" cap="flat" cmpd="sng" algn="ctr">
+                      <a:solidFill>
+                        <a:srgbClr val="FFFFFF"/>
+                      </a:solidFill>
+                      <a:prstDash val="solid"/>
+                    </a:lnR>
+                    <a:lnT w="25400" cap="flat" cmpd="sng" algn="ctr">
+                      <a:solidFill>
+                        <a:srgbClr val="FFFFFF"/>
+                      </a:solidFill>
+                      <a:prstDash val="solid"/>
+                    </a:lnT>
+                    <a:lnB w="25400" cap="flat" cmpd="sng" algn="ctr">
+                      <a:solidFill>
+                        <a:srgbClr val="FFFFFF"/>
+                      </a:solidFill>
+                      <a:prstDash val="solid"/>
+                    </a:lnB>
+                    <a:lnTlToBr w="0"/>
+                    <a:lnBlToTr w="0"/>
+                    <a:solidFill>
+                      <a:srgbClr val="D6E4F0"/>
+                    </a:solidFill>
+                  </a:tcPr>
+                </a:tc>
+                <a:tc vMerge="1">
+                  <a:txBody>
+                    <a:bodyPr/>
+                    <a:lstStyle/>
+                    <a:p>
+                      <a:endParaRPr lang="en-IN"/>
+                    </a:p>
+                  </a:txBody>
+                  <a:tcPr/>
+                </a:tc>
+              </a:tr>
+              <a:tr h="310896">
+                <a:tc>
+                  <a:txBody>
+                    <a:bodyPr/>
+                    <a:lstStyle/>
+                    <a:p>
+                      <a:pPr algn="l"/>
+                      <a:r>
+                        <a:rPr lang="en-IN" sz="1050" b="0">
+                          <a:solidFill>
+                            <a:srgbClr val="1A1A1A"/>
+                          </a:solidFill>
+                          <a:latin typeface="DM Sans"/>
+                        </a:rPr>
+                        <a:t>Knows all services offered</a:t>
                       </a:r>
                     </a:p>
                   </a:txBody>
@@ -4508,30 +5331,48 @@
                     <a:bodyPr/>
                     <a:lstStyle/>
                     <a:p>
-                      <a:pPr algn="r"/>
+                      <a:pPr algn="ctr"/>
                       <a:r>
-                        <a:rPr lang="en-IN" sz="1000" b="0">
+                        <a:rPr lang="en-IN" sz="1050" b="0">
                           <a:solidFill>
                             <a:srgbClr val="1A1A1A"/>
                           </a:solidFill>
                           <a:latin typeface="DM Sans"/>
                         </a:rPr>
-                        <a:t>732</a:t>
+                        <a:t>100%</a:t>
                       </a:r>
                     </a:p>
                   </a:txBody>
                   <a:tcPr marL="45720" marR="54864" marT="22860" marB="22860" anchor="ctr">
-                    <a:lnL w="0"/>
-                    <a:lnR w="0"/>
-                    <a:lnT w="0"/>
-                    <a:lnB w="9525" cap="flat" cmpd="sng" algn="ctr">
-                      <a:solidFill>
-                        <a:srgbClr val="E0E0E0"/>
+                    <a:lnL w="25400" cap="flat" cmpd="sng" algn="ctr">
+                      <a:solidFill>
+                        <a:srgbClr val="FFFFFF"/>
+                      </a:solidFill>
+                      <a:prstDash val="solid"/>
+                    </a:lnL>
+                    <a:lnR w="25400" cap="flat" cmpd="sng" algn="ctr">
+                      <a:solidFill>
+                        <a:srgbClr val="FFFFFF"/>
+                      </a:solidFill>
+                      <a:prstDash val="solid"/>
+                    </a:lnR>
+                    <a:lnT w="25400" cap="flat" cmpd="sng" algn="ctr">
+                      <a:solidFill>
+                        <a:srgbClr val="FFFFFF"/>
+                      </a:solidFill>
+                      <a:prstDash val="solid"/>
+                    </a:lnT>
+                    <a:lnB w="25400" cap="flat" cmpd="sng" algn="ctr">
+                      <a:solidFill>
+                        <a:srgbClr val="FFFFFF"/>
                       </a:solidFill>
                       <a:prstDash val="solid"/>
                     </a:lnB>
                     <a:lnTlToBr w="0"/>
                     <a:lnBlToTr w="0"/>
+                    <a:solidFill>
+                      <a:srgbClr val="D6E4F0"/>
+                    </a:solidFill>
                   </a:tcPr>
                 </a:tc>
                 <a:tc>
@@ -4539,63 +5380,97 @@
                     <a:bodyPr/>
                     <a:lstStyle/>
                     <a:p>
-                      <a:pPr algn="r"/>
+                      <a:pPr algn="ctr"/>
                       <a:r>
-                        <a:rPr lang="en-IN" sz="1000" b="1">
+                        <a:rPr lang="en-IN" sz="1050" b="0">
                           <a:solidFill>
                             <a:srgbClr val="1A1A1A"/>
                           </a:solidFill>
                           <a:latin typeface="DM Sans"/>
                         </a:rPr>
-                        <a:t>3.1%</a:t>
+                        <a:t>100%</a:t>
                       </a:r>
                     </a:p>
                   </a:txBody>
                   <a:tcPr marL="45720" marR="54864" marT="22860" marB="22860" anchor="ctr">
-                    <a:lnL w="0"/>
-                    <a:lnR w="0"/>
-                    <a:lnT w="0"/>
-                    <a:lnB w="9525" cap="flat" cmpd="sng" algn="ctr">
-                      <a:solidFill>
-                        <a:srgbClr val="E0E0E0"/>
+                    <a:lnL w="25400" cap="flat" cmpd="sng" algn="ctr">
+                      <a:solidFill>
+                        <a:srgbClr val="FFFFFF"/>
+                      </a:solidFill>
+                      <a:prstDash val="solid"/>
+                    </a:lnL>
+                    <a:lnR w="25400" cap="flat" cmpd="sng" algn="ctr">
+                      <a:solidFill>
+                        <a:srgbClr val="FFFFFF"/>
+                      </a:solidFill>
+                      <a:prstDash val="solid"/>
+                    </a:lnR>
+                    <a:lnT w="25400" cap="flat" cmpd="sng" algn="ctr">
+                      <a:solidFill>
+                        <a:srgbClr val="FFFFFF"/>
+                      </a:solidFill>
+                      <a:prstDash val="solid"/>
+                    </a:lnT>
+                    <a:lnB w="25400" cap="flat" cmpd="sng" algn="ctr">
+                      <a:solidFill>
+                        <a:srgbClr val="FFFFFF"/>
                       </a:solidFill>
                       <a:prstDash val="solid"/>
                     </a:lnB>
                     <a:lnTlToBr w="0"/>
                     <a:lnBlToTr w="0"/>
+                    <a:solidFill>
+                      <a:srgbClr val="D6E4F0"/>
+                    </a:solidFill>
                   </a:tcPr>
                 </a:tc>
-              </a:tr>
-              <a:tr h="187452">
                 <a:tc>
                   <a:txBody>
                     <a:bodyPr/>
                     <a:lstStyle/>
                     <a:p>
-                      <a:pPr algn="l"/>
+                      <a:pPr algn="ctr"/>
                       <a:r>
-                        <a:rPr lang="en-IN" sz="1000" b="0">
+                        <a:rPr lang="en-IN" sz="1050" b="0">
                           <a:solidFill>
                             <a:srgbClr val="1A1A1A"/>
                           </a:solidFill>
                           <a:latin typeface="DM Sans"/>
                         </a:rPr>
-                        <a:t>P-120</a:t>
+                        <a:t>82%</a:t>
                       </a:r>
                     </a:p>
                   </a:txBody>
                   <a:tcPr marL="45720" marR="54864" marT="22860" marB="22860" anchor="ctr">
-                    <a:lnL w="0"/>
-                    <a:lnR w="0"/>
-                    <a:lnT w="0"/>
-                    <a:lnB w="9525" cap="flat" cmpd="sng" algn="ctr">
-                      <a:solidFill>
-                        <a:srgbClr val="E0E0E0"/>
+                    <a:lnL w="25400" cap="flat" cmpd="sng" algn="ctr">
+                      <a:solidFill>
+                        <a:srgbClr val="FFFFFF"/>
+                      </a:solidFill>
+                      <a:prstDash val="solid"/>
+                    </a:lnL>
+                    <a:lnR w="25400" cap="flat" cmpd="sng" algn="ctr">
+                      <a:solidFill>
+                        <a:srgbClr val="FFFFFF"/>
+                      </a:solidFill>
+                      <a:prstDash val="solid"/>
+                    </a:lnR>
+                    <a:lnT w="25400" cap="flat" cmpd="sng" algn="ctr">
+                      <a:solidFill>
+                        <a:srgbClr val="FFFFFF"/>
+                      </a:solidFill>
+                      <a:prstDash val="solid"/>
+                    </a:lnT>
+                    <a:lnB w="25400" cap="flat" cmpd="sng" algn="ctr">
+                      <a:solidFill>
+                        <a:srgbClr val="FFFFFF"/>
                       </a:solidFill>
                       <a:prstDash val="solid"/>
                     </a:lnB>
                     <a:lnTlToBr w="0"/>
                     <a:lnBlToTr w="0"/>
+                    <a:solidFill>
+                      <a:srgbClr val="D6E4F0"/>
+                    </a:solidFill>
                   </a:tcPr>
                 </a:tc>
                 <a:tc>
@@ -4603,30 +5478,48 @@
                     <a:bodyPr/>
                     <a:lstStyle/>
                     <a:p>
-                      <a:pPr algn="r"/>
+                      <a:pPr algn="ctr"/>
                       <a:r>
-                        <a:rPr lang="en-IN" sz="1000" b="0">
+                        <a:rPr lang="en-IN" sz="1050" b="0">
                           <a:solidFill>
                             <a:srgbClr val="1A1A1A"/>
                           </a:solidFill>
                           <a:latin typeface="DM Sans"/>
                         </a:rPr>
-                        <a:t>13</a:t>
+                        <a:t>90%</a:t>
                       </a:r>
                     </a:p>
                   </a:txBody>
                   <a:tcPr marL="45720" marR="54864" marT="22860" marB="22860" anchor="ctr">
-                    <a:lnL w="0"/>
-                    <a:lnR w="0"/>
-                    <a:lnT w="0"/>
-                    <a:lnB w="9525" cap="flat" cmpd="sng" algn="ctr">
-                      <a:solidFill>
-                        <a:srgbClr val="E0E0E0"/>
+                    <a:lnL w="25400" cap="flat" cmpd="sng" algn="ctr">
+                      <a:solidFill>
+                        <a:srgbClr val="FFFFFF"/>
+                      </a:solidFill>
+                      <a:prstDash val="solid"/>
+                    </a:lnL>
+                    <a:lnR w="25400" cap="flat" cmpd="sng" algn="ctr">
+                      <a:solidFill>
+                        <a:srgbClr val="FFFFFF"/>
+                      </a:solidFill>
+                      <a:prstDash val="solid"/>
+                    </a:lnR>
+                    <a:lnT w="25400" cap="flat" cmpd="sng" algn="ctr">
+                      <a:solidFill>
+                        <a:srgbClr val="FFFFFF"/>
+                      </a:solidFill>
+                      <a:prstDash val="solid"/>
+                    </a:lnT>
+                    <a:lnB w="25400" cap="flat" cmpd="sng" algn="ctr">
+                      <a:solidFill>
+                        <a:srgbClr val="FFFFFF"/>
                       </a:solidFill>
                       <a:prstDash val="solid"/>
                     </a:lnB>
                     <a:lnTlToBr w="0"/>
                     <a:lnBlToTr w="0"/>
+                    <a:solidFill>
+                      <a:srgbClr val="D6E4F0"/>
+                    </a:solidFill>
                   </a:tcPr>
                 </a:tc>
                 <a:tc>
@@ -4634,318 +5527,63 @@
                     <a:bodyPr/>
                     <a:lstStyle/>
                     <a:p>
-                      <a:pPr algn="r"/>
+                      <a:pPr algn="ctr"/>
                       <a:r>
-                        <a:rPr lang="en-IN" sz="1000" b="0">
+                        <a:rPr lang="en-IN" sz="1050" b="1">
                           <a:solidFill>
                             <a:srgbClr val="1A1A1A"/>
                           </a:solidFill>
                           <a:latin typeface="DM Sans"/>
                         </a:rPr>
-                        <a:t>507</a:t>
+                        <a:t>92%</a:t>
                       </a:r>
                     </a:p>
                   </a:txBody>
                   <a:tcPr marL="45720" marR="54864" marT="22860" marB="22860" anchor="ctr">
-                    <a:lnL w="0"/>
-                    <a:lnR w="0"/>
-                    <a:lnT w="0"/>
-                    <a:lnB w="9525" cap="flat" cmpd="sng" algn="ctr">
-                      <a:solidFill>
-                        <a:srgbClr val="E0E0E0"/>
+                    <a:lnL w="25400" cap="flat" cmpd="sng" algn="ctr">
+                      <a:solidFill>
+                        <a:srgbClr val="FFFFFF"/>
+                      </a:solidFill>
+                      <a:prstDash val="solid"/>
+                    </a:lnL>
+                    <a:lnR w="25400" cap="flat" cmpd="sng" algn="ctr">
+                      <a:solidFill>
+                        <a:srgbClr val="FFFFFF"/>
+                      </a:solidFill>
+                      <a:prstDash val="solid"/>
+                    </a:lnR>
+                    <a:lnT w="25400" cap="flat" cmpd="sng" algn="ctr">
+                      <a:solidFill>
+                        <a:srgbClr val="FFFFFF"/>
+                      </a:solidFill>
+                      <a:prstDash val="solid"/>
+                    </a:lnT>
+                    <a:lnB w="25400" cap="flat" cmpd="sng" algn="ctr">
+                      <a:solidFill>
+                        <a:srgbClr val="FFFFFF"/>
                       </a:solidFill>
                       <a:prstDash val="solid"/>
                     </a:lnB>
                     <a:lnTlToBr w="0"/>
                     <a:lnBlToTr w="0"/>
+                    <a:solidFill>
+                      <a:srgbClr val="D6E4F0"/>
+                    </a:solidFill>
                   </a:tcPr>
                 </a:tc>
-                <a:tc>
-                  <a:txBody>
-                    <a:bodyPr/>
-                    <a:lstStyle/>
-                    <a:p>
-                      <a:pPr algn="r"/>
-                      <a:r>
-                        <a:rPr lang="en-IN" sz="1000" b="1">
-                          <a:solidFill>
-                            <a:srgbClr val="1A1A1A"/>
-                          </a:solidFill>
-                          <a:latin typeface="DM Sans"/>
-                        </a:rPr>
-                        <a:t>2.6%</a:t>
-                      </a:r>
-                    </a:p>
-                  </a:txBody>
-                  <a:tcPr marL="45720" marR="54864" marT="22860" marB="22860" anchor="ctr">
-                    <a:lnL w="0"/>
-                    <a:lnR w="0"/>
-                    <a:lnT w="0"/>
-                    <a:lnB w="9525" cap="flat" cmpd="sng" algn="ctr">
-                      <a:solidFill>
-                        <a:srgbClr val="E0E0E0"/>
-                      </a:solidFill>
-                      <a:prstDash val="solid"/>
-                    </a:lnB>
-                    <a:lnTlToBr w="0"/>
-                    <a:lnBlToTr w="0"/>
-                  </a:tcPr>
+                <a:tc vMerge="1">
+                  <a:txBody>
+                    <a:bodyPr/>
+                    <a:lstStyle/>
+                    <a:p>
+                      <a:endParaRPr lang="en-IN"/>
+                    </a:p>
+                  </a:txBody>
+                  <a:tcPr/>
                 </a:tc>
               </a:tr>
-              <a:tr h="187452">
-                <a:tc>
-                  <a:txBody>
-                    <a:bodyPr/>
-                    <a:lstStyle/>
-                    <a:p>
-                      <a:pPr algn="l"/>
-                      <a:r>
-                        <a:rPr lang="en-IN" sz="1000" b="0">
-                          <a:solidFill>
-                            <a:srgbClr val="1A1A1A"/>
-                          </a:solidFill>
-                          <a:latin typeface="DM Sans"/>
-                        </a:rPr>
-                        <a:t>P-116</a:t>
-                      </a:r>
-                    </a:p>
-                  </a:txBody>
-                  <a:tcPr marL="45720" marR="54864" marT="22860" marB="22860" anchor="ctr">
-                    <a:lnL w="0"/>
-                    <a:lnR w="0"/>
-                    <a:lnT w="0"/>
-                    <a:lnB w="9525" cap="flat" cmpd="sng" algn="ctr">
-                      <a:solidFill>
-                        <a:srgbClr val="E0E0E0"/>
-                      </a:solidFill>
-                      <a:prstDash val="solid"/>
-                    </a:lnB>
-                    <a:lnTlToBr w="0"/>
-                    <a:lnBlToTr w="0"/>
-                  </a:tcPr>
-                </a:tc>
-                <a:tc>
-                  <a:txBody>
-                    <a:bodyPr/>
-                    <a:lstStyle/>
-                    <a:p>
-                      <a:pPr algn="r"/>
-                      <a:r>
-                        <a:rPr lang="en-IN" sz="1000" b="0">
-                          <a:solidFill>
-                            <a:srgbClr val="1A1A1A"/>
-                          </a:solidFill>
-                          <a:latin typeface="DM Sans"/>
-                        </a:rPr>
-                        <a:t>11</a:t>
-                      </a:r>
-                    </a:p>
-                  </a:txBody>
-                  <a:tcPr marL="45720" marR="54864" marT="22860" marB="22860" anchor="ctr">
-                    <a:lnL w="0"/>
-                    <a:lnR w="0"/>
-                    <a:lnT w="0"/>
-                    <a:lnB w="9525" cap="flat" cmpd="sng" algn="ctr">
-                      <a:solidFill>
-                        <a:srgbClr val="E0E0E0"/>
-                      </a:solidFill>
-                      <a:prstDash val="solid"/>
-                    </a:lnB>
-                    <a:lnTlToBr w="0"/>
-                    <a:lnBlToTr w="0"/>
-                  </a:tcPr>
-                </a:tc>
-                <a:tc>
-                  <a:txBody>
-                    <a:bodyPr/>
-                    <a:lstStyle/>
-                    <a:p>
-                      <a:pPr algn="r"/>
-                      <a:r>
-                        <a:rPr lang="en-IN" sz="1000" b="0">
-                          <a:solidFill>
-                            <a:srgbClr val="1A1A1A"/>
-                          </a:solidFill>
-                          <a:latin typeface="DM Sans"/>
-                        </a:rPr>
-                        <a:t>362</a:t>
-                      </a:r>
-                    </a:p>
-                  </a:txBody>
-                  <a:tcPr marL="45720" marR="54864" marT="22860" marB="22860" anchor="ctr">
-                    <a:lnL w="0"/>
-                    <a:lnR w="0"/>
-                    <a:lnT w="0"/>
-                    <a:lnB w="9525" cap="flat" cmpd="sng" algn="ctr">
-                      <a:solidFill>
-                        <a:srgbClr val="E0E0E0"/>
-                      </a:solidFill>
-                      <a:prstDash val="solid"/>
-                    </a:lnB>
-                    <a:lnTlToBr w="0"/>
-                    <a:lnBlToTr w="0"/>
-                  </a:tcPr>
-                </a:tc>
-                <a:tc>
-                  <a:txBody>
-                    <a:bodyPr/>
-                    <a:lstStyle/>
-                    <a:p>
-                      <a:pPr algn="r"/>
-                      <a:r>
-                        <a:rPr lang="en-IN" sz="1000" b="1">
-                          <a:solidFill>
-                            <a:srgbClr val="1A1A1A"/>
-                          </a:solidFill>
-                          <a:latin typeface="DM Sans"/>
-                        </a:rPr>
-                        <a:t>3.0%</a:t>
-                      </a:r>
-                    </a:p>
-                  </a:txBody>
-                  <a:tcPr marL="45720" marR="54864" marT="22860" marB="22860" anchor="ctr">
-                    <a:lnL w="0"/>
-                    <a:lnR w="0"/>
-                    <a:lnT w="0"/>
-                    <a:lnB w="9525" cap="flat" cmpd="sng" algn="ctr">
-                      <a:solidFill>
-                        <a:srgbClr val="E0E0E0"/>
-                      </a:solidFill>
-                      <a:prstDash val="solid"/>
-                    </a:lnB>
-                    <a:lnTlToBr w="0"/>
-                    <a:lnBlToTr w="0"/>
-                  </a:tcPr>
-                </a:tc>
-              </a:tr>
-              <a:tr h="187452">
-                <a:tc>
-                  <a:txBody>
-                    <a:bodyPr/>
-                    <a:lstStyle/>
-                    <a:p>
-                      <a:pPr algn="l"/>
-                      <a:r>
-                        <a:rPr lang="en-IN" sz="1000" b="0">
-                          <a:solidFill>
-                            <a:srgbClr val="1A1A1A"/>
-                          </a:solidFill>
-                          <a:latin typeface="DM Sans"/>
-                        </a:rPr>
-                        <a:t>P-119</a:t>
-                      </a:r>
-                    </a:p>
-                  </a:txBody>
-                  <a:tcPr marL="45720" marR="54864" marT="22860" marB="22860" anchor="ctr">
-                    <a:lnL w="0"/>
-                    <a:lnR w="0"/>
-                    <a:lnT w="0"/>
-                    <a:lnB w="9525" cap="flat" cmpd="sng" algn="ctr">
-                      <a:solidFill>
-                        <a:srgbClr val="E0E0E0"/>
-                      </a:solidFill>
-                      <a:prstDash val="solid"/>
-                    </a:lnB>
-                    <a:lnTlToBr w="0"/>
-                    <a:lnBlToTr w="0"/>
-                  </a:tcPr>
-                </a:tc>
-                <a:tc>
-                  <a:txBody>
-                    <a:bodyPr/>
-                    <a:lstStyle/>
-                    <a:p>
-                      <a:pPr algn="r"/>
-                      <a:r>
-                        <a:rPr lang="en-IN" sz="1000" b="0">
-                          <a:solidFill>
-                            <a:srgbClr val="1A1A1A"/>
-                          </a:solidFill>
-                          <a:latin typeface="DM Sans"/>
-                        </a:rPr>
-                        <a:t>10</a:t>
-                      </a:r>
-                    </a:p>
-                  </a:txBody>
-                  <a:tcPr marL="45720" marR="54864" marT="22860" marB="22860" anchor="ctr">
-                    <a:lnL w="0"/>
-                    <a:lnR w="0"/>
-                    <a:lnT w="0"/>
-                    <a:lnB w="9525" cap="flat" cmpd="sng" algn="ctr">
-                      <a:solidFill>
-                        <a:srgbClr val="E0E0E0"/>
-                      </a:solidFill>
-                      <a:prstDash val="solid"/>
-                    </a:lnB>
-                    <a:lnTlToBr w="0"/>
-                    <a:lnBlToTr w="0"/>
-                  </a:tcPr>
-                </a:tc>
-                <a:tc>
-                  <a:txBody>
-                    <a:bodyPr/>
-                    <a:lstStyle/>
-                    <a:p>
-                      <a:pPr algn="r"/>
-                      <a:r>
-                        <a:rPr lang="en-IN" sz="1000" b="0">
-                          <a:solidFill>
-                            <a:srgbClr val="1A1A1A"/>
-                          </a:solidFill>
-                          <a:latin typeface="DM Sans"/>
-                        </a:rPr>
-                        <a:t>352</a:t>
-                      </a:r>
-                    </a:p>
-                  </a:txBody>
-                  <a:tcPr marL="45720" marR="54864" marT="22860" marB="22860" anchor="ctr">
-                    <a:lnL w="0"/>
-                    <a:lnR w="0"/>
-                    <a:lnT w="0"/>
-                    <a:lnB w="9525" cap="flat" cmpd="sng" algn="ctr">
-                      <a:solidFill>
-                        <a:srgbClr val="E0E0E0"/>
-                      </a:solidFill>
-                      <a:prstDash val="solid"/>
-                    </a:lnB>
-                    <a:lnTlToBr w="0"/>
-                    <a:lnBlToTr w="0"/>
-                  </a:tcPr>
-                </a:tc>
-                <a:tc>
-                  <a:txBody>
-                    <a:bodyPr/>
-                    <a:lstStyle/>
-                    <a:p>
-                      <a:pPr algn="r"/>
-                      <a:r>
-                        <a:rPr lang="en-IN" sz="1000" b="1">
-                          <a:solidFill>
-                            <a:srgbClr val="1A1A1A"/>
-                          </a:solidFill>
-                          <a:latin typeface="DM Sans"/>
-                        </a:rPr>
-                        <a:t>2.8%</a:t>
-                      </a:r>
-                    </a:p>
-                  </a:txBody>
-                  <a:tcPr marL="45720" marR="54864" marT="22860" marB="22860" anchor="ctr">
-                    <a:lnL w="0"/>
-                    <a:lnR w="0"/>
-                    <a:lnT w="0"/>
-                    <a:lnB w="9525" cap="flat" cmpd="sng" algn="ctr">
-                      <a:solidFill>
-                        <a:srgbClr val="E0E0E0"/>
-                      </a:solidFill>
-                      <a:prstDash val="solid"/>
-                    </a:lnB>
-                    <a:lnTlToBr w="0"/>
-                    <a:lnBlToTr w="0"/>
-                  </a:tcPr>
-                </a:tc>
-              </a:tr>
-              <a:tr h="173736">
-                <a:tc gridSpan="4">
+              <a:tr h="201168">
+                <a:tc gridSpan="7">
                   <a:txBody>
                     <a:bodyPr/>
                     <a:lstStyle/>
@@ -4958,7 +5596,7 @@
                           </a:solidFill>
                           <a:latin typeface="DM Sans ExtraBold"/>
                         </a:rPr>
-                        <a:t>FLOORS COVERED</a:t>
+                        <a:t>THE BENEFITS</a:t>
                       </a:r>
                     </a:p>
                   </a:txBody>
@@ -5006,14 +5644,329 @@
                   </a:txBody>
                   <a:tcPr/>
                 </a:tc>
+                <a:tc hMerge="1">
+                  <a:txBody>
+                    <a:bodyPr/>
+                    <a:lstStyle/>
+                    <a:p>
+                      <a:endParaRPr lang="en-IN"/>
+                    </a:p>
+                  </a:txBody>
+                  <a:tcPr/>
+                </a:tc>
+                <a:tc hMerge="1">
+                  <a:txBody>
+                    <a:bodyPr/>
+                    <a:lstStyle/>
+                    <a:p>
+                      <a:endParaRPr lang="en-IN"/>
+                    </a:p>
+                  </a:txBody>
+                  <a:tcPr/>
+                </a:tc>
+                <a:tc hMerge="1">
+                  <a:txBody>
+                    <a:bodyPr/>
+                    <a:lstStyle/>
+                    <a:p>
+                      <a:endParaRPr lang="en-IN"/>
+                    </a:p>
+                  </a:txBody>
+                  <a:tcPr/>
+                </a:tc>
               </a:tr>
-              <a:tr h="187452">
+              <a:tr h="310896">
                 <a:tc>
                   <a:txBody>
                     <a:bodyPr/>
                     <a:lstStyle/>
                     <a:p>
                       <a:pPr algn="l"/>
+                      <a:r>
+                        <a:rPr lang="en-IN" sz="1050" b="0">
+                          <a:solidFill>
+                            <a:srgbClr val="1A1A1A"/>
+                          </a:solidFill>
+                          <a:latin typeface="DM Sans"/>
+                        </a:rPr>
+                        <a:t>Knows 75% off consultation</a:t>
+                      </a:r>
+                    </a:p>
+                  </a:txBody>
+                  <a:tcPr marL="45720" marR="54864" marT="22860" marB="22860" anchor="ctr">
+                    <a:lnL w="0"/>
+                    <a:lnR w="0"/>
+                    <a:lnT w="0"/>
+                    <a:lnB w="9525" cap="flat" cmpd="sng" algn="ctr">
+                      <a:solidFill>
+                        <a:srgbClr val="E0E0E0"/>
+                      </a:solidFill>
+                      <a:prstDash val="solid"/>
+                    </a:lnB>
+                    <a:lnTlToBr w="0"/>
+                    <a:lnBlToTr w="0"/>
+                  </a:tcPr>
+                </a:tc>
+                <a:tc>
+                  <a:txBody>
+                    <a:bodyPr/>
+                    <a:lstStyle/>
+                    <a:p>
+                      <a:pPr algn="ctr"/>
+                      <a:r>
+                        <a:rPr lang="en-IN" sz="1050" b="0">
+                          <a:solidFill>
+                            <a:srgbClr val="1A1A1A"/>
+                          </a:solidFill>
+                          <a:latin typeface="DM Sans"/>
+                        </a:rPr>
+                        <a:t>78%</a:t>
+                      </a:r>
+                    </a:p>
+                  </a:txBody>
+                  <a:tcPr marL="45720" marR="54864" marT="22860" marB="22860" anchor="ctr">
+                    <a:lnL w="25400" cap="flat" cmpd="sng" algn="ctr">
+                      <a:solidFill>
+                        <a:srgbClr val="FFFFFF"/>
+                      </a:solidFill>
+                      <a:prstDash val="solid"/>
+                    </a:lnL>
+                    <a:lnR w="25400" cap="flat" cmpd="sng" algn="ctr">
+                      <a:solidFill>
+                        <a:srgbClr val="FFFFFF"/>
+                      </a:solidFill>
+                      <a:prstDash val="solid"/>
+                    </a:lnR>
+                    <a:lnT w="25400" cap="flat" cmpd="sng" algn="ctr">
+                      <a:solidFill>
+                        <a:srgbClr val="FFFFFF"/>
+                      </a:solidFill>
+                      <a:prstDash val="solid"/>
+                    </a:lnT>
+                    <a:lnB w="25400" cap="flat" cmpd="sng" algn="ctr">
+                      <a:solidFill>
+                        <a:srgbClr val="FFFFFF"/>
+                      </a:solidFill>
+                      <a:prstDash val="solid"/>
+                    </a:lnB>
+                    <a:lnTlToBr w="0"/>
+                    <a:lnBlToTr w="0"/>
+                    <a:solidFill>
+                      <a:srgbClr val="D6E4F0"/>
+                    </a:solidFill>
+                  </a:tcPr>
+                </a:tc>
+                <a:tc>
+                  <a:txBody>
+                    <a:bodyPr/>
+                    <a:lstStyle/>
+                    <a:p>
+                      <a:pPr algn="ctr"/>
+                      <a:r>
+                        <a:rPr lang="en-IN" sz="1050" b="0">
+                          <a:solidFill>
+                            <a:srgbClr val="1A1A1A"/>
+                          </a:solidFill>
+                          <a:latin typeface="DM Sans"/>
+                        </a:rPr>
+                        <a:t>92%</a:t>
+                      </a:r>
+                    </a:p>
+                  </a:txBody>
+                  <a:tcPr marL="45720" marR="54864" marT="22860" marB="22860" anchor="ctr">
+                    <a:lnL w="25400" cap="flat" cmpd="sng" algn="ctr">
+                      <a:solidFill>
+                        <a:srgbClr val="FFFFFF"/>
+                      </a:solidFill>
+                      <a:prstDash val="solid"/>
+                    </a:lnL>
+                    <a:lnR w="25400" cap="flat" cmpd="sng" algn="ctr">
+                      <a:solidFill>
+                        <a:srgbClr val="FFFFFF"/>
+                      </a:solidFill>
+                      <a:prstDash val="solid"/>
+                    </a:lnR>
+                    <a:lnT w="25400" cap="flat" cmpd="sng" algn="ctr">
+                      <a:solidFill>
+                        <a:srgbClr val="FFFFFF"/>
+                      </a:solidFill>
+                      <a:prstDash val="solid"/>
+                    </a:lnT>
+                    <a:lnB w="25400" cap="flat" cmpd="sng" algn="ctr">
+                      <a:solidFill>
+                        <a:srgbClr val="FFFFFF"/>
+                      </a:solidFill>
+                      <a:prstDash val="solid"/>
+                    </a:lnB>
+                    <a:lnTlToBr w="0"/>
+                    <a:lnBlToTr w="0"/>
+                    <a:solidFill>
+                      <a:srgbClr val="D6E4F0"/>
+                    </a:solidFill>
+                  </a:tcPr>
+                </a:tc>
+                <a:tc>
+                  <a:txBody>
+                    <a:bodyPr/>
+                    <a:lstStyle/>
+                    <a:p>
+                      <a:pPr algn="ctr"/>
+                      <a:r>
+                        <a:rPr lang="en-IN" sz="1050" b="1">
+                          <a:solidFill>
+                            <a:srgbClr val="EA4722"/>
+                          </a:solidFill>
+                          <a:latin typeface="DM Sans"/>
+                        </a:rPr>
+                        <a:t>27%</a:t>
+                      </a:r>
+                    </a:p>
+                  </a:txBody>
+                  <a:tcPr marL="45720" marR="54864" marT="22860" marB="22860" anchor="ctr">
+                    <a:lnL w="25400" cap="flat" cmpd="sng" algn="ctr">
+                      <a:solidFill>
+                        <a:srgbClr val="FFFFFF"/>
+                      </a:solidFill>
+                      <a:prstDash val="solid"/>
+                    </a:lnL>
+                    <a:lnR w="25400" cap="flat" cmpd="sng" algn="ctr">
+                      <a:solidFill>
+                        <a:srgbClr val="FFFFFF"/>
+                      </a:solidFill>
+                      <a:prstDash val="solid"/>
+                    </a:lnR>
+                    <a:lnT w="25400" cap="flat" cmpd="sng" algn="ctr">
+                      <a:solidFill>
+                        <a:srgbClr val="FFFFFF"/>
+                      </a:solidFill>
+                      <a:prstDash val="solid"/>
+                    </a:lnT>
+                    <a:lnB w="25400" cap="flat" cmpd="sng" algn="ctr">
+                      <a:solidFill>
+                        <a:srgbClr val="FFFFFF"/>
+                      </a:solidFill>
+                      <a:prstDash val="solid"/>
+                    </a:lnB>
+                    <a:lnTlToBr w="0"/>
+                    <a:lnBlToTr w="0"/>
+                    <a:solidFill>
+                      <a:srgbClr val="FCE3DA"/>
+                    </a:solidFill>
+                  </a:tcPr>
+                </a:tc>
+                <a:tc>
+                  <a:txBody>
+                    <a:bodyPr/>
+                    <a:lstStyle/>
+                    <a:p>
+                      <a:pPr algn="ctr"/>
+                      <a:r>
+                        <a:rPr lang="en-IN" sz="1050" b="0">
+                          <a:solidFill>
+                            <a:srgbClr val="1A1A1A"/>
+                          </a:solidFill>
+                          <a:latin typeface="DM Sans"/>
+                        </a:rPr>
+                        <a:t>60%</a:t>
+                      </a:r>
+                    </a:p>
+                  </a:txBody>
+                  <a:tcPr marL="45720" marR="54864" marT="22860" marB="22860" anchor="ctr">
+                    <a:lnL w="25400" cap="flat" cmpd="sng" algn="ctr">
+                      <a:solidFill>
+                        <a:srgbClr val="FFFFFF"/>
+                      </a:solidFill>
+                      <a:prstDash val="solid"/>
+                    </a:lnL>
+                    <a:lnR w="25400" cap="flat" cmpd="sng" algn="ctr">
+                      <a:solidFill>
+                        <a:srgbClr val="FFFFFF"/>
+                      </a:solidFill>
+                      <a:prstDash val="solid"/>
+                    </a:lnR>
+                    <a:lnT w="25400" cap="flat" cmpd="sng" algn="ctr">
+                      <a:solidFill>
+                        <a:srgbClr val="FFFFFF"/>
+                      </a:solidFill>
+                      <a:prstDash val="solid"/>
+                    </a:lnT>
+                    <a:lnB w="25400" cap="flat" cmpd="sng" algn="ctr">
+                      <a:solidFill>
+                        <a:srgbClr val="FFFFFF"/>
+                      </a:solidFill>
+                      <a:prstDash val="solid"/>
+                    </a:lnB>
+                    <a:lnTlToBr w="0"/>
+                    <a:lnBlToTr w="0"/>
+                    <a:solidFill>
+                      <a:srgbClr val="F0F0F0"/>
+                    </a:solidFill>
+                  </a:tcPr>
+                </a:tc>
+                <a:tc>
+                  <a:txBody>
+                    <a:bodyPr/>
+                    <a:lstStyle/>
+                    <a:p>
+                      <a:pPr algn="ctr"/>
+                      <a:r>
+                        <a:rPr lang="en-IN" sz="1050" b="1">
+                          <a:solidFill>
+                            <a:srgbClr val="1A1A1A"/>
+                          </a:solidFill>
+                          <a:latin typeface="DM Sans"/>
+                        </a:rPr>
+                        <a:t>63%</a:t>
+                      </a:r>
+                    </a:p>
+                  </a:txBody>
+                  <a:tcPr marL="45720" marR="54864" marT="22860" marB="22860" anchor="ctr">
+                    <a:lnL w="25400" cap="flat" cmpd="sng" algn="ctr">
+                      <a:solidFill>
+                        <a:srgbClr val="FFFFFF"/>
+                      </a:solidFill>
+                      <a:prstDash val="solid"/>
+                    </a:lnL>
+                    <a:lnR w="25400" cap="flat" cmpd="sng" algn="ctr">
+                      <a:solidFill>
+                        <a:srgbClr val="FFFFFF"/>
+                      </a:solidFill>
+                      <a:prstDash val="solid"/>
+                    </a:lnR>
+                    <a:lnT w="25400" cap="flat" cmpd="sng" algn="ctr">
+                      <a:solidFill>
+                        <a:srgbClr val="FFFFFF"/>
+                      </a:solidFill>
+                      <a:prstDash val="solid"/>
+                    </a:lnT>
+                    <a:lnB w="25400" cap="flat" cmpd="sng" algn="ctr">
+                      <a:solidFill>
+                        <a:srgbClr val="FFFFFF"/>
+                      </a:solidFill>
+                      <a:prstDash val="solid"/>
+                    </a:lnB>
+                    <a:lnTlToBr w="0"/>
+                    <a:lnBlToTr w="0"/>
+                    <a:solidFill>
+                      <a:srgbClr val="F0F0F0"/>
+                    </a:solidFill>
+                  </a:tcPr>
+                </a:tc>
+                <a:tc rowSpan="3">
+                  <a:txBody>
+                    <a:bodyPr/>
+                    <a:lstStyle/>
+                    <a:p>
+                      <a:pPr algn="l"/>
+                      <a:r>
+                        <a:rPr lang="en-IN" sz="1000" b="0">
+                          <a:solidFill>
+                            <a:srgbClr val="1A1A1A"/>
+                          </a:solidFill>
+                          <a:latin typeface="DM Sans ExtraBold"/>
+                        </a:rPr>
+                        <a:t>The real gap. </a:t>
+                      </a:r>
                       <a:r>
                         <a:rPr lang="en-IN" sz="1000" b="0">
                           <a:solidFill>
@@ -5021,7 +5974,35 @@
                           </a:solidFill>
                           <a:latin typeface="DM Sans"/>
                         </a:rPr>
-                        <a:t>P-84</a:t>
+                        <a:t>Those who miss the discount think there is none at all. P-116 is furthest behind. 1 in 3 don't know their family is covered.</a:t>
+                      </a:r>
+                    </a:p>
+                  </a:txBody>
+                  <a:tcPr marL="182880" marR="45720" marT="22860" marB="22860" anchor="ctr">
+                    <a:lnL w="0"/>
+                    <a:lnR w="0"/>
+                    <a:lnT w="0"/>
+                    <a:lnB w="0"/>
+                    <a:lnTlToBr w="0"/>
+                    <a:lnBlToTr w="0"/>
+                  </a:tcPr>
+                </a:tc>
+              </a:tr>
+              <a:tr h="310896">
+                <a:tc>
+                  <a:txBody>
+                    <a:bodyPr/>
+                    <a:lstStyle/>
+                    <a:p>
+                      <a:pPr algn="l"/>
+                      <a:r>
+                        <a:rPr lang="en-IN" sz="1050" b="0">
+                          <a:solidFill>
+                            <a:srgbClr val="1A1A1A"/>
+                          </a:solidFill>
+                          <a:latin typeface="DM Sans"/>
+                        </a:rPr>
+                        <a:t>Knows 30% off X-ray, CT, MRI</a:t>
                       </a:r>
                     </a:p>
                   </a:txBody>
@@ -5039,12 +6020,935 @@
                     <a:lnBlToTr w="0"/>
                   </a:tcPr>
                 </a:tc>
-                <a:tc gridSpan="3">
-                  <a:txBody>
-                    <a:bodyPr/>
-                    <a:lstStyle/>
-                    <a:p>
-                      <a:pPr algn="r"/>
+                <a:tc>
+                  <a:txBody>
+                    <a:bodyPr/>
+                    <a:lstStyle/>
+                    <a:p>
+                      <a:pPr algn="ctr"/>
+                      <a:r>
+                        <a:rPr lang="en-IN" sz="1050" b="0">
+                          <a:solidFill>
+                            <a:srgbClr val="1A1A1A"/>
+                          </a:solidFill>
+                          <a:latin typeface="DM Sans"/>
+                        </a:rPr>
+                        <a:t>78%</a:t>
+                      </a:r>
+                    </a:p>
+                  </a:txBody>
+                  <a:tcPr marL="45720" marR="54864" marT="22860" marB="22860" anchor="ctr">
+                    <a:lnL w="25400" cap="flat" cmpd="sng" algn="ctr">
+                      <a:solidFill>
+                        <a:srgbClr val="FFFFFF"/>
+                      </a:solidFill>
+                      <a:prstDash val="solid"/>
+                    </a:lnL>
+                    <a:lnR w="25400" cap="flat" cmpd="sng" algn="ctr">
+                      <a:solidFill>
+                        <a:srgbClr val="FFFFFF"/>
+                      </a:solidFill>
+                      <a:prstDash val="solid"/>
+                    </a:lnR>
+                    <a:lnT w="25400" cap="flat" cmpd="sng" algn="ctr">
+                      <a:solidFill>
+                        <a:srgbClr val="FFFFFF"/>
+                      </a:solidFill>
+                      <a:prstDash val="solid"/>
+                    </a:lnT>
+                    <a:lnB w="25400" cap="flat" cmpd="sng" algn="ctr">
+                      <a:solidFill>
+                        <a:srgbClr val="FFFFFF"/>
+                      </a:solidFill>
+                      <a:prstDash val="solid"/>
+                    </a:lnB>
+                    <a:lnTlToBr w="0"/>
+                    <a:lnBlToTr w="0"/>
+                    <a:solidFill>
+                      <a:srgbClr val="D6E4F0"/>
+                    </a:solidFill>
+                  </a:tcPr>
+                </a:tc>
+                <a:tc>
+                  <a:txBody>
+                    <a:bodyPr/>
+                    <a:lstStyle/>
+                    <a:p>
+                      <a:pPr algn="ctr"/>
+                      <a:r>
+                        <a:rPr lang="en-IN" sz="1050" b="0">
+                          <a:solidFill>
+                            <a:srgbClr val="1A1A1A"/>
+                          </a:solidFill>
+                          <a:latin typeface="DM Sans"/>
+                        </a:rPr>
+                        <a:t>77%</a:t>
+                      </a:r>
+                    </a:p>
+                  </a:txBody>
+                  <a:tcPr marL="45720" marR="54864" marT="22860" marB="22860" anchor="ctr">
+                    <a:lnL w="25400" cap="flat" cmpd="sng" algn="ctr">
+                      <a:solidFill>
+                        <a:srgbClr val="FFFFFF"/>
+                      </a:solidFill>
+                      <a:prstDash val="solid"/>
+                    </a:lnL>
+                    <a:lnR w="25400" cap="flat" cmpd="sng" algn="ctr">
+                      <a:solidFill>
+                        <a:srgbClr val="FFFFFF"/>
+                      </a:solidFill>
+                      <a:prstDash val="solid"/>
+                    </a:lnR>
+                    <a:lnT w="25400" cap="flat" cmpd="sng" algn="ctr">
+                      <a:solidFill>
+                        <a:srgbClr val="FFFFFF"/>
+                      </a:solidFill>
+                      <a:prstDash val="solid"/>
+                    </a:lnT>
+                    <a:lnB w="25400" cap="flat" cmpd="sng" algn="ctr">
+                      <a:solidFill>
+                        <a:srgbClr val="FFFFFF"/>
+                      </a:solidFill>
+                      <a:prstDash val="solid"/>
+                    </a:lnB>
+                    <a:lnTlToBr w="0"/>
+                    <a:lnBlToTr w="0"/>
+                    <a:solidFill>
+                      <a:srgbClr val="D6E4F0"/>
+                    </a:solidFill>
+                  </a:tcPr>
+                </a:tc>
+                <a:tc>
+                  <a:txBody>
+                    <a:bodyPr/>
+                    <a:lstStyle/>
+                    <a:p>
+                      <a:pPr algn="ctr"/>
+                      <a:r>
+                        <a:rPr lang="en-IN" sz="1050" b="1">
+                          <a:solidFill>
+                            <a:srgbClr val="EA4722"/>
+                          </a:solidFill>
+                          <a:latin typeface="DM Sans"/>
+                        </a:rPr>
+                        <a:t>27%</a:t>
+                      </a:r>
+                    </a:p>
+                  </a:txBody>
+                  <a:tcPr marL="45720" marR="54864" marT="22860" marB="22860" anchor="ctr">
+                    <a:lnL w="25400" cap="flat" cmpd="sng" algn="ctr">
+                      <a:solidFill>
+                        <a:srgbClr val="FFFFFF"/>
+                      </a:solidFill>
+                      <a:prstDash val="solid"/>
+                    </a:lnL>
+                    <a:lnR w="25400" cap="flat" cmpd="sng" algn="ctr">
+                      <a:solidFill>
+                        <a:srgbClr val="FFFFFF"/>
+                      </a:solidFill>
+                      <a:prstDash val="solid"/>
+                    </a:lnR>
+                    <a:lnT w="25400" cap="flat" cmpd="sng" algn="ctr">
+                      <a:solidFill>
+                        <a:srgbClr val="FFFFFF"/>
+                      </a:solidFill>
+                      <a:prstDash val="solid"/>
+                    </a:lnT>
+                    <a:lnB w="25400" cap="flat" cmpd="sng" algn="ctr">
+                      <a:solidFill>
+                        <a:srgbClr val="FFFFFF"/>
+                      </a:solidFill>
+                      <a:prstDash val="solid"/>
+                    </a:lnB>
+                    <a:lnTlToBr w="0"/>
+                    <a:lnBlToTr w="0"/>
+                    <a:solidFill>
+                      <a:srgbClr val="FCE3DA"/>
+                    </a:solidFill>
+                  </a:tcPr>
+                </a:tc>
+                <a:tc>
+                  <a:txBody>
+                    <a:bodyPr/>
+                    <a:lstStyle/>
+                    <a:p>
+                      <a:pPr algn="ctr"/>
+                      <a:r>
+                        <a:rPr lang="en-IN" sz="1050" b="0">
+                          <a:solidFill>
+                            <a:srgbClr val="1A1A1A"/>
+                          </a:solidFill>
+                          <a:latin typeface="DM Sans"/>
+                        </a:rPr>
+                        <a:t>60%</a:t>
+                      </a:r>
+                    </a:p>
+                  </a:txBody>
+                  <a:tcPr marL="45720" marR="54864" marT="22860" marB="22860" anchor="ctr">
+                    <a:lnL w="25400" cap="flat" cmpd="sng" algn="ctr">
+                      <a:solidFill>
+                        <a:srgbClr val="FFFFFF"/>
+                      </a:solidFill>
+                      <a:prstDash val="solid"/>
+                    </a:lnL>
+                    <a:lnR w="25400" cap="flat" cmpd="sng" algn="ctr">
+                      <a:solidFill>
+                        <a:srgbClr val="FFFFFF"/>
+                      </a:solidFill>
+                      <a:prstDash val="solid"/>
+                    </a:lnR>
+                    <a:lnT w="25400" cap="flat" cmpd="sng" algn="ctr">
+                      <a:solidFill>
+                        <a:srgbClr val="FFFFFF"/>
+                      </a:solidFill>
+                      <a:prstDash val="solid"/>
+                    </a:lnT>
+                    <a:lnB w="25400" cap="flat" cmpd="sng" algn="ctr">
+                      <a:solidFill>
+                        <a:srgbClr val="FFFFFF"/>
+                      </a:solidFill>
+                      <a:prstDash val="solid"/>
+                    </a:lnB>
+                    <a:lnTlToBr w="0"/>
+                    <a:lnBlToTr w="0"/>
+                    <a:solidFill>
+                      <a:srgbClr val="F0F0F0"/>
+                    </a:solidFill>
+                  </a:tcPr>
+                </a:tc>
+                <a:tc>
+                  <a:txBody>
+                    <a:bodyPr/>
+                    <a:lstStyle/>
+                    <a:p>
+                      <a:pPr algn="ctr"/>
+                      <a:r>
+                        <a:rPr lang="en-IN" sz="1050" b="1">
+                          <a:solidFill>
+                            <a:srgbClr val="1A1A1A"/>
+                          </a:solidFill>
+                          <a:latin typeface="DM Sans"/>
+                        </a:rPr>
+                        <a:t>61%</a:t>
+                      </a:r>
+                    </a:p>
+                  </a:txBody>
+                  <a:tcPr marL="45720" marR="54864" marT="22860" marB="22860" anchor="ctr">
+                    <a:lnL w="25400" cap="flat" cmpd="sng" algn="ctr">
+                      <a:solidFill>
+                        <a:srgbClr val="FFFFFF"/>
+                      </a:solidFill>
+                      <a:prstDash val="solid"/>
+                    </a:lnL>
+                    <a:lnR w="25400" cap="flat" cmpd="sng" algn="ctr">
+                      <a:solidFill>
+                        <a:srgbClr val="FFFFFF"/>
+                      </a:solidFill>
+                      <a:prstDash val="solid"/>
+                    </a:lnR>
+                    <a:lnT w="25400" cap="flat" cmpd="sng" algn="ctr">
+                      <a:solidFill>
+                        <a:srgbClr val="FFFFFF"/>
+                      </a:solidFill>
+                      <a:prstDash val="solid"/>
+                    </a:lnT>
+                    <a:lnB w="25400" cap="flat" cmpd="sng" algn="ctr">
+                      <a:solidFill>
+                        <a:srgbClr val="FFFFFF"/>
+                      </a:solidFill>
+                      <a:prstDash val="solid"/>
+                    </a:lnB>
+                    <a:lnTlToBr w="0"/>
+                    <a:lnBlToTr w="0"/>
+                    <a:solidFill>
+                      <a:srgbClr val="F0F0F0"/>
+                    </a:solidFill>
+                  </a:tcPr>
+                </a:tc>
+                <a:tc vMerge="1">
+                  <a:txBody>
+                    <a:bodyPr/>
+                    <a:lstStyle/>
+                    <a:p>
+                      <a:endParaRPr lang="en-IN"/>
+                    </a:p>
+                  </a:txBody>
+                  <a:tcPr/>
+                </a:tc>
+              </a:tr>
+              <a:tr h="310896">
+                <a:tc>
+                  <a:txBody>
+                    <a:bodyPr/>
+                    <a:lstStyle/>
+                    <a:p>
+                      <a:pPr algn="l"/>
+                      <a:r>
+                        <a:rPr lang="en-IN" sz="1050" b="0">
+                          <a:solidFill>
+                            <a:srgbClr val="1A1A1A"/>
+                          </a:solidFill>
+                          <a:latin typeface="DM Sans"/>
+                        </a:rPr>
+                        <a:t>Knows family is covered</a:t>
+                      </a:r>
+                    </a:p>
+                  </a:txBody>
+                  <a:tcPr marL="45720" marR="54864" marT="22860" marB="22860" anchor="ctr">
+                    <a:lnL w="0"/>
+                    <a:lnR w="0"/>
+                    <a:lnT w="0"/>
+                    <a:lnB w="9525" cap="flat" cmpd="sng" algn="ctr">
+                      <a:solidFill>
+                        <a:srgbClr val="E0E0E0"/>
+                      </a:solidFill>
+                      <a:prstDash val="solid"/>
+                    </a:lnB>
+                    <a:lnTlToBr w="0"/>
+                    <a:lnBlToTr w="0"/>
+                  </a:tcPr>
+                </a:tc>
+                <a:tc>
+                  <a:txBody>
+                    <a:bodyPr/>
+                    <a:lstStyle/>
+                    <a:p>
+                      <a:pPr algn="ctr"/>
+                      <a:r>
+                        <a:rPr lang="en-IN" sz="1050" b="0">
+                          <a:solidFill>
+                            <a:srgbClr val="1A1A1A"/>
+                          </a:solidFill>
+                          <a:latin typeface="DM Sans"/>
+                        </a:rPr>
+                        <a:t>74%</a:t>
+                      </a:r>
+                    </a:p>
+                  </a:txBody>
+                  <a:tcPr marL="45720" marR="54864" marT="22860" marB="22860" anchor="ctr">
+                    <a:lnL w="25400" cap="flat" cmpd="sng" algn="ctr">
+                      <a:solidFill>
+                        <a:srgbClr val="FFFFFF"/>
+                      </a:solidFill>
+                      <a:prstDash val="solid"/>
+                    </a:lnL>
+                    <a:lnR w="25400" cap="flat" cmpd="sng" algn="ctr">
+                      <a:solidFill>
+                        <a:srgbClr val="FFFFFF"/>
+                      </a:solidFill>
+                      <a:prstDash val="solid"/>
+                    </a:lnR>
+                    <a:lnT w="25400" cap="flat" cmpd="sng" algn="ctr">
+                      <a:solidFill>
+                        <a:srgbClr val="FFFFFF"/>
+                      </a:solidFill>
+                      <a:prstDash val="solid"/>
+                    </a:lnT>
+                    <a:lnB w="25400" cap="flat" cmpd="sng" algn="ctr">
+                      <a:solidFill>
+                        <a:srgbClr val="FFFFFF"/>
+                      </a:solidFill>
+                      <a:prstDash val="solid"/>
+                    </a:lnB>
+                    <a:lnTlToBr w="0"/>
+                    <a:lnBlToTr w="0"/>
+                    <a:solidFill>
+                      <a:srgbClr val="F0F0F0"/>
+                    </a:solidFill>
+                  </a:tcPr>
+                </a:tc>
+                <a:tc>
+                  <a:txBody>
+                    <a:bodyPr/>
+                    <a:lstStyle/>
+                    <a:p>
+                      <a:pPr algn="ctr"/>
+                      <a:r>
+                        <a:rPr lang="en-IN" sz="1050" b="0">
+                          <a:solidFill>
+                            <a:srgbClr val="1A1A1A"/>
+                          </a:solidFill>
+                          <a:latin typeface="DM Sans"/>
+                        </a:rPr>
+                        <a:t>77%</a:t>
+                      </a:r>
+                    </a:p>
+                  </a:txBody>
+                  <a:tcPr marL="45720" marR="54864" marT="22860" marB="22860" anchor="ctr">
+                    <a:lnL w="25400" cap="flat" cmpd="sng" algn="ctr">
+                      <a:solidFill>
+                        <a:srgbClr val="FFFFFF"/>
+                      </a:solidFill>
+                      <a:prstDash val="solid"/>
+                    </a:lnL>
+                    <a:lnR w="25400" cap="flat" cmpd="sng" algn="ctr">
+                      <a:solidFill>
+                        <a:srgbClr val="FFFFFF"/>
+                      </a:solidFill>
+                      <a:prstDash val="solid"/>
+                    </a:lnR>
+                    <a:lnT w="25400" cap="flat" cmpd="sng" algn="ctr">
+                      <a:solidFill>
+                        <a:srgbClr val="FFFFFF"/>
+                      </a:solidFill>
+                      <a:prstDash val="solid"/>
+                    </a:lnT>
+                    <a:lnB w="25400" cap="flat" cmpd="sng" algn="ctr">
+                      <a:solidFill>
+                        <a:srgbClr val="FFFFFF"/>
+                      </a:solidFill>
+                      <a:prstDash val="solid"/>
+                    </a:lnB>
+                    <a:lnTlToBr w="0"/>
+                    <a:lnBlToTr w="0"/>
+                    <a:solidFill>
+                      <a:srgbClr val="D6E4F0"/>
+                    </a:solidFill>
+                  </a:tcPr>
+                </a:tc>
+                <a:tc>
+                  <a:txBody>
+                    <a:bodyPr/>
+                    <a:lstStyle/>
+                    <a:p>
+                      <a:pPr algn="ctr"/>
+                      <a:r>
+                        <a:rPr lang="en-IN" sz="1050" b="0">
+                          <a:solidFill>
+                            <a:srgbClr val="1A1A1A"/>
+                          </a:solidFill>
+                          <a:latin typeface="DM Sans"/>
+                        </a:rPr>
+                        <a:t>64%</a:t>
+                      </a:r>
+                    </a:p>
+                  </a:txBody>
+                  <a:tcPr marL="45720" marR="54864" marT="22860" marB="22860" anchor="ctr">
+                    <a:lnL w="25400" cap="flat" cmpd="sng" algn="ctr">
+                      <a:solidFill>
+                        <a:srgbClr val="FFFFFF"/>
+                      </a:solidFill>
+                      <a:prstDash val="solid"/>
+                    </a:lnL>
+                    <a:lnR w="25400" cap="flat" cmpd="sng" algn="ctr">
+                      <a:solidFill>
+                        <a:srgbClr val="FFFFFF"/>
+                      </a:solidFill>
+                      <a:prstDash val="solid"/>
+                    </a:lnR>
+                    <a:lnT w="25400" cap="flat" cmpd="sng" algn="ctr">
+                      <a:solidFill>
+                        <a:srgbClr val="FFFFFF"/>
+                      </a:solidFill>
+                      <a:prstDash val="solid"/>
+                    </a:lnT>
+                    <a:lnB w="25400" cap="flat" cmpd="sng" algn="ctr">
+                      <a:solidFill>
+                        <a:srgbClr val="FFFFFF"/>
+                      </a:solidFill>
+                      <a:prstDash val="solid"/>
+                    </a:lnB>
+                    <a:lnTlToBr w="0"/>
+                    <a:lnBlToTr w="0"/>
+                    <a:solidFill>
+                      <a:srgbClr val="F0F0F0"/>
+                    </a:solidFill>
+                  </a:tcPr>
+                </a:tc>
+                <a:tc>
+                  <a:txBody>
+                    <a:bodyPr/>
+                    <a:lstStyle/>
+                    <a:p>
+                      <a:pPr algn="ctr"/>
+                      <a:r>
+                        <a:rPr lang="en-IN" sz="1050" b="0">
+                          <a:solidFill>
+                            <a:srgbClr val="1A1A1A"/>
+                          </a:solidFill>
+                          <a:latin typeface="DM Sans"/>
+                        </a:rPr>
+                        <a:t>70%</a:t>
+                      </a:r>
+                    </a:p>
+                  </a:txBody>
+                  <a:tcPr marL="45720" marR="54864" marT="22860" marB="22860" anchor="ctr">
+                    <a:lnL w="25400" cap="flat" cmpd="sng" algn="ctr">
+                      <a:solidFill>
+                        <a:srgbClr val="FFFFFF"/>
+                      </a:solidFill>
+                      <a:prstDash val="solid"/>
+                    </a:lnL>
+                    <a:lnR w="25400" cap="flat" cmpd="sng" algn="ctr">
+                      <a:solidFill>
+                        <a:srgbClr val="FFFFFF"/>
+                      </a:solidFill>
+                      <a:prstDash val="solid"/>
+                    </a:lnR>
+                    <a:lnT w="25400" cap="flat" cmpd="sng" algn="ctr">
+                      <a:solidFill>
+                        <a:srgbClr val="FFFFFF"/>
+                      </a:solidFill>
+                      <a:prstDash val="solid"/>
+                    </a:lnT>
+                    <a:lnB w="25400" cap="flat" cmpd="sng" algn="ctr">
+                      <a:solidFill>
+                        <a:srgbClr val="FFFFFF"/>
+                      </a:solidFill>
+                      <a:prstDash val="solid"/>
+                    </a:lnB>
+                    <a:lnTlToBr w="0"/>
+                    <a:lnBlToTr w="0"/>
+                    <a:solidFill>
+                      <a:srgbClr val="F0F0F0"/>
+                    </a:solidFill>
+                  </a:tcPr>
+                </a:tc>
+                <a:tc>
+                  <a:txBody>
+                    <a:bodyPr/>
+                    <a:lstStyle/>
+                    <a:p>
+                      <a:pPr algn="ctr"/>
+                      <a:r>
+                        <a:rPr lang="en-IN" sz="1050" b="1">
+                          <a:solidFill>
+                            <a:srgbClr val="1A1A1A"/>
+                          </a:solidFill>
+                          <a:latin typeface="DM Sans"/>
+                        </a:rPr>
+                        <a:t>66%</a:t>
+                      </a:r>
+                    </a:p>
+                  </a:txBody>
+                  <a:tcPr marL="45720" marR="54864" marT="22860" marB="22860" anchor="ctr">
+                    <a:lnL w="25400" cap="flat" cmpd="sng" algn="ctr">
+                      <a:solidFill>
+                        <a:srgbClr val="FFFFFF"/>
+                      </a:solidFill>
+                      <a:prstDash val="solid"/>
+                    </a:lnL>
+                    <a:lnR w="25400" cap="flat" cmpd="sng" algn="ctr">
+                      <a:solidFill>
+                        <a:srgbClr val="FFFFFF"/>
+                      </a:solidFill>
+                      <a:prstDash val="solid"/>
+                    </a:lnR>
+                    <a:lnT w="25400" cap="flat" cmpd="sng" algn="ctr">
+                      <a:solidFill>
+                        <a:srgbClr val="FFFFFF"/>
+                      </a:solidFill>
+                      <a:prstDash val="solid"/>
+                    </a:lnT>
+                    <a:lnB w="25400" cap="flat" cmpd="sng" algn="ctr">
+                      <a:solidFill>
+                        <a:srgbClr val="FFFFFF"/>
+                      </a:solidFill>
+                      <a:prstDash val="solid"/>
+                    </a:lnB>
+                    <a:lnTlToBr w="0"/>
+                    <a:lnBlToTr w="0"/>
+                    <a:solidFill>
+                      <a:srgbClr val="F0F0F0"/>
+                    </a:solidFill>
+                  </a:tcPr>
+                </a:tc>
+                <a:tc vMerge="1">
+                  <a:txBody>
+                    <a:bodyPr/>
+                    <a:lstStyle/>
+                    <a:p>
+                      <a:endParaRPr lang="en-IN"/>
+                    </a:p>
+                  </a:txBody>
+                  <a:tcPr/>
+                </a:tc>
+              </a:tr>
+              <a:tr h="201168">
+                <a:tc gridSpan="7">
+                  <a:txBody>
+                    <a:bodyPr/>
+                    <a:lstStyle/>
+                    <a:p>
+                      <a:pPr algn="l"/>
+                      <a:r>
+                        <a:rPr lang="en-IN" sz="800" b="0">
+                          <a:solidFill>
+                            <a:srgbClr val="EA4722"/>
+                          </a:solidFill>
+                          <a:latin typeface="DM Sans ExtraBold"/>
+                        </a:rPr>
+                        <a:t>ACTION</a:t>
+                      </a:r>
+                    </a:p>
+                  </a:txBody>
+                  <a:tcPr marL="45720" marR="54864" marT="45720" marB="0" anchor="ctr">
+                    <a:lnL w="0"/>
+                    <a:lnR w="0"/>
+                    <a:lnT w="9525" cap="flat" cmpd="sng" algn="ctr">
+                      <a:solidFill>
+                        <a:srgbClr val="808080"/>
+                      </a:solidFill>
+                      <a:prstDash val="solid"/>
+                    </a:lnT>
+                    <a:lnB w="0"/>
+                    <a:lnTlToBr w="0"/>
+                    <a:lnBlToTr w="0"/>
+                  </a:tcPr>
+                </a:tc>
+                <a:tc hMerge="1">
+                  <a:txBody>
+                    <a:bodyPr/>
+                    <a:lstStyle/>
+                    <a:p>
+                      <a:endParaRPr lang="en-IN"/>
+                    </a:p>
+                  </a:txBody>
+                  <a:tcPr/>
+                </a:tc>
+                <a:tc hMerge="1">
+                  <a:txBody>
+                    <a:bodyPr/>
+                    <a:lstStyle/>
+                    <a:p>
+                      <a:endParaRPr lang="en-IN"/>
+                    </a:p>
+                  </a:txBody>
+                  <a:tcPr/>
+                </a:tc>
+                <a:tc hMerge="1">
+                  <a:txBody>
+                    <a:bodyPr/>
+                    <a:lstStyle/>
+                    <a:p>
+                      <a:endParaRPr lang="en-IN"/>
+                    </a:p>
+                  </a:txBody>
+                  <a:tcPr/>
+                </a:tc>
+                <a:tc hMerge="1">
+                  <a:txBody>
+                    <a:bodyPr/>
+                    <a:lstStyle/>
+                    <a:p>
+                      <a:endParaRPr lang="en-IN"/>
+                    </a:p>
+                  </a:txBody>
+                  <a:tcPr/>
+                </a:tc>
+                <a:tc hMerge="1">
+                  <a:txBody>
+                    <a:bodyPr/>
+                    <a:lstStyle/>
+                    <a:p>
+                      <a:endParaRPr lang="en-IN"/>
+                    </a:p>
+                  </a:txBody>
+                  <a:tcPr/>
+                </a:tc>
+                <a:tc hMerge="1">
+                  <a:txBody>
+                    <a:bodyPr/>
+                    <a:lstStyle/>
+                    <a:p>
+                      <a:endParaRPr lang="en-IN"/>
+                    </a:p>
+                  </a:txBody>
+                  <a:tcPr/>
+                </a:tc>
+              </a:tr>
+              <a:tr h="310896">
+                <a:tc>
+                  <a:txBody>
+                    <a:bodyPr/>
+                    <a:lstStyle/>
+                    <a:p>
+                      <a:pPr algn="l"/>
+                      <a:r>
+                        <a:rPr lang="en-IN" sz="1050" b="0">
+                          <a:solidFill>
+                            <a:srgbClr val="1A1A1A"/>
+                          </a:solidFill>
+                          <a:latin typeface="DM Sans"/>
+                        </a:rPr>
+                        <a:t>Has the PB Health app</a:t>
+                      </a:r>
+                    </a:p>
+                  </a:txBody>
+                  <a:tcPr marL="45720" marR="54864" marT="22860" marB="22860" anchor="ctr">
+                    <a:lnL w="0"/>
+                    <a:lnR w="0"/>
+                    <a:lnT w="0"/>
+                    <a:lnB w="9525" cap="flat" cmpd="sng" algn="ctr">
+                      <a:solidFill>
+                        <a:srgbClr val="E0E0E0"/>
+                      </a:solidFill>
+                      <a:prstDash val="solid"/>
+                    </a:lnB>
+                    <a:lnTlToBr w="0"/>
+                    <a:lnBlToTr w="0"/>
+                  </a:tcPr>
+                </a:tc>
+                <a:tc>
+                  <a:txBody>
+                    <a:bodyPr/>
+                    <a:lstStyle/>
+                    <a:p>
+                      <a:pPr algn="ctr"/>
+                      <a:r>
+                        <a:rPr lang="en-IN" sz="1050" b="1">
+                          <a:solidFill>
+                            <a:srgbClr val="EA4722"/>
+                          </a:solidFill>
+                          <a:latin typeface="DM Sans"/>
+                        </a:rPr>
+                        <a:t>30%</a:t>
+                      </a:r>
+                    </a:p>
+                  </a:txBody>
+                  <a:tcPr marL="45720" marR="54864" marT="22860" marB="22860" anchor="ctr">
+                    <a:lnL w="25400" cap="flat" cmpd="sng" algn="ctr">
+                      <a:solidFill>
+                        <a:srgbClr val="FFFFFF"/>
+                      </a:solidFill>
+                      <a:prstDash val="solid"/>
+                    </a:lnL>
+                    <a:lnR w="25400" cap="flat" cmpd="sng" algn="ctr">
+                      <a:solidFill>
+                        <a:srgbClr val="FFFFFF"/>
+                      </a:solidFill>
+                      <a:prstDash val="solid"/>
+                    </a:lnR>
+                    <a:lnT w="25400" cap="flat" cmpd="sng" algn="ctr">
+                      <a:solidFill>
+                        <a:srgbClr val="FFFFFF"/>
+                      </a:solidFill>
+                      <a:prstDash val="solid"/>
+                    </a:lnT>
+                    <a:lnB w="25400" cap="flat" cmpd="sng" algn="ctr">
+                      <a:solidFill>
+                        <a:srgbClr val="FFFFFF"/>
+                      </a:solidFill>
+                      <a:prstDash val="solid"/>
+                    </a:lnB>
+                    <a:lnTlToBr w="0"/>
+                    <a:lnBlToTr w="0"/>
+                    <a:solidFill>
+                      <a:srgbClr val="FCE3DA"/>
+                    </a:solidFill>
+                  </a:tcPr>
+                </a:tc>
+                <a:tc>
+                  <a:txBody>
+                    <a:bodyPr/>
+                    <a:lstStyle/>
+                    <a:p>
+                      <a:pPr algn="ctr"/>
+                      <a:r>
+                        <a:rPr lang="en-IN" sz="1050" b="0">
+                          <a:solidFill>
+                            <a:srgbClr val="1A1A1A"/>
+                          </a:solidFill>
+                          <a:latin typeface="DM Sans"/>
+                        </a:rPr>
+                        <a:t>62%</a:t>
+                      </a:r>
+                    </a:p>
+                  </a:txBody>
+                  <a:tcPr marL="45720" marR="54864" marT="22860" marB="22860" anchor="ctr">
+                    <a:lnL w="25400" cap="flat" cmpd="sng" algn="ctr">
+                      <a:solidFill>
+                        <a:srgbClr val="FFFFFF"/>
+                      </a:solidFill>
+                      <a:prstDash val="solid"/>
+                    </a:lnL>
+                    <a:lnR w="25400" cap="flat" cmpd="sng" algn="ctr">
+                      <a:solidFill>
+                        <a:srgbClr val="FFFFFF"/>
+                      </a:solidFill>
+                      <a:prstDash val="solid"/>
+                    </a:lnR>
+                    <a:lnT w="25400" cap="flat" cmpd="sng" algn="ctr">
+                      <a:solidFill>
+                        <a:srgbClr val="FFFFFF"/>
+                      </a:solidFill>
+                      <a:prstDash val="solid"/>
+                    </a:lnT>
+                    <a:lnB w="25400" cap="flat" cmpd="sng" algn="ctr">
+                      <a:solidFill>
+                        <a:srgbClr val="FFFFFF"/>
+                      </a:solidFill>
+                      <a:prstDash val="solid"/>
+                    </a:lnB>
+                    <a:lnTlToBr w="0"/>
+                    <a:lnBlToTr w="0"/>
+                    <a:solidFill>
+                      <a:srgbClr val="F0F0F0"/>
+                    </a:solidFill>
+                  </a:tcPr>
+                </a:tc>
+                <a:tc>
+                  <a:txBody>
+                    <a:bodyPr/>
+                    <a:lstStyle/>
+                    <a:p>
+                      <a:pPr algn="ctr"/>
+                      <a:r>
+                        <a:rPr lang="en-IN" sz="1050" b="1">
+                          <a:solidFill>
+                            <a:srgbClr val="EA4722"/>
+                          </a:solidFill>
+                          <a:latin typeface="DM Sans"/>
+                        </a:rPr>
+                        <a:t>0%</a:t>
+                      </a:r>
+                    </a:p>
+                  </a:txBody>
+                  <a:tcPr marL="45720" marR="54864" marT="22860" marB="22860" anchor="ctr">
+                    <a:lnL w="25400" cap="flat" cmpd="sng" algn="ctr">
+                      <a:solidFill>
+                        <a:srgbClr val="FFFFFF"/>
+                      </a:solidFill>
+                      <a:prstDash val="solid"/>
+                    </a:lnL>
+                    <a:lnR w="25400" cap="flat" cmpd="sng" algn="ctr">
+                      <a:solidFill>
+                        <a:srgbClr val="FFFFFF"/>
+                      </a:solidFill>
+                      <a:prstDash val="solid"/>
+                    </a:lnR>
+                    <a:lnT w="25400" cap="flat" cmpd="sng" algn="ctr">
+                      <a:solidFill>
+                        <a:srgbClr val="FFFFFF"/>
+                      </a:solidFill>
+                      <a:prstDash val="solid"/>
+                    </a:lnT>
+                    <a:lnB w="25400" cap="flat" cmpd="sng" algn="ctr">
+                      <a:solidFill>
+                        <a:srgbClr val="FFFFFF"/>
+                      </a:solidFill>
+                      <a:prstDash val="solid"/>
+                    </a:lnB>
+                    <a:lnTlToBr w="0"/>
+                    <a:lnBlToTr w="0"/>
+                    <a:solidFill>
+                      <a:srgbClr val="FCE3DA"/>
+                    </a:solidFill>
+                  </a:tcPr>
+                </a:tc>
+                <a:tc>
+                  <a:txBody>
+                    <a:bodyPr/>
+                    <a:lstStyle/>
+                    <a:p>
+                      <a:pPr algn="ctr"/>
+                      <a:r>
+                        <a:rPr lang="en-IN" sz="1050" b="1">
+                          <a:solidFill>
+                            <a:srgbClr val="EA4722"/>
+                          </a:solidFill>
+                          <a:latin typeface="DM Sans"/>
+                        </a:rPr>
+                        <a:t>10%</a:t>
+                      </a:r>
+                    </a:p>
+                  </a:txBody>
+                  <a:tcPr marL="45720" marR="54864" marT="22860" marB="22860" anchor="ctr">
+                    <a:lnL w="25400" cap="flat" cmpd="sng" algn="ctr">
+                      <a:solidFill>
+                        <a:srgbClr val="FFFFFF"/>
+                      </a:solidFill>
+                      <a:prstDash val="solid"/>
+                    </a:lnL>
+                    <a:lnR w="25400" cap="flat" cmpd="sng" algn="ctr">
+                      <a:solidFill>
+                        <a:srgbClr val="FFFFFF"/>
+                      </a:solidFill>
+                      <a:prstDash val="solid"/>
+                    </a:lnR>
+                    <a:lnT w="25400" cap="flat" cmpd="sng" algn="ctr">
+                      <a:solidFill>
+                        <a:srgbClr val="FFFFFF"/>
+                      </a:solidFill>
+                      <a:prstDash val="solid"/>
+                    </a:lnT>
+                    <a:lnB w="25400" cap="flat" cmpd="sng" algn="ctr">
+                      <a:solidFill>
+                        <a:srgbClr val="FFFFFF"/>
+                      </a:solidFill>
+                      <a:prstDash val="solid"/>
+                    </a:lnB>
+                    <a:lnTlToBr w="0"/>
+                    <a:lnBlToTr w="0"/>
+                    <a:solidFill>
+                      <a:srgbClr val="FCE3DA"/>
+                    </a:solidFill>
+                  </a:tcPr>
+                </a:tc>
+                <a:tc>
+                  <a:txBody>
+                    <a:bodyPr/>
+                    <a:lstStyle/>
+                    <a:p>
+                      <a:pPr algn="ctr"/>
+                      <a:r>
+                        <a:rPr lang="en-IN" sz="1050" b="1">
+                          <a:solidFill>
+                            <a:srgbClr val="EA4722"/>
+                          </a:solidFill>
+                          <a:latin typeface="DM Sans"/>
+                        </a:rPr>
+                        <a:t>26%</a:t>
+                      </a:r>
+                    </a:p>
+                  </a:txBody>
+                  <a:tcPr marL="45720" marR="54864" marT="22860" marB="22860" anchor="ctr">
+                    <a:lnL w="25400" cap="flat" cmpd="sng" algn="ctr">
+                      <a:solidFill>
+                        <a:srgbClr val="FFFFFF"/>
+                      </a:solidFill>
+                      <a:prstDash val="solid"/>
+                    </a:lnL>
+                    <a:lnR w="25400" cap="flat" cmpd="sng" algn="ctr">
+                      <a:solidFill>
+                        <a:srgbClr val="FFFFFF"/>
+                      </a:solidFill>
+                      <a:prstDash val="solid"/>
+                    </a:lnR>
+                    <a:lnT w="25400" cap="flat" cmpd="sng" algn="ctr">
+                      <a:solidFill>
+                        <a:srgbClr val="FFFFFF"/>
+                      </a:solidFill>
+                      <a:prstDash val="solid"/>
+                    </a:lnT>
+                    <a:lnB w="25400" cap="flat" cmpd="sng" algn="ctr">
+                      <a:solidFill>
+                        <a:srgbClr val="FFFFFF"/>
+                      </a:solidFill>
+                      <a:prstDash val="solid"/>
+                    </a:lnB>
+                    <a:lnTlToBr w="0"/>
+                    <a:lnBlToTr w="0"/>
+                    <a:solidFill>
+                      <a:srgbClr val="FCE3DA"/>
+                    </a:solidFill>
+                  </a:tcPr>
+                </a:tc>
+                <a:tc rowSpan="2">
+                  <a:txBody>
+                    <a:bodyPr/>
+                    <a:lstStyle/>
+                    <a:p>
+                      <a:pPr algn="l"/>
+                      <a:r>
+                        <a:rPr lang="en-IN" sz="1000" b="0">
+                          <a:solidFill>
+                            <a:srgbClr val="1A1A1A"/>
+                          </a:solidFill>
+                          <a:latin typeface="DM Sans ExtraBold"/>
+                        </a:rPr>
+                        <a:t>Benefits drive visits. </a:t>
+                      </a:r>
                       <a:r>
                         <a:rPr lang="en-IN" sz="1000" b="0">
                           <a:solidFill>
@@ -5052,7 +6956,35 @@
                           </a:solidFill>
                           <a:latin typeface="DM Sans"/>
                         </a:rPr>
-                        <a:t>1st to 5th</a:t>
+                        <a:t>85% of those who know the 75% discount will visit, against 35% of those who don't. Only 1 in 4 has the app.</a:t>
+                      </a:r>
+                    </a:p>
+                  </a:txBody>
+                  <a:tcPr marL="182880" marR="45720" marT="22860" marB="22860" anchor="ctr">
+                    <a:lnL w="0"/>
+                    <a:lnR w="0"/>
+                    <a:lnT w="0"/>
+                    <a:lnB w="0"/>
+                    <a:lnTlToBr w="0"/>
+                    <a:lnBlToTr w="0"/>
+                  </a:tcPr>
+                </a:tc>
+              </a:tr>
+              <a:tr h="310896">
+                <a:tc>
+                  <a:txBody>
+                    <a:bodyPr/>
+                    <a:lstStyle/>
+                    <a:p>
+                      <a:pPr algn="l"/>
+                      <a:r>
+                        <a:rPr lang="en-IN" sz="1050" b="0">
+                          <a:solidFill>
+                            <a:srgbClr val="1A1A1A"/>
+                          </a:solidFill>
+                          <a:latin typeface="DM Sans"/>
+                        </a:rPr>
+                        <a:t>Will visit next time</a:t>
                       </a:r>
                     </a:p>
                   </a:txBody>
@@ -5070,269 +7002,252 @@
                     <a:lnBlToTr w="0"/>
                   </a:tcPr>
                 </a:tc>
-                <a:tc hMerge="1">
-                  <a:txBody>
-                    <a:bodyPr/>
-                    <a:lstStyle/>
-                    <a:p>
-                      <a:endParaRPr lang="en-IN"/>
-                    </a:p>
-                  </a:txBody>
-                  <a:tcPr/>
-                </a:tc>
-                <a:tc hMerge="1">
-                  <a:txBody>
-                    <a:bodyPr/>
-                    <a:lstStyle/>
-                    <a:p>
-                      <a:endParaRPr lang="en-IN"/>
-                    </a:p>
-                  </a:txBody>
-                  <a:tcPr/>
-                </a:tc>
-              </a:tr>
-              <a:tr h="187452">
                 <a:tc>
                   <a:txBody>
                     <a:bodyPr/>
                     <a:lstStyle/>
                     <a:p>
-                      <a:pPr algn="l"/>
+                      <a:pPr algn="ctr"/>
                       <a:r>
-                        <a:rPr lang="en-IN" sz="1000" b="0">
+                        <a:rPr lang="en-IN" sz="1050" b="0">
                           <a:solidFill>
                             <a:srgbClr val="1A1A1A"/>
                           </a:solidFill>
                           <a:latin typeface="DM Sans"/>
                         </a:rPr>
-                        <a:t>P-120</a:t>
+                        <a:t>65%</a:t>
                       </a:r>
                     </a:p>
                   </a:txBody>
                   <a:tcPr marL="45720" marR="54864" marT="22860" marB="22860" anchor="ctr">
-                    <a:lnL w="0"/>
-                    <a:lnR w="0"/>
-                    <a:lnT w="0"/>
-                    <a:lnB w="9525" cap="flat" cmpd="sng" algn="ctr">
-                      <a:solidFill>
-                        <a:srgbClr val="E0E0E0"/>
+                    <a:lnL w="25400" cap="flat" cmpd="sng" algn="ctr">
+                      <a:solidFill>
+                        <a:srgbClr val="FFFFFF"/>
+                      </a:solidFill>
+                      <a:prstDash val="solid"/>
+                    </a:lnL>
+                    <a:lnR w="25400" cap="flat" cmpd="sng" algn="ctr">
+                      <a:solidFill>
+                        <a:srgbClr val="FFFFFF"/>
+                      </a:solidFill>
+                      <a:prstDash val="solid"/>
+                    </a:lnR>
+                    <a:lnT w="25400" cap="flat" cmpd="sng" algn="ctr">
+                      <a:solidFill>
+                        <a:srgbClr val="FFFFFF"/>
+                      </a:solidFill>
+                      <a:prstDash val="solid"/>
+                    </a:lnT>
+                    <a:lnB w="25400" cap="flat" cmpd="sng" algn="ctr">
+                      <a:solidFill>
+                        <a:srgbClr val="FFFFFF"/>
                       </a:solidFill>
                       <a:prstDash val="solid"/>
                     </a:lnB>
                     <a:lnTlToBr w="0"/>
                     <a:lnBlToTr w="0"/>
+                    <a:solidFill>
+                      <a:srgbClr val="F0F0F0"/>
+                    </a:solidFill>
                   </a:tcPr>
                 </a:tc>
-                <a:tc gridSpan="3">
-                  <a:txBody>
-                    <a:bodyPr/>
-                    <a:lstStyle/>
-                    <a:p>
-                      <a:pPr algn="r"/>
+                <a:tc>
+                  <a:txBody>
+                    <a:bodyPr/>
+                    <a:lstStyle/>
+                    <a:p>
+                      <a:pPr algn="ctr"/>
                       <a:r>
-                        <a:rPr lang="en-IN" sz="1000" b="0">
+                        <a:rPr lang="en-IN" sz="1050" b="0">
                           <a:solidFill>
                             <a:srgbClr val="1A1A1A"/>
                           </a:solidFill>
                           <a:latin typeface="DM Sans"/>
                         </a:rPr>
-                        <a:t>B1, 1st to 3rd</a:t>
+                        <a:t>85%</a:t>
                       </a:r>
                     </a:p>
                   </a:txBody>
                   <a:tcPr marL="45720" marR="54864" marT="22860" marB="22860" anchor="ctr">
-                    <a:lnL w="0"/>
-                    <a:lnR w="0"/>
-                    <a:lnT w="0"/>
-                    <a:lnB w="9525" cap="flat" cmpd="sng" algn="ctr">
-                      <a:solidFill>
-                        <a:srgbClr val="E0E0E0"/>
+                    <a:lnL w="25400" cap="flat" cmpd="sng" algn="ctr">
+                      <a:solidFill>
+                        <a:srgbClr val="FFFFFF"/>
+                      </a:solidFill>
+                      <a:prstDash val="solid"/>
+                    </a:lnL>
+                    <a:lnR w="25400" cap="flat" cmpd="sng" algn="ctr">
+                      <a:solidFill>
+                        <a:srgbClr val="FFFFFF"/>
+                      </a:solidFill>
+                      <a:prstDash val="solid"/>
+                    </a:lnR>
+                    <a:lnT w="25400" cap="flat" cmpd="sng" algn="ctr">
+                      <a:solidFill>
+                        <a:srgbClr val="FFFFFF"/>
+                      </a:solidFill>
+                      <a:prstDash val="solid"/>
+                    </a:lnT>
+                    <a:lnB w="25400" cap="flat" cmpd="sng" algn="ctr">
+                      <a:solidFill>
+                        <a:srgbClr val="FFFFFF"/>
                       </a:solidFill>
                       <a:prstDash val="solid"/>
                     </a:lnB>
                     <a:lnTlToBr w="0"/>
                     <a:lnBlToTr w="0"/>
+                    <a:solidFill>
+                      <a:srgbClr val="D6E4F0"/>
+                    </a:solidFill>
                   </a:tcPr>
                 </a:tc>
-                <a:tc hMerge="1">
-                  <a:txBody>
-                    <a:bodyPr/>
-                    <a:lstStyle/>
-                    <a:p>
-                      <a:endParaRPr lang="en-IN"/>
-                    </a:p>
-                  </a:txBody>
-                  <a:tcPr/>
-                </a:tc>
-                <a:tc hMerge="1">
-                  <a:txBody>
-                    <a:bodyPr/>
-                    <a:lstStyle/>
-                    <a:p>
-                      <a:endParaRPr lang="en-IN"/>
-                    </a:p>
-                  </a:txBody>
-                  <a:tcPr/>
-                </a:tc>
-              </a:tr>
-              <a:tr h="187452">
                 <a:tc>
                   <a:txBody>
                     <a:bodyPr/>
                     <a:lstStyle/>
                     <a:p>
-                      <a:pPr algn="l"/>
+                      <a:pPr algn="ctr"/>
                       <a:r>
-                        <a:rPr lang="en-IN" sz="1000" b="0">
+                        <a:rPr lang="en-IN" sz="1050" b="0">
                           <a:solidFill>
                             <a:srgbClr val="1A1A1A"/>
                           </a:solidFill>
                           <a:latin typeface="DM Sans"/>
                         </a:rPr>
-                        <a:t>P-116</a:t>
+                        <a:t>73%</a:t>
                       </a:r>
                     </a:p>
                   </a:txBody>
                   <a:tcPr marL="45720" marR="54864" marT="22860" marB="22860" anchor="ctr">
-                    <a:lnL w="0"/>
-                    <a:lnR w="0"/>
-                    <a:lnT w="0"/>
-                    <a:lnB w="9525" cap="flat" cmpd="sng" algn="ctr">
-                      <a:solidFill>
-                        <a:srgbClr val="E0E0E0"/>
+                    <a:lnL w="25400" cap="flat" cmpd="sng" algn="ctr">
+                      <a:solidFill>
+                        <a:srgbClr val="FFFFFF"/>
+                      </a:solidFill>
+                      <a:prstDash val="solid"/>
+                    </a:lnL>
+                    <a:lnR w="25400" cap="flat" cmpd="sng" algn="ctr">
+                      <a:solidFill>
+                        <a:srgbClr val="FFFFFF"/>
+                      </a:solidFill>
+                      <a:prstDash val="solid"/>
+                    </a:lnR>
+                    <a:lnT w="25400" cap="flat" cmpd="sng" algn="ctr">
+                      <a:solidFill>
+                        <a:srgbClr val="FFFFFF"/>
+                      </a:solidFill>
+                      <a:prstDash val="solid"/>
+                    </a:lnT>
+                    <a:lnB w="25400" cap="flat" cmpd="sng" algn="ctr">
+                      <a:solidFill>
+                        <a:srgbClr val="FFFFFF"/>
                       </a:solidFill>
                       <a:prstDash val="solid"/>
                     </a:lnB>
                     <a:lnTlToBr w="0"/>
                     <a:lnBlToTr w="0"/>
+                    <a:solidFill>
+                      <a:srgbClr val="F0F0F0"/>
+                    </a:solidFill>
                   </a:tcPr>
                 </a:tc>
-                <a:tc gridSpan="3">
-                  <a:txBody>
-                    <a:bodyPr/>
-                    <a:lstStyle/>
-                    <a:p>
-                      <a:pPr algn="r"/>
+                <a:tc>
+                  <a:txBody>
+                    <a:bodyPr/>
+                    <a:lstStyle/>
+                    <a:p>
+                      <a:pPr algn="ctr"/>
                       <a:r>
-                        <a:rPr lang="en-IN" sz="1000" b="0">
+                        <a:rPr lang="en-IN" sz="1050" b="0">
                           <a:solidFill>
                             <a:srgbClr val="1A1A1A"/>
                           </a:solidFill>
                           <a:latin typeface="DM Sans"/>
                         </a:rPr>
-                        <a:t>B1, 1st to 3rd</a:t>
+                        <a:t>60%</a:t>
                       </a:r>
                     </a:p>
                   </a:txBody>
                   <a:tcPr marL="45720" marR="54864" marT="22860" marB="22860" anchor="ctr">
-                    <a:lnL w="0"/>
-                    <a:lnR w="0"/>
-                    <a:lnT w="0"/>
-                    <a:lnB w="9525" cap="flat" cmpd="sng" algn="ctr">
-                      <a:solidFill>
-                        <a:srgbClr val="E0E0E0"/>
+                    <a:lnL w="25400" cap="flat" cmpd="sng" algn="ctr">
+                      <a:solidFill>
+                        <a:srgbClr val="FFFFFF"/>
+                      </a:solidFill>
+                      <a:prstDash val="solid"/>
+                    </a:lnL>
+                    <a:lnR w="25400" cap="flat" cmpd="sng" algn="ctr">
+                      <a:solidFill>
+                        <a:srgbClr val="FFFFFF"/>
+                      </a:solidFill>
+                      <a:prstDash val="solid"/>
+                    </a:lnR>
+                    <a:lnT w="25400" cap="flat" cmpd="sng" algn="ctr">
+                      <a:solidFill>
+                        <a:srgbClr val="FFFFFF"/>
+                      </a:solidFill>
+                      <a:prstDash val="solid"/>
+                    </a:lnT>
+                    <a:lnB w="25400" cap="flat" cmpd="sng" algn="ctr">
+                      <a:solidFill>
+                        <a:srgbClr val="FFFFFF"/>
                       </a:solidFill>
                       <a:prstDash val="solid"/>
                     </a:lnB>
                     <a:lnTlToBr w="0"/>
                     <a:lnBlToTr w="0"/>
+                    <a:solidFill>
+                      <a:srgbClr val="F0F0F0"/>
+                    </a:solidFill>
                   </a:tcPr>
                 </a:tc>
-                <a:tc hMerge="1">
-                  <a:txBody>
-                    <a:bodyPr/>
-                    <a:lstStyle/>
-                    <a:p>
-                      <a:endParaRPr lang="en-IN"/>
-                    </a:p>
-                  </a:txBody>
-                  <a:tcPr/>
-                </a:tc>
-                <a:tc hMerge="1">
-                  <a:txBody>
-                    <a:bodyPr/>
-                    <a:lstStyle/>
-                    <a:p>
-                      <a:endParaRPr lang="en-IN"/>
-                    </a:p>
-                  </a:txBody>
-                  <a:tcPr/>
-                </a:tc>
-              </a:tr>
-              <a:tr h="187452">
                 <a:tc>
                   <a:txBody>
                     <a:bodyPr/>
                     <a:lstStyle/>
                     <a:p>
-                      <a:pPr algn="l"/>
+                      <a:pPr algn="ctr"/>
                       <a:r>
-                        <a:rPr lang="en-IN" sz="1000" b="0">
+                        <a:rPr lang="en-IN" sz="1050" b="1">
                           <a:solidFill>
                             <a:srgbClr val="1A1A1A"/>
                           </a:solidFill>
                           <a:latin typeface="DM Sans"/>
                         </a:rPr>
-                        <a:t>P-119</a:t>
+                        <a:t>66%</a:t>
                       </a:r>
                     </a:p>
                   </a:txBody>
                   <a:tcPr marL="45720" marR="54864" marT="22860" marB="22860" anchor="ctr">
-                    <a:lnL w="0"/>
-                    <a:lnR w="0"/>
-                    <a:lnT w="0"/>
-                    <a:lnB w="9525" cap="flat" cmpd="sng" algn="ctr">
-                      <a:solidFill>
-                        <a:srgbClr val="E0E0E0"/>
+                    <a:lnL w="25400" cap="flat" cmpd="sng" algn="ctr">
+                      <a:solidFill>
+                        <a:srgbClr val="FFFFFF"/>
+                      </a:solidFill>
+                      <a:prstDash val="solid"/>
+                    </a:lnL>
+                    <a:lnR w="25400" cap="flat" cmpd="sng" algn="ctr">
+                      <a:solidFill>
+                        <a:srgbClr val="FFFFFF"/>
+                      </a:solidFill>
+                      <a:prstDash val="solid"/>
+                    </a:lnR>
+                    <a:lnT w="25400" cap="flat" cmpd="sng" algn="ctr">
+                      <a:solidFill>
+                        <a:srgbClr val="FFFFFF"/>
+                      </a:solidFill>
+                      <a:prstDash val="solid"/>
+                    </a:lnT>
+                    <a:lnB w="25400" cap="flat" cmpd="sng" algn="ctr">
+                      <a:solidFill>
+                        <a:srgbClr val="FFFFFF"/>
                       </a:solidFill>
                       <a:prstDash val="solid"/>
                     </a:lnB>
                     <a:lnTlToBr w="0"/>
                     <a:lnBlToTr w="0"/>
+                    <a:solidFill>
+                      <a:srgbClr val="F0F0F0"/>
+                    </a:solidFill>
                   </a:tcPr>
                 </a:tc>
-                <a:tc gridSpan="3">
-                  <a:txBody>
-                    <a:bodyPr/>
-                    <a:lstStyle/>
-                    <a:p>
-                      <a:pPr algn="r"/>
-                      <a:r>
-                        <a:rPr lang="en-IN" sz="1000" b="0">
-                          <a:solidFill>
-                            <a:srgbClr val="1A1A1A"/>
-                          </a:solidFill>
-                          <a:latin typeface="DM Sans"/>
-                        </a:rPr>
-                        <a:t>B1, GF, 1st to 3rd</a:t>
-                      </a:r>
-                    </a:p>
-                  </a:txBody>
-                  <a:tcPr marL="45720" marR="54864" marT="22860" marB="22860" anchor="ctr">
-                    <a:lnL w="0"/>
-                    <a:lnR w="0"/>
-                    <a:lnT w="0"/>
-                    <a:lnB w="9525" cap="flat" cmpd="sng" algn="ctr">
-                      <a:solidFill>
-                        <a:srgbClr val="E0E0E0"/>
-                      </a:solidFill>
-                      <a:prstDash val="solid"/>
-                    </a:lnB>
-                    <a:lnTlToBr w="0"/>
-                    <a:lnBlToTr w="0"/>
-                  </a:tcPr>
-                </a:tc>
-                <a:tc hMerge="1">
-                  <a:txBody>
-                    <a:bodyPr/>
-                    <a:lstStyle/>
-                    <a:p>
-                      <a:endParaRPr lang="en-IN"/>
-                    </a:p>
-                  </a:txBody>
-                  <a:tcPr/>
-                </a:tc>
-                <a:tc hMerge="1">
+                <a:tc vMerge="1">
                   <a:txBody>
                     <a:bodyPr/>
                     <a:lstStyle/>
@@ -5407,30 +7322,12 @@
           </a:prstGeom>
         </p:spPr>
       </p:pic>
-      <p:graphicFrame>
-        <p:nvGraphicFramePr>
-          <p:cNvPr id="24" name="Chart Responses by building"/>
-          <p:cNvGraphicFramePr>
-            <a:graphicFrameLocks noGrp="1"/>
-          </p:cNvGraphicFramePr>
-          <p:nvPr/>
-        </p:nvGraphicFramePr>
-        <p:xfrm>
-          <a:off x="530352" y="1900000"/>
-          <a:ext cx="4480560" cy="2830000"/>
-        </p:xfrm>
-        <a:graphic>
-          <a:graphicData uri="http://schemas.openxmlformats.org/drawingml/2006/chart">
-            <c:chart xmlns:c="http://schemas.openxmlformats.org/drawingml/2006/chart" r:id="rId4"/>
-          </a:graphicData>
-        </a:graphic>
-      </p:graphicFrame>
-      <p:sp>
-        <p:nvSpPr>
-          <p:cNvPr id="13" name="Footnote">
+      <p:sp>
+        <p:nvSpPr>
+          <p:cNvPr id="20" name="Legend Under 50%">
             <a:extLst>
               <a:ext uri="{FF2B5EF4-FFF2-40B4-BE49-F238E27FC236}">
-                <a16:creationId xmlns:a16="http://schemas.microsoft.com/office/drawing/2014/main" id="{7A8A9C49-0FF0-485B-971E-48FF5D2045CD}"/>
+                <a16:creationId xmlns:a16="http://schemas.microsoft.com/office/drawing/2014/main" id="{00E28BCF-A616-487D-A74F-A1750555F9E9}"/>
               </a:ext>
             </a:extLst>
           </p:cNvPr>
@@ -5439,8 +7336,8 @@
         </p:nvSpPr>
         <p:spPr>
           <a:xfrm>
-            <a:off x="533400" y="4800600"/>
-            <a:ext cx="8077200" cy="150000"/>
+            <a:off x="7988808" y="896112"/>
+            <a:ext cx="621792" cy="152704"/>
           </a:xfrm>
           <a:prstGeom prst="rect">
             <a:avLst/>
@@ -5454,59 +7351,60 @@
           <a:lstStyle/>
           <a:p>
             <a:r>
-              <a:rPr lang="en-IN" sz="800">
+              <a:rPr lang="en-GB" sz="800">
                 <a:solidFill>
                   <a:srgbClr val="666666"/>
                 </a:solidFill>
                 <a:latin typeface="DM Sans"/>
               </a:rPr>
-              <a:t>Survey on 22 Oct 2026. 5 more responses came from P-135 (4) and P-113 (1) and are not shown. Seats from the floor-wise seat count file.</a:t>
+              <a:t>Under 50%</a:t>
             </a:r>
-          </a:p>
-        </p:txBody>
-      </p:sp>
-    </p:spTree>
-    <p:extLst>
-      <p:ext uri="{BB962C8B-B14F-4D97-AF65-F5344CB8AC3E}">
-        <p14:creationId xmlns:p14="http://schemas.microsoft.com/office/powerpoint/2010/main" val="3388007066"/>
-      </p:ext>
-    </p:extLst>
-  </p:cSld>
-  <p:clrMapOvr>
-    <a:masterClrMapping/>
-  </p:clrMapOvr>
-</p:sld>
-</file>
-
-<file path=ppt/slides/slide2.xml><?xml version="1.0" encoding="utf-8"?>
-<p:sld xmlns:a="http://schemas.openxmlformats.org/drawingml/2006/main" xmlns:r="http://schemas.openxmlformats.org/officeDocument/2006/relationships" xmlns:p="http://schemas.openxmlformats.org/presentationml/2006/main">
-  <p:cSld>
-    <p:spTree>
-      <p:nvGrpSpPr>
-        <p:cNvPr id="1" name="">
-          <a:extLst>
-            <a:ext uri="{FF2B5EF4-FFF2-40B4-BE49-F238E27FC236}">
-              <a16:creationId xmlns:a16="http://schemas.microsoft.com/office/drawing/2014/main" id="{12F601AA-8799-E1FC-7C8C-0891EEFB6D20}"/>
-            </a:ext>
-          </a:extLst>
-        </p:cNvPr>
-        <p:cNvGrpSpPr/>
-        <p:nvPr/>
-      </p:nvGrpSpPr>
-      <p:grpSpPr>
-        <a:xfrm>
-          <a:off x="0" y="0"/>
-          <a:ext cx="0" cy="0"/>
-          <a:chOff x="0" y="0"/>
-          <a:chExt cx="0" cy="0"/>
-        </a:xfrm>
-      </p:grpSpPr>
-      <p:sp>
-        <p:nvSpPr>
-          <p:cNvPr id="2" name="TextBox 1">
+            <a:endParaRPr lang="en-IN" sz="900">
+              <a:solidFill>
+                <a:srgbClr val="000000"/>
+              </a:solidFill>
+              <a:latin typeface="DM Sans ExtraBold"/>
+            </a:endParaRPr>
+          </a:p>
+        </p:txBody>
+      </p:sp>
+      <p:sp>
+        <p:nvSpPr>
+          <p:cNvPr id="22" name="Legend swatch Under 50%"/>
+          <p:cNvSpPr/>
+          <p:nvPr/>
+        </p:nvSpPr>
+        <p:spPr>
+          <a:xfrm>
+            <a:off x="7833360" y="909828"/>
+            <a:ext cx="109728" cy="109728"/>
+          </a:xfrm>
+          <a:prstGeom prst="rect">
+            <a:avLst/>
+          </a:prstGeom>
+          <a:solidFill>
+            <a:srgbClr val="FCE3DA"/>
+          </a:solidFill>
+          <a:ln w="6350">
+            <a:solidFill>
+              <a:srgbClr val="BFBFBF"/>
+            </a:solidFill>
+          </a:ln>
+        </p:spPr>
+        <p:txBody>
+          <a:bodyPr rtlCol="0" anchor="ctr"/>
+          <a:lstStyle/>
+          <a:p>
+            <a:pPr algn="ctr"/>
+          </a:p>
+        </p:txBody>
+      </p:sp>
+      <p:sp>
+        <p:nvSpPr>
+          <p:cNvPr id="20" name="Legend 50 to 74%">
             <a:extLst>
               <a:ext uri="{FF2B5EF4-FFF2-40B4-BE49-F238E27FC236}">
-                <a16:creationId xmlns:a16="http://schemas.microsoft.com/office/drawing/2014/main" id="{33BCFFC0-586F-871E-09C6-3368EAD85CC6}"/>
+                <a16:creationId xmlns:a16="http://schemas.microsoft.com/office/drawing/2014/main" id="{00E28BCF-A616-487D-A74F-A1750555F9E9}"/>
               </a:ext>
             </a:extLst>
           </p:cNvPr>
@@ -5515,8 +7413,8 @@
         </p:nvSpPr>
         <p:spPr>
           <a:xfrm>
-            <a:off x="533400" y="165100"/>
-            <a:ext cx="5588000" cy="165100"/>
+            <a:off x="7165848" y="896112"/>
+            <a:ext cx="667512" cy="152704"/>
           </a:xfrm>
           <a:prstGeom prst="rect">
             <a:avLst/>
@@ -5530,23 +7428,60 @@
           <a:lstStyle/>
           <a:p>
             <a:r>
-              <a:rPr lang="en-IN" sz="900">
+              <a:rPr lang="en-GB" sz="800">
                 <a:solidFill>
-                  <a:srgbClr val="EA4722"/>
+                  <a:srgbClr val="666666"/>
                 </a:solidFill>
-                <a:latin typeface="DM Sans ExtraBold"/>
+                <a:latin typeface="DM Sans"/>
               </a:rPr>
-              <a:t>PB HEALTH  ·  EMPLOYEE AWARENESS SURVEY</a:t>
+              <a:t>50 to 74%</a:t>
             </a:r>
-          </a:p>
-        </p:txBody>
-      </p:sp>
-      <p:sp>
-        <p:nvSpPr>
-          <p:cNvPr id="3" name="TextBox 2">
+            <a:endParaRPr lang="en-IN" sz="900">
+              <a:solidFill>
+                <a:srgbClr val="000000"/>
+              </a:solidFill>
+              <a:latin typeface="DM Sans ExtraBold"/>
+            </a:endParaRPr>
+          </a:p>
+        </p:txBody>
+      </p:sp>
+      <p:sp>
+        <p:nvSpPr>
+          <p:cNvPr id="23" name="Legend swatch 50 to 74%"/>
+          <p:cNvSpPr/>
+          <p:nvPr/>
+        </p:nvSpPr>
+        <p:spPr>
+          <a:xfrm>
+            <a:off x="7010400" y="909828"/>
+            <a:ext cx="109728" cy="109728"/>
+          </a:xfrm>
+          <a:prstGeom prst="rect">
+            <a:avLst/>
+          </a:prstGeom>
+          <a:solidFill>
+            <a:srgbClr val="F0F0F0"/>
+          </a:solidFill>
+          <a:ln w="6350">
+            <a:solidFill>
+              <a:srgbClr val="BFBFBF"/>
+            </a:solidFill>
+          </a:ln>
+        </p:spPr>
+        <p:txBody>
+          <a:bodyPr rtlCol="0" anchor="ctr"/>
+          <a:lstStyle/>
+          <a:p>
+            <a:pPr algn="ctr"/>
+          </a:p>
+        </p:txBody>
+      </p:sp>
+      <p:sp>
+        <p:nvSpPr>
+          <p:cNvPr id="20" name="Legend 75% or more">
             <a:extLst>
               <a:ext uri="{FF2B5EF4-FFF2-40B4-BE49-F238E27FC236}">
-                <a16:creationId xmlns:a16="http://schemas.microsoft.com/office/drawing/2014/main" id="{74E00F0D-A742-5411-1DF2-52DE292A0FEF}"/>
+                <a16:creationId xmlns:a16="http://schemas.microsoft.com/office/drawing/2014/main" id="{00E28BCF-A616-487D-A74F-A1750555F9E9}"/>
               </a:ext>
             </a:extLst>
           </p:cNvPr>
@@ -5555,8 +7490,8 @@
         </p:nvSpPr>
         <p:spPr>
           <a:xfrm>
-            <a:off x="533400" y="330200"/>
-            <a:ext cx="7874000" cy="330200"/>
+            <a:off x="6251448" y="896112"/>
+            <a:ext cx="758952" cy="152704"/>
           </a:xfrm>
           <a:prstGeom prst="rect">
             <a:avLst/>
@@ -5564,72 +7499,63 @@
           <a:noFill/>
         </p:spPr>
         <p:txBody>
-          <a:bodyPr vertOverflow="overflow" vert="horz" wrap="square" lIns="0" tIns="0" rIns="0" bIns="0" rtlCol="0" anchor="b" anchorCtr="0">
+          <a:bodyPr vertOverflow="overflow" vert="horz" wrap="square" lIns="0" tIns="0" rIns="0" bIns="0" rtlCol="0" anchor="t" anchorCtr="0">
             <a:noAutofit/>
           </a:bodyPr>
           <a:lstStyle/>
           <a:p>
             <a:r>
-              <a:rPr lang="en-GB" sz="1900">
+              <a:rPr lang="en-GB" sz="800">
                 <a:solidFill>
-                  <a:srgbClr val="000000"/>
+                  <a:srgbClr val="666666"/>
                 </a:solidFill>
-                <a:latin typeface="Nunito ExtraBold"/>
+                <a:latin typeface="DM Sans"/>
               </a:rPr>
-              <a:t>Responses by building</a:t>
+              <a:t>75% or more</a:t>
             </a:r>
-            <a:endParaRPr lang="en-IN" sz="1900">
+            <a:endParaRPr lang="en-IN" sz="900">
               <a:solidFill>
                 <a:srgbClr val="000000"/>
               </a:solidFill>
-              <a:latin typeface="Nunito ExtraBold"/>
+              <a:latin typeface="DM Sans ExtraBold"/>
             </a:endParaRPr>
           </a:p>
         </p:txBody>
       </p:sp>
       <p:sp>
         <p:nvSpPr>
-          <p:cNvPr id="9" name="TextBox 8">
-            <a:extLst>
-              <a:ext uri="{FF2B5EF4-FFF2-40B4-BE49-F238E27FC236}">
-                <a16:creationId xmlns:a16="http://schemas.microsoft.com/office/drawing/2014/main" id="{BE056F41-F4FF-4EE3-8A61-95CF19C493C9}"/>
-              </a:ext>
-            </a:extLst>
-          </p:cNvPr>
-          <p:cNvSpPr txBox="1"/>
+          <p:cNvPr id="24" name="Legend swatch 75% or more"/>
+          <p:cNvSpPr/>
           <p:nvPr/>
         </p:nvSpPr>
         <p:spPr>
           <a:xfrm>
-            <a:off x="533400" y="863600"/>
-            <a:ext cx="1905000" cy="431800"/>
+            <a:off x="6096000" y="909828"/>
+            <a:ext cx="109728" cy="109728"/>
           </a:xfrm>
           <a:prstGeom prst="rect">
             <a:avLst/>
           </a:prstGeom>
-          <a:noFill/>
+          <a:solidFill>
+            <a:srgbClr val="D6E4F0"/>
+          </a:solidFill>
+          <a:ln w="6350">
+            <a:solidFill>
+              <a:srgbClr val="BFBFBF"/>
+            </a:solidFill>
+          </a:ln>
         </p:spPr>
         <p:txBody>
-          <a:bodyPr vertOverflow="overflow" vert="horz" wrap="square" lIns="0" tIns="0" rIns="0" bIns="0" rtlCol="0" anchor="b" anchorCtr="0">
-            <a:noAutofit/>
-          </a:bodyPr>
+          <a:bodyPr rtlCol="0" anchor="ctr"/>
           <a:lstStyle/>
           <a:p>
-            <a:r>
-              <a:rPr lang="en-IN" sz="2800">
-                <a:solidFill>
-                  <a:srgbClr val="EA4722"/>
-                </a:solidFill>
-                <a:latin typeface="Nunito ExtraBold"/>
-              </a:rPr>
-              <a:t>91–100%</a:t>
-            </a:r>
-          </a:p>
-        </p:txBody>
-      </p:sp>
-      <p:sp>
-        <p:nvSpPr>
-          <p:cNvPr id="10" name="TextBox 9">
+            <a:pPr algn="ctr"/>
+          </a:p>
+        </p:txBody>
+      </p:sp>
+      <p:sp>
+        <p:nvSpPr>
+          <p:cNvPr id="10" name="Footnote">
             <a:extLst>
               <a:ext uri="{FF2B5EF4-FFF2-40B4-BE49-F238E27FC236}">
                 <a16:creationId xmlns:a16="http://schemas.microsoft.com/office/drawing/2014/main" id="{DFA84389-5132-406E-8999-14D4F1F2C4EB}"/>
@@ -5641,3998 +7567,7 @@
         </p:nvSpPr>
         <p:spPr>
           <a:xfrm>
-            <a:off x="533400" y="1320800"/>
-            <a:ext cx="2011680" cy="203200"/>
-          </a:xfrm>
-          <a:prstGeom prst="rect">
-            <a:avLst/>
-          </a:prstGeom>
-          <a:noFill/>
-        </p:spPr>
-        <p:txBody>
-          <a:bodyPr vertOverflow="overflow" vert="horz" wrap="square" lIns="0" tIns="0" rIns="0" bIns="0" rtlCol="0" anchor="t" anchorCtr="0">
-            <a:noAutofit/>
-          </a:bodyPr>
-          <a:lstStyle/>
-          <a:p>
-            <a:r>
-              <a:rPr lang="en-IN" sz="1100">
-                <a:solidFill>
-                  <a:srgbClr val="666666"/>
-                </a:solidFill>
-                <a:latin typeface="DM Sans"/>
-              </a:rPr>
-              <a:t>knew about the hospital</a:t>
-            </a:r>
-          </a:p>
-        </p:txBody>
-      </p:sp>
-      <p:sp>
-        <p:nvSpPr>
-          <p:cNvPr id="11" name="TextBox 10">
-            <a:extLst>
-              <a:ext uri="{FF2B5EF4-FFF2-40B4-BE49-F238E27FC236}">
-                <a16:creationId xmlns:a16="http://schemas.microsoft.com/office/drawing/2014/main" id="{ACDB843F-302B-4B3E-851F-F40C2E776B71}"/>
-              </a:ext>
-            </a:extLst>
-          </p:cNvPr>
-          <p:cNvSpPr txBox="1"/>
-          <p:nvPr/>
-        </p:nvSpPr>
-        <p:spPr>
-          <a:xfrm>
-            <a:off x="2590800" y="863600"/>
-            <a:ext cx="1905000" cy="431800"/>
-          </a:xfrm>
-          <a:prstGeom prst="rect">
-            <a:avLst/>
-          </a:prstGeom>
-          <a:noFill/>
-        </p:spPr>
-        <p:txBody>
-          <a:bodyPr vertOverflow="overflow" vert="horz" wrap="square" lIns="0" tIns="0" rIns="0" bIns="0" rtlCol="0" anchor="b" anchorCtr="0">
-            <a:noAutofit/>
-          </a:bodyPr>
-          <a:lstStyle/>
-          <a:p>
-            <a:r>
-              <a:rPr lang="en-IN" sz="2800">
-                <a:solidFill>
-                  <a:srgbClr val="EA4722"/>
-                </a:solidFill>
-                <a:latin typeface="Nunito ExtraBold"/>
-              </a:rPr>
-              <a:t>27–92%</a:t>
-            </a:r>
-          </a:p>
-        </p:txBody>
-      </p:sp>
-      <p:sp>
-        <p:nvSpPr>
-          <p:cNvPr id="13" name="TextBox 12">
-            <a:extLst>
-              <a:ext uri="{FF2B5EF4-FFF2-40B4-BE49-F238E27FC236}">
-                <a16:creationId xmlns:a16="http://schemas.microsoft.com/office/drawing/2014/main" id="{7A8A9C49-0FF0-485B-971E-48FF5D2045CD}"/>
-              </a:ext>
-            </a:extLst>
-          </p:cNvPr>
-          <p:cNvSpPr txBox="1"/>
-          <p:nvPr/>
-        </p:nvSpPr>
-        <p:spPr>
-          <a:xfrm>
-            <a:off x="2590800" y="1320800"/>
-            <a:ext cx="2011680" cy="203200"/>
-          </a:xfrm>
-          <a:prstGeom prst="rect">
-            <a:avLst/>
-          </a:prstGeom>
-          <a:noFill/>
-        </p:spPr>
-        <p:txBody>
-          <a:bodyPr vertOverflow="overflow" vert="horz" wrap="square" lIns="0" tIns="0" rIns="0" bIns="0" rtlCol="0" anchor="t" anchorCtr="0">
-            <a:noAutofit/>
-          </a:bodyPr>
-          <a:lstStyle/>
-          <a:p>
-            <a:r>
-              <a:rPr lang="en-IN" sz="1100">
-                <a:solidFill>
-                  <a:srgbClr val="666666"/>
-                </a:solidFill>
-                <a:latin typeface="DM Sans"/>
-              </a:rPr>
-              <a:t>know 75% off consultation</a:t>
-            </a:r>
-          </a:p>
-        </p:txBody>
-      </p:sp>
-      <p:sp>
-        <p:nvSpPr>
-          <p:cNvPr id="14" name="TextBox 13">
-            <a:extLst>
-              <a:ext uri="{FF2B5EF4-FFF2-40B4-BE49-F238E27FC236}">
-                <a16:creationId xmlns:a16="http://schemas.microsoft.com/office/drawing/2014/main" id="{8F744575-D490-4F48-94B1-D0F6B4617010}"/>
-              </a:ext>
-            </a:extLst>
-          </p:cNvPr>
-          <p:cNvSpPr txBox="1"/>
-          <p:nvPr/>
-        </p:nvSpPr>
-        <p:spPr>
-          <a:xfrm>
-            <a:off x="4648200" y="863600"/>
-            <a:ext cx="1905000" cy="431800"/>
-          </a:xfrm>
-          <a:prstGeom prst="rect">
-            <a:avLst/>
-          </a:prstGeom>
-          <a:noFill/>
-        </p:spPr>
-        <p:txBody>
-          <a:bodyPr vertOverflow="overflow" vert="horz" wrap="square" lIns="0" tIns="0" rIns="0" bIns="0" rtlCol="0" anchor="b" anchorCtr="0">
-            <a:noAutofit/>
-          </a:bodyPr>
-          <a:lstStyle/>
-          <a:p>
-            <a:r>
-              <a:rPr lang="en-IN" sz="2800">
-                <a:solidFill>
-                  <a:srgbClr val="EA4722"/>
-                </a:solidFill>
-                <a:latin typeface="Nunito ExtraBold"/>
-              </a:rPr>
-              <a:t>27–78%</a:t>
-            </a:r>
-          </a:p>
-        </p:txBody>
-      </p:sp>
-      <p:sp>
-        <p:nvSpPr>
-          <p:cNvPr id="15" name="TextBox 14">
-            <a:extLst>
-              <a:ext uri="{FF2B5EF4-FFF2-40B4-BE49-F238E27FC236}">
-                <a16:creationId xmlns:a16="http://schemas.microsoft.com/office/drawing/2014/main" id="{DF9C92D8-4F68-405A-BBD7-956A4934A822}"/>
-              </a:ext>
-            </a:extLst>
-          </p:cNvPr>
-          <p:cNvSpPr txBox="1"/>
-          <p:nvPr/>
-        </p:nvSpPr>
-        <p:spPr>
-          <a:xfrm>
-            <a:off x="4648200" y="1320800"/>
-            <a:ext cx="2011680" cy="203200"/>
-          </a:xfrm>
-          <a:prstGeom prst="rect">
-            <a:avLst/>
-          </a:prstGeom>
-          <a:noFill/>
-        </p:spPr>
-        <p:txBody>
-          <a:bodyPr vertOverflow="overflow" vert="horz" wrap="square" lIns="0" tIns="0" rIns="0" bIns="0" rtlCol="0" anchor="t" anchorCtr="0">
-            <a:noAutofit/>
-          </a:bodyPr>
-          <a:lstStyle/>
-          <a:p>
-            <a:r>
-              <a:rPr lang="en-GB" sz="1100">
-                <a:solidFill>
-                  <a:srgbClr val="666666"/>
-                </a:solidFill>
-                <a:latin typeface="DM Sans"/>
-              </a:rPr>
-              <a:t>know 30% off X-ray, CT, MRI</a:t>
-            </a:r>
-            <a:endParaRPr lang="en-IN" sz="1100">
-              <a:solidFill>
-                <a:srgbClr val="666666"/>
-              </a:solidFill>
-              <a:latin typeface="DM Sans"/>
-            </a:endParaRPr>
-          </a:p>
-        </p:txBody>
-      </p:sp>
-      <p:sp>
-        <p:nvSpPr>
-          <p:cNvPr id="16" name="TextBox 15">
-            <a:extLst>
-              <a:ext uri="{FF2B5EF4-FFF2-40B4-BE49-F238E27FC236}">
-                <a16:creationId xmlns:a16="http://schemas.microsoft.com/office/drawing/2014/main" id="{4BD01BBB-493C-4695-8F15-0098C2FF6A50}"/>
-              </a:ext>
-            </a:extLst>
-          </p:cNvPr>
-          <p:cNvSpPr txBox="1"/>
-          <p:nvPr/>
-        </p:nvSpPr>
-        <p:spPr>
-          <a:xfrm>
-            <a:off x="6705600" y="863600"/>
-            <a:ext cx="1905000" cy="431800"/>
-          </a:xfrm>
-          <a:prstGeom prst="rect">
-            <a:avLst/>
-          </a:prstGeom>
-          <a:noFill/>
-        </p:spPr>
-        <p:txBody>
-          <a:bodyPr vertOverflow="overflow" vert="horz" wrap="square" lIns="0" tIns="0" rIns="0" bIns="0" rtlCol="0" anchor="b" anchorCtr="0">
-            <a:noAutofit/>
-          </a:bodyPr>
-          <a:lstStyle/>
-          <a:p>
-            <a:r>
-              <a:rPr lang="en-IN" sz="2800">
-                <a:solidFill>
-                  <a:srgbClr val="EA4722"/>
-                </a:solidFill>
-                <a:latin typeface="Nunito ExtraBold"/>
-              </a:rPr>
-              <a:t>0–62%</a:t>
-            </a:r>
-          </a:p>
-        </p:txBody>
-      </p:sp>
-      <p:sp>
-        <p:nvSpPr>
-          <p:cNvPr id="17" name="TextBox 16">
-            <a:extLst>
-              <a:ext uri="{FF2B5EF4-FFF2-40B4-BE49-F238E27FC236}">
-                <a16:creationId xmlns:a16="http://schemas.microsoft.com/office/drawing/2014/main" id="{57594894-A9EE-466D-9DA8-5594E62C7334}"/>
-              </a:ext>
-            </a:extLst>
-          </p:cNvPr>
-          <p:cNvSpPr txBox="1"/>
-          <p:nvPr/>
-        </p:nvSpPr>
-        <p:spPr>
-          <a:xfrm>
-            <a:off x="6705600" y="1320800"/>
-            <a:ext cx="2011680" cy="203200"/>
-          </a:xfrm>
-          <a:prstGeom prst="rect">
-            <a:avLst/>
-          </a:prstGeom>
-          <a:noFill/>
-        </p:spPr>
-        <p:txBody>
-          <a:bodyPr vertOverflow="overflow" vert="horz" wrap="square" lIns="0" tIns="0" rIns="0" bIns="0" rtlCol="0" anchor="t" anchorCtr="0">
-            <a:noAutofit/>
-          </a:bodyPr>
-          <a:lstStyle/>
-          <a:p>
-            <a:r>
-              <a:rPr lang="en-IN" sz="1100">
-                <a:solidFill>
-                  <a:srgbClr val="666666"/>
-                </a:solidFill>
-                <a:latin typeface="DM Sans"/>
-              </a:rPr>
-              <a:t>have downloaded the app</a:t>
-            </a:r>
-          </a:p>
-        </p:txBody>
-      </p:sp>
-      <p:sp>
-        <p:nvSpPr>
-          <p:cNvPr id="18" name="Rectangle 17">
-            <a:extLst>
-              <a:ext uri="{FF2B5EF4-FFF2-40B4-BE49-F238E27FC236}">
-                <a16:creationId xmlns:a16="http://schemas.microsoft.com/office/drawing/2014/main" id="{1EE0392D-5F01-4E42-A237-6774F1A6B0FC}"/>
-              </a:ext>
-            </a:extLst>
-          </p:cNvPr>
-          <p:cNvSpPr/>
-          <p:nvPr/>
-        </p:nvSpPr>
-        <p:spPr>
-          <a:xfrm>
-            <a:off x="533400" y="1591056"/>
-            <a:ext cx="8077200" cy="9525"/>
-          </a:xfrm>
-          <a:prstGeom prst="rect">
-            <a:avLst/>
-          </a:prstGeom>
-          <a:solidFill>
-            <a:srgbClr val="E0E0E0"/>
-          </a:solidFill>
-          <a:ln w="9525" cap="flat" cmpd="sng" algn="ctr">
-            <a:noFill/>
-            <a:prstDash val="solid"/>
-          </a:ln>
-        </p:spPr>
-        <p:style>
-          <a:lnRef idx="1">
-            <a:schemeClr val="accent1"/>
-          </a:lnRef>
-          <a:fillRef idx="3">
-            <a:schemeClr val="accent1"/>
-          </a:fillRef>
-          <a:effectRef idx="2">
-            <a:schemeClr val="accent1"/>
-          </a:effectRef>
-          <a:fontRef idx="minor">
-            <a:schemeClr val="lt1"/>
-          </a:fontRef>
-        </p:style>
-        <p:txBody>
-          <a:bodyPr vertOverflow="clip" horzOverflow="clip" rtlCol="0" anchor="t"/>
-          <a:lstStyle/>
-          <a:p>
-            <a:pPr algn="l"/>
-            <a:endParaRPr lang="en-IN"/>
-          </a:p>
-        </p:txBody>
-      </p:sp>
-      <p:sp>
-        <p:nvSpPr>
-          <p:cNvPr id="20" name="Label WHAT THEY KNOW">
-            <a:extLst>
-              <a:ext uri="{FF2B5EF4-FFF2-40B4-BE49-F238E27FC236}">
-                <a16:creationId xmlns:a16="http://schemas.microsoft.com/office/drawing/2014/main" id="{00E28BCF-A616-487D-A74F-A1750555F9E9}"/>
-              </a:ext>
-            </a:extLst>
-          </p:cNvPr>
-          <p:cNvSpPr txBox="1"/>
-          <p:nvPr/>
-        </p:nvSpPr>
-        <p:spPr>
-          <a:xfrm>
-            <a:off x="530352" y="1700784"/>
-            <a:ext cx="3813048" cy="152400"/>
-          </a:xfrm>
-          <a:prstGeom prst="rect">
-            <a:avLst/>
-          </a:prstGeom>
-          <a:noFill/>
-        </p:spPr>
-        <p:txBody>
-          <a:bodyPr vertOverflow="overflow" vert="horz" wrap="square" lIns="0" tIns="0" rIns="0" bIns="0" rtlCol="0" anchor="t" anchorCtr="0">
-            <a:noAutofit/>
-          </a:bodyPr>
-          <a:lstStyle/>
-          <a:p>
-            <a:r>
-              <a:rPr lang="en-GB" sz="900">
-                <a:solidFill>
-                  <a:srgbClr val="000000"/>
-                </a:solidFill>
-                <a:latin typeface="DM Sans ExtraBold"/>
-              </a:rPr>
-              <a:t>WHAT THEY KNOW  ·  % OF RESPONDENTS</a:t>
-            </a:r>
-            <a:endParaRPr lang="en-IN" sz="900">
-              <a:solidFill>
-                <a:srgbClr val="000000"/>
-              </a:solidFill>
-              <a:latin typeface="DM Sans ExtraBold"/>
-            </a:endParaRPr>
-          </a:p>
-        </p:txBody>
-      </p:sp>
-      <p:graphicFrame>
-        <p:nvGraphicFramePr>
-          <p:cNvPr id="21" name="Table WHAT THEY KNOW">
-            <a:extLst>
-              <a:ext uri="{FF2B5EF4-FFF2-40B4-BE49-F238E27FC236}">
-                <a16:creationId xmlns:a16="http://schemas.microsoft.com/office/drawing/2014/main" id="{463CAD2E-FEF6-4422-A95C-5F17A77C5A02}"/>
-              </a:ext>
-            </a:extLst>
-          </p:cNvPr>
-          <p:cNvGraphicFramePr>
-            <a:graphicFrameLocks noGrp="1"/>
-          </p:cNvGraphicFramePr>
-          <p:nvPr/>
-        </p:nvGraphicFramePr>
-        <p:xfrm>
-          <a:off x="530352" y="1883664"/>
-          <a:ext cx="3813048" cy="1837944"/>
-        </p:xfrm>
-        <a:graphic>
-          <a:graphicData uri="http://schemas.openxmlformats.org/drawingml/2006/table">
-            <a:tbl>
-              <a:tblPr/>
-              <a:tblGrid>
-                <a:gridCol w="1600200"/>
-                <a:gridCol w="442569"/>
-                <a:gridCol w="442569"/>
-                <a:gridCol w="442569"/>
-                <a:gridCol w="442569"/>
-                <a:gridCol w="442572"/>
-              </a:tblGrid>
-              <a:tr h="365760">
-                <a:tc>
-                  <a:txBody>
-                    <a:bodyPr/>
-                    <a:lstStyle/>
-                    <a:p>
-                      <a:pPr algn="l"/>
-                      <a:endParaRPr lang="en-IN" sz="900"/>
-                    </a:p>
-                  </a:txBody>
-                  <a:tcPr marL="45720" marR="54864" marT="22860" marB="22860" anchor="ctr">
-                    <a:lnL w="0"/>
-                    <a:lnR w="0"/>
-                    <a:lnT w="0"/>
-                    <a:lnB w="12700" cap="flat" cmpd="sng" algn="ctr">
-                      <a:solidFill>
-                        <a:srgbClr val="1A1A1A"/>
-                      </a:solidFill>
-                      <a:prstDash val="solid"/>
-                    </a:lnB>
-                    <a:lnTlToBr w="0"/>
-                    <a:lnBlToTr w="0"/>
-                  </a:tcPr>
-                </a:tc>
-                <a:tc>
-                  <a:txBody>
-                    <a:bodyPr/>
-                    <a:lstStyle/>
-                    <a:p>
-                      <a:pPr algn="r"/>
-                      <a:r>
-                        <a:rPr lang="en-IN" sz="900" b="0">
-                          <a:solidFill>
-                            <a:srgbClr val="000000"/>
-                          </a:solidFill>
-                          <a:latin typeface="DM Sans ExtraBold"/>
-                        </a:rPr>
-                        <a:t>P-84</a:t>
-                      </a:r>
-                    </a:p>
-                    <a:p>
-                      <a:pPr algn="r"/>
-                      <a:r>
-                        <a:rPr lang="en-IN" sz="1000" b="1">
-                          <a:solidFill>
-                            <a:srgbClr val="EA4722"/>
-                          </a:solidFill>
-                          <a:latin typeface="DM Sans"/>
-                        </a:rPr>
-                        <a:t>23</a:t>
-                      </a:r>
-                    </a:p>
-                  </a:txBody>
-                  <a:tcPr marL="45720" marR="54864" marT="22860" marB="22860" anchor="b">
-                    <a:lnL w="0"/>
-                    <a:lnR w="0"/>
-                    <a:lnT w="0"/>
-                    <a:lnB w="12700" cap="flat" cmpd="sng" algn="ctr">
-                      <a:solidFill>
-                        <a:srgbClr val="1A1A1A"/>
-                      </a:solidFill>
-                      <a:prstDash val="solid"/>
-                    </a:lnB>
-                    <a:lnTlToBr w="0"/>
-                    <a:lnBlToTr w="0"/>
-                  </a:tcPr>
-                </a:tc>
-                <a:tc>
-                  <a:txBody>
-                    <a:bodyPr/>
-                    <a:lstStyle/>
-                    <a:p>
-                      <a:pPr algn="r"/>
-                      <a:r>
-                        <a:rPr lang="en-IN" sz="900" b="0">
-                          <a:solidFill>
-                            <a:srgbClr val="000000"/>
-                          </a:solidFill>
-                          <a:latin typeface="DM Sans ExtraBold"/>
-                        </a:rPr>
-                        <a:t>P-120</a:t>
-                      </a:r>
-                    </a:p>
-                    <a:p>
-                      <a:pPr algn="r"/>
-                      <a:r>
-                        <a:rPr lang="en-IN" sz="1000" b="1">
-                          <a:solidFill>
-                            <a:srgbClr val="EA4722"/>
-                          </a:solidFill>
-                          <a:latin typeface="DM Sans"/>
-                        </a:rPr>
-                        <a:t>13</a:t>
-                      </a:r>
-                    </a:p>
-                  </a:txBody>
-                  <a:tcPr marL="45720" marR="54864" marT="22860" marB="22860" anchor="b">
-                    <a:lnL w="0"/>
-                    <a:lnR w="0"/>
-                    <a:lnT w="0"/>
-                    <a:lnB w="12700" cap="flat" cmpd="sng" algn="ctr">
-                      <a:solidFill>
-                        <a:srgbClr val="1A1A1A"/>
-                      </a:solidFill>
-                      <a:prstDash val="solid"/>
-                    </a:lnB>
-                    <a:lnTlToBr w="0"/>
-                    <a:lnBlToTr w="0"/>
-                  </a:tcPr>
-                </a:tc>
-                <a:tc>
-                  <a:txBody>
-                    <a:bodyPr/>
-                    <a:lstStyle/>
-                    <a:p>
-                      <a:pPr algn="r"/>
-                      <a:r>
-                        <a:rPr lang="en-IN" sz="900" b="0">
-                          <a:solidFill>
-                            <a:srgbClr val="000000"/>
-                          </a:solidFill>
-                          <a:latin typeface="DM Sans ExtraBold"/>
-                        </a:rPr>
-                        <a:t>P-116</a:t>
-                      </a:r>
-                    </a:p>
-                    <a:p>
-                      <a:pPr algn="r"/>
-                      <a:r>
-                        <a:rPr lang="en-IN" sz="1000" b="1">
-                          <a:solidFill>
-                            <a:srgbClr val="EA4722"/>
-                          </a:solidFill>
-                          <a:latin typeface="DM Sans"/>
-                        </a:rPr>
-                        <a:t>11</a:t>
-                      </a:r>
-                    </a:p>
-                  </a:txBody>
-                  <a:tcPr marL="45720" marR="54864" marT="22860" marB="22860" anchor="b">
-                    <a:lnL w="0"/>
-                    <a:lnR w="0"/>
-                    <a:lnT w="0"/>
-                    <a:lnB w="12700" cap="flat" cmpd="sng" algn="ctr">
-                      <a:solidFill>
-                        <a:srgbClr val="1A1A1A"/>
-                      </a:solidFill>
-                      <a:prstDash val="solid"/>
-                    </a:lnB>
-                    <a:lnTlToBr w="0"/>
-                    <a:lnBlToTr w="0"/>
-                  </a:tcPr>
-                </a:tc>
-                <a:tc>
-                  <a:txBody>
-                    <a:bodyPr/>
-                    <a:lstStyle/>
-                    <a:p>
-                      <a:pPr algn="r"/>
-                      <a:r>
-                        <a:rPr lang="en-IN" sz="900" b="0">
-                          <a:solidFill>
-                            <a:srgbClr val="000000"/>
-                          </a:solidFill>
-                          <a:latin typeface="DM Sans ExtraBold"/>
-                        </a:rPr>
-                        <a:t>P-119</a:t>
-                      </a:r>
-                    </a:p>
-                    <a:p>
-                      <a:pPr algn="r"/>
-                      <a:r>
-                        <a:rPr lang="en-IN" sz="1000" b="1">
-                          <a:solidFill>
-                            <a:srgbClr val="EA4722"/>
-                          </a:solidFill>
-                          <a:latin typeface="DM Sans"/>
-                        </a:rPr>
-                        <a:t>10</a:t>
-                      </a:r>
-                    </a:p>
-                  </a:txBody>
-                  <a:tcPr marL="45720" marR="54864" marT="22860" marB="22860" anchor="b">
-                    <a:lnL w="0"/>
-                    <a:lnR w="0"/>
-                    <a:lnT w="0"/>
-                    <a:lnB w="12700" cap="flat" cmpd="sng" algn="ctr">
-                      <a:solidFill>
-                        <a:srgbClr val="1A1A1A"/>
-                      </a:solidFill>
-                      <a:prstDash val="solid"/>
-                    </a:lnB>
-                    <a:lnTlToBr w="0"/>
-                    <a:lnBlToTr w="0"/>
-                  </a:tcPr>
-                </a:tc>
-                <a:tc>
-                  <a:txBody>
-                    <a:bodyPr/>
-                    <a:lstStyle/>
-                    <a:p>
-                      <a:pPr algn="r"/>
-                      <a:r>
-                        <a:rPr lang="en-IN" sz="900" b="0">
-                          <a:solidFill>
-                            <a:srgbClr val="000000"/>
-                          </a:solidFill>
-                          <a:latin typeface="DM Sans ExtraBold"/>
-                        </a:rPr>
-                        <a:t>Total</a:t>
-                      </a:r>
-                    </a:p>
-                    <a:p>
-                      <a:pPr algn="r"/>
-                      <a:r>
-                        <a:rPr lang="en-IN" sz="1000" b="1">
-                          <a:solidFill>
-                            <a:srgbClr val="EA4722"/>
-                          </a:solidFill>
-                          <a:latin typeface="DM Sans"/>
-                        </a:rPr>
-                        <a:t>62</a:t>
-                      </a:r>
-                    </a:p>
-                  </a:txBody>
-                  <a:tcPr marL="45720" marR="54864" marT="22860" marB="22860" anchor="b">
-                    <a:lnL w="0"/>
-                    <a:lnR w="0"/>
-                    <a:lnT w="0"/>
-                    <a:lnB w="12700" cap="flat" cmpd="sng" algn="ctr">
-                      <a:solidFill>
-                        <a:srgbClr val="1A1A1A"/>
-                      </a:solidFill>
-                      <a:prstDash val="solid"/>
-                    </a:lnB>
-                    <a:lnTlToBr w="0"/>
-                    <a:lnBlToTr w="0"/>
-                  </a:tcPr>
-                </a:tc>
-              </a:tr>
-              <a:tr h="173736">
-                <a:tc gridSpan="6">
-                  <a:txBody>
-                    <a:bodyPr/>
-                    <a:lstStyle/>
-                    <a:p>
-                      <a:pPr algn="l"/>
-                      <a:r>
-                        <a:rPr lang="en-IN" sz="800" b="0">
-                          <a:solidFill>
-                            <a:srgbClr val="EA4722"/>
-                          </a:solidFill>
-                          <a:latin typeface="DM Sans ExtraBold"/>
-                        </a:rPr>
-                        <a:t>THE HOSPITAL</a:t>
-                      </a:r>
-                    </a:p>
-                  </a:txBody>
-                  <a:tcPr marL="45720" marR="54864" marT="45720" marB="0" anchor="ctr">
-                    <a:lnL w="0"/>
-                    <a:lnR w="0"/>
-                    <a:lnT w="0"/>
-                    <a:lnB w="0"/>
-                    <a:lnTlToBr w="0"/>
-                    <a:lnBlToTr w="0"/>
-                  </a:tcPr>
-                </a:tc>
-                <a:tc hMerge="1">
-                  <a:txBody>
-                    <a:bodyPr/>
-                    <a:lstStyle/>
-                    <a:p>
-                      <a:endParaRPr lang="en-IN"/>
-                    </a:p>
-                  </a:txBody>
-                  <a:tcPr/>
-                </a:tc>
-                <a:tc hMerge="1">
-                  <a:txBody>
-                    <a:bodyPr/>
-                    <a:lstStyle/>
-                    <a:p>
-                      <a:endParaRPr lang="en-IN"/>
-                    </a:p>
-                  </a:txBody>
-                  <a:tcPr/>
-                </a:tc>
-                <a:tc hMerge="1">
-                  <a:txBody>
-                    <a:bodyPr/>
-                    <a:lstStyle/>
-                    <a:p>
-                      <a:endParaRPr lang="en-IN"/>
-                    </a:p>
-                  </a:txBody>
-                  <a:tcPr/>
-                </a:tc>
-                <a:tc hMerge="1">
-                  <a:txBody>
-                    <a:bodyPr/>
-                    <a:lstStyle/>
-                    <a:p>
-                      <a:endParaRPr lang="en-IN"/>
-                    </a:p>
-                  </a:txBody>
-                  <a:tcPr/>
-                </a:tc>
-                <a:tc hMerge="1">
-                  <a:txBody>
-                    <a:bodyPr/>
-                    <a:lstStyle/>
-                    <a:p>
-                      <a:endParaRPr lang="en-IN"/>
-                    </a:p>
-                  </a:txBody>
-                  <a:tcPr/>
-                </a:tc>
-              </a:tr>
-              <a:tr h="187452">
-                <a:tc>
-                  <a:txBody>
-                    <a:bodyPr/>
-                    <a:lstStyle/>
-                    <a:p>
-                      <a:pPr algn="l"/>
-                      <a:r>
-                        <a:rPr lang="en-IN" sz="1000" b="0">
-                          <a:solidFill>
-                            <a:srgbClr val="1A1A1A"/>
-                          </a:solidFill>
-                          <a:latin typeface="DM Sans"/>
-                        </a:rPr>
-                        <a:t>Knew about the hospital</a:t>
-                      </a:r>
-                    </a:p>
-                  </a:txBody>
-                  <a:tcPr marL="45720" marR="54864" marT="22860" marB="22860" anchor="ctr">
-                    <a:lnL w="0"/>
-                    <a:lnR w="0"/>
-                    <a:lnT w="0"/>
-                    <a:lnB w="9525" cap="flat" cmpd="sng" algn="ctr">
-                      <a:solidFill>
-                        <a:srgbClr val="E0E0E0"/>
-                      </a:solidFill>
-                      <a:prstDash val="solid"/>
-                    </a:lnB>
-                    <a:lnTlToBr w="0"/>
-                    <a:lnBlToTr w="0"/>
-                  </a:tcPr>
-                </a:tc>
-                <a:tc>
-                  <a:txBody>
-                    <a:bodyPr/>
-                    <a:lstStyle/>
-                    <a:p>
-                      <a:pPr algn="r"/>
-                      <a:r>
-                        <a:rPr lang="en-IN" sz="1000" b="0">
-                          <a:solidFill>
-                            <a:srgbClr val="1A1A1A"/>
-                          </a:solidFill>
-                          <a:latin typeface="DM Sans"/>
-                        </a:rPr>
-                        <a:t>100%</a:t>
-                      </a:r>
-                    </a:p>
-                  </a:txBody>
-                  <a:tcPr marL="45720" marR="54864" marT="22860" marB="22860" anchor="ctr">
-                    <a:lnL w="0"/>
-                    <a:lnR w="0"/>
-                    <a:lnT w="0"/>
-                    <a:lnB w="9525" cap="flat" cmpd="sng" algn="ctr">
-                      <a:solidFill>
-                        <a:srgbClr val="E0E0E0"/>
-                      </a:solidFill>
-                      <a:prstDash val="solid"/>
-                    </a:lnB>
-                    <a:lnTlToBr w="0"/>
-                    <a:lnBlToTr w="0"/>
-                  </a:tcPr>
-                </a:tc>
-                <a:tc>
-                  <a:txBody>
-                    <a:bodyPr/>
-                    <a:lstStyle/>
-                    <a:p>
-                      <a:pPr algn="r"/>
-                      <a:r>
-                        <a:rPr lang="en-IN" sz="1000" b="0">
-                          <a:solidFill>
-                            <a:srgbClr val="1A1A1A"/>
-                          </a:solidFill>
-                          <a:latin typeface="DM Sans"/>
-                        </a:rPr>
-                        <a:t>100%</a:t>
-                      </a:r>
-                    </a:p>
-                  </a:txBody>
-                  <a:tcPr marL="45720" marR="54864" marT="22860" marB="22860" anchor="ctr">
-                    <a:lnL w="0"/>
-                    <a:lnR w="0"/>
-                    <a:lnT w="0"/>
-                    <a:lnB w="9525" cap="flat" cmpd="sng" algn="ctr">
-                      <a:solidFill>
-                        <a:srgbClr val="E0E0E0"/>
-                      </a:solidFill>
-                      <a:prstDash val="solid"/>
-                    </a:lnB>
-                    <a:lnTlToBr w="0"/>
-                    <a:lnBlToTr w="0"/>
-                  </a:tcPr>
-                </a:tc>
-                <a:tc>
-                  <a:txBody>
-                    <a:bodyPr/>
-                    <a:lstStyle/>
-                    <a:p>
-                      <a:pPr algn="r"/>
-                      <a:r>
-                        <a:rPr lang="en-IN" sz="1000" b="0">
-                          <a:solidFill>
-                            <a:srgbClr val="1A1A1A"/>
-                          </a:solidFill>
-                          <a:latin typeface="DM Sans"/>
-                        </a:rPr>
-                        <a:t>91%</a:t>
-                      </a:r>
-                    </a:p>
-                  </a:txBody>
-                  <a:tcPr marL="45720" marR="54864" marT="22860" marB="22860" anchor="ctr">
-                    <a:lnL w="0"/>
-                    <a:lnR w="0"/>
-                    <a:lnT w="0"/>
-                    <a:lnB w="9525" cap="flat" cmpd="sng" algn="ctr">
-                      <a:solidFill>
-                        <a:srgbClr val="E0E0E0"/>
-                      </a:solidFill>
-                      <a:prstDash val="solid"/>
-                    </a:lnB>
-                    <a:lnTlToBr w="0"/>
-                    <a:lnBlToTr w="0"/>
-                  </a:tcPr>
-                </a:tc>
-                <a:tc>
-                  <a:txBody>
-                    <a:bodyPr/>
-                    <a:lstStyle/>
-                    <a:p>
-                      <a:pPr algn="r"/>
-                      <a:r>
-                        <a:rPr lang="en-IN" sz="1000" b="0">
-                          <a:solidFill>
-                            <a:srgbClr val="1A1A1A"/>
-                          </a:solidFill>
-                          <a:latin typeface="DM Sans"/>
-                        </a:rPr>
-                        <a:t>100%</a:t>
-                      </a:r>
-                    </a:p>
-                  </a:txBody>
-                  <a:tcPr marL="45720" marR="54864" marT="22860" marB="22860" anchor="ctr">
-                    <a:lnL w="0"/>
-                    <a:lnR w="0"/>
-                    <a:lnT w="0"/>
-                    <a:lnB w="9525" cap="flat" cmpd="sng" algn="ctr">
-                      <a:solidFill>
-                        <a:srgbClr val="E0E0E0"/>
-                      </a:solidFill>
-                      <a:prstDash val="solid"/>
-                    </a:lnB>
-                    <a:lnTlToBr w="0"/>
-                    <a:lnBlToTr w="0"/>
-                  </a:tcPr>
-                </a:tc>
-                <a:tc>
-                  <a:txBody>
-                    <a:bodyPr/>
-                    <a:lstStyle/>
-                    <a:p>
-                      <a:pPr algn="r"/>
-                      <a:r>
-                        <a:rPr lang="en-IN" sz="1000" b="1">
-                          <a:solidFill>
-                            <a:srgbClr val="1A1A1A"/>
-                          </a:solidFill>
-                          <a:latin typeface="DM Sans"/>
-                        </a:rPr>
-                        <a:t>97%</a:t>
-                      </a:r>
-                    </a:p>
-                  </a:txBody>
-                  <a:tcPr marL="45720" marR="54864" marT="22860" marB="22860" anchor="ctr">
-                    <a:lnL w="0"/>
-                    <a:lnR w="0"/>
-                    <a:lnT w="0"/>
-                    <a:lnB w="9525" cap="flat" cmpd="sng" algn="ctr">
-                      <a:solidFill>
-                        <a:srgbClr val="E0E0E0"/>
-                      </a:solidFill>
-                      <a:prstDash val="solid"/>
-                    </a:lnB>
-                    <a:lnTlToBr w="0"/>
-                    <a:lnBlToTr w="0"/>
-                  </a:tcPr>
-                </a:tc>
-              </a:tr>
-              <a:tr h="187452">
-                <a:tc>
-                  <a:txBody>
-                    <a:bodyPr/>
-                    <a:lstStyle/>
-                    <a:p>
-                      <a:pPr algn="l"/>
-                      <a:r>
-                        <a:rPr lang="en-IN" sz="1000" b="0">
-                          <a:solidFill>
-                            <a:srgbClr val="1A1A1A"/>
-                          </a:solidFill>
-                          <a:latin typeface="DM Sans"/>
-                        </a:rPr>
-                        <a:t>Location is IFFCO Chowk</a:t>
-                      </a:r>
-                    </a:p>
-                  </a:txBody>
-                  <a:tcPr marL="45720" marR="54864" marT="22860" marB="22860" anchor="ctr">
-                    <a:lnL w="0"/>
-                    <a:lnR w="0"/>
-                    <a:lnT w="0"/>
-                    <a:lnB w="9525" cap="flat" cmpd="sng" algn="ctr">
-                      <a:solidFill>
-                        <a:srgbClr val="E0E0E0"/>
-                      </a:solidFill>
-                      <a:prstDash val="solid"/>
-                    </a:lnB>
-                    <a:lnTlToBr w="0"/>
-                    <a:lnBlToTr w="0"/>
-                  </a:tcPr>
-                </a:tc>
-                <a:tc>
-                  <a:txBody>
-                    <a:bodyPr/>
-                    <a:lstStyle/>
-                    <a:p>
-                      <a:pPr algn="r"/>
-                      <a:r>
-                        <a:rPr lang="en-IN" sz="1000" b="0">
-                          <a:solidFill>
-                            <a:srgbClr val="1A1A1A"/>
-                          </a:solidFill>
-                          <a:latin typeface="DM Sans"/>
-                        </a:rPr>
-                        <a:t>100%</a:t>
-                      </a:r>
-                    </a:p>
-                  </a:txBody>
-                  <a:tcPr marL="45720" marR="54864" marT="22860" marB="22860" anchor="ctr">
-                    <a:lnL w="0"/>
-                    <a:lnR w="0"/>
-                    <a:lnT w="0"/>
-                    <a:lnB w="9525" cap="flat" cmpd="sng" algn="ctr">
-                      <a:solidFill>
-                        <a:srgbClr val="E0E0E0"/>
-                      </a:solidFill>
-                      <a:prstDash val="solid"/>
-                    </a:lnB>
-                    <a:lnTlToBr w="0"/>
-                    <a:lnBlToTr w="0"/>
-                  </a:tcPr>
-                </a:tc>
-                <a:tc>
-                  <a:txBody>
-                    <a:bodyPr/>
-                    <a:lstStyle/>
-                    <a:p>
-                      <a:pPr algn="r"/>
-                      <a:r>
-                        <a:rPr lang="en-IN" sz="1000" b="0">
-                          <a:solidFill>
-                            <a:srgbClr val="1A1A1A"/>
-                          </a:solidFill>
-                          <a:latin typeface="DM Sans"/>
-                        </a:rPr>
-                        <a:t>100%</a:t>
-                      </a:r>
-                    </a:p>
-                  </a:txBody>
-                  <a:tcPr marL="45720" marR="54864" marT="22860" marB="22860" anchor="ctr">
-                    <a:lnL w="0"/>
-                    <a:lnR w="0"/>
-                    <a:lnT w="0"/>
-                    <a:lnB w="9525" cap="flat" cmpd="sng" algn="ctr">
-                      <a:solidFill>
-                        <a:srgbClr val="E0E0E0"/>
-                      </a:solidFill>
-                      <a:prstDash val="solid"/>
-                    </a:lnB>
-                    <a:lnTlToBr w="0"/>
-                    <a:lnBlToTr w="0"/>
-                  </a:tcPr>
-                </a:tc>
-                <a:tc>
-                  <a:txBody>
-                    <a:bodyPr/>
-                    <a:lstStyle/>
-                    <a:p>
-                      <a:pPr algn="r"/>
-                      <a:r>
-                        <a:rPr lang="en-IN" sz="1000" b="0">
-                          <a:solidFill>
-                            <a:srgbClr val="1A1A1A"/>
-                          </a:solidFill>
-                          <a:latin typeface="DM Sans"/>
-                        </a:rPr>
-                        <a:t>100%</a:t>
-                      </a:r>
-                    </a:p>
-                  </a:txBody>
-                  <a:tcPr marL="45720" marR="54864" marT="22860" marB="22860" anchor="ctr">
-                    <a:lnL w="0"/>
-                    <a:lnR w="0"/>
-                    <a:lnT w="0"/>
-                    <a:lnB w="9525" cap="flat" cmpd="sng" algn="ctr">
-                      <a:solidFill>
-                        <a:srgbClr val="E0E0E0"/>
-                      </a:solidFill>
-                      <a:prstDash val="solid"/>
-                    </a:lnB>
-                    <a:lnTlToBr w="0"/>
-                    <a:lnBlToTr w="0"/>
-                  </a:tcPr>
-                </a:tc>
-                <a:tc>
-                  <a:txBody>
-                    <a:bodyPr/>
-                    <a:lstStyle/>
-                    <a:p>
-                      <a:pPr algn="r"/>
-                      <a:r>
-                        <a:rPr lang="en-IN" sz="1000" b="0">
-                          <a:solidFill>
-                            <a:srgbClr val="1A1A1A"/>
-                          </a:solidFill>
-                          <a:latin typeface="DM Sans"/>
-                        </a:rPr>
-                        <a:t>100%</a:t>
-                      </a:r>
-                    </a:p>
-                  </a:txBody>
-                  <a:tcPr marL="45720" marR="54864" marT="22860" marB="22860" anchor="ctr">
-                    <a:lnL w="0"/>
-                    <a:lnR w="0"/>
-                    <a:lnT w="0"/>
-                    <a:lnB w="9525" cap="flat" cmpd="sng" algn="ctr">
-                      <a:solidFill>
-                        <a:srgbClr val="E0E0E0"/>
-                      </a:solidFill>
-                      <a:prstDash val="solid"/>
-                    </a:lnB>
-                    <a:lnTlToBr w="0"/>
-                    <a:lnBlToTr w="0"/>
-                  </a:tcPr>
-                </a:tc>
-                <a:tc>
-                  <a:txBody>
-                    <a:bodyPr/>
-                    <a:lstStyle/>
-                    <a:p>
-                      <a:pPr algn="r"/>
-                      <a:r>
-                        <a:rPr lang="en-IN" sz="1000" b="1">
-                          <a:solidFill>
-                            <a:srgbClr val="1A1A1A"/>
-                          </a:solidFill>
-                          <a:latin typeface="DM Sans"/>
-                        </a:rPr>
-                        <a:t>98%</a:t>
-                      </a:r>
-                    </a:p>
-                  </a:txBody>
-                  <a:tcPr marL="45720" marR="54864" marT="22860" marB="22860" anchor="ctr">
-                    <a:lnL w="0"/>
-                    <a:lnR w="0"/>
-                    <a:lnT w="0"/>
-                    <a:lnB w="9525" cap="flat" cmpd="sng" algn="ctr">
-                      <a:solidFill>
-                        <a:srgbClr val="E0E0E0"/>
-                      </a:solidFill>
-                      <a:prstDash val="solid"/>
-                    </a:lnB>
-                    <a:lnTlToBr w="0"/>
-                    <a:lnBlToTr w="0"/>
-                  </a:tcPr>
-                </a:tc>
-              </a:tr>
-              <a:tr h="187452">
-                <a:tc>
-                  <a:txBody>
-                    <a:bodyPr/>
-                    <a:lstStyle/>
-                    <a:p>
-                      <a:pPr algn="l"/>
-                      <a:r>
-                        <a:rPr lang="en-IN" sz="1000" b="0">
-                          <a:solidFill>
-                            <a:srgbClr val="1A1A1A"/>
-                          </a:solidFill>
-                          <a:latin typeface="DM Sans"/>
-                        </a:rPr>
-                        <a:t>Know all services</a:t>
-                      </a:r>
-                    </a:p>
-                  </a:txBody>
-                  <a:tcPr marL="45720" marR="54864" marT="22860" marB="22860" anchor="ctr">
-                    <a:lnL w="0"/>
-                    <a:lnR w="0"/>
-                    <a:lnT w="0"/>
-                    <a:lnB w="9525" cap="flat" cmpd="sng" algn="ctr">
-                      <a:solidFill>
-                        <a:srgbClr val="E0E0E0"/>
-                      </a:solidFill>
-                      <a:prstDash val="solid"/>
-                    </a:lnB>
-                    <a:lnTlToBr w="0"/>
-                    <a:lnBlToTr w="0"/>
-                  </a:tcPr>
-                </a:tc>
-                <a:tc>
-                  <a:txBody>
-                    <a:bodyPr/>
-                    <a:lstStyle/>
-                    <a:p>
-                      <a:pPr algn="r"/>
-                      <a:r>
-                        <a:rPr lang="en-IN" sz="1000" b="0">
-                          <a:solidFill>
-                            <a:srgbClr val="1A1A1A"/>
-                          </a:solidFill>
-                          <a:latin typeface="DM Sans"/>
-                        </a:rPr>
-                        <a:t>100%</a:t>
-                      </a:r>
-                    </a:p>
-                  </a:txBody>
-                  <a:tcPr marL="45720" marR="54864" marT="22860" marB="22860" anchor="ctr">
-                    <a:lnL w="0"/>
-                    <a:lnR w="0"/>
-                    <a:lnT w="0"/>
-                    <a:lnB w="9525" cap="flat" cmpd="sng" algn="ctr">
-                      <a:solidFill>
-                        <a:srgbClr val="E0E0E0"/>
-                      </a:solidFill>
-                      <a:prstDash val="solid"/>
-                    </a:lnB>
-                    <a:lnTlToBr w="0"/>
-                    <a:lnBlToTr w="0"/>
-                  </a:tcPr>
-                </a:tc>
-                <a:tc>
-                  <a:txBody>
-                    <a:bodyPr/>
-                    <a:lstStyle/>
-                    <a:p>
-                      <a:pPr algn="r"/>
-                      <a:r>
-                        <a:rPr lang="en-IN" sz="1000" b="0">
-                          <a:solidFill>
-                            <a:srgbClr val="1A1A1A"/>
-                          </a:solidFill>
-                          <a:latin typeface="DM Sans"/>
-                        </a:rPr>
-                        <a:t>100%</a:t>
-                      </a:r>
-                    </a:p>
-                  </a:txBody>
-                  <a:tcPr marL="45720" marR="54864" marT="22860" marB="22860" anchor="ctr">
-                    <a:lnL w="0"/>
-                    <a:lnR w="0"/>
-                    <a:lnT w="0"/>
-                    <a:lnB w="9525" cap="flat" cmpd="sng" algn="ctr">
-                      <a:solidFill>
-                        <a:srgbClr val="E0E0E0"/>
-                      </a:solidFill>
-                      <a:prstDash val="solid"/>
-                    </a:lnB>
-                    <a:lnTlToBr w="0"/>
-                    <a:lnBlToTr w="0"/>
-                  </a:tcPr>
-                </a:tc>
-                <a:tc>
-                  <a:txBody>
-                    <a:bodyPr/>
-                    <a:lstStyle/>
-                    <a:p>
-                      <a:pPr algn="r"/>
-                      <a:r>
-                        <a:rPr lang="en-IN" sz="1000" b="0">
-                          <a:solidFill>
-                            <a:srgbClr val="1A1A1A"/>
-                          </a:solidFill>
-                          <a:latin typeface="DM Sans"/>
-                        </a:rPr>
-                        <a:t>82%</a:t>
-                      </a:r>
-                    </a:p>
-                  </a:txBody>
-                  <a:tcPr marL="45720" marR="54864" marT="22860" marB="22860" anchor="ctr">
-                    <a:lnL w="0"/>
-                    <a:lnR w="0"/>
-                    <a:lnT w="0"/>
-                    <a:lnB w="9525" cap="flat" cmpd="sng" algn="ctr">
-                      <a:solidFill>
-                        <a:srgbClr val="E0E0E0"/>
-                      </a:solidFill>
-                      <a:prstDash val="solid"/>
-                    </a:lnB>
-                    <a:lnTlToBr w="0"/>
-                    <a:lnBlToTr w="0"/>
-                  </a:tcPr>
-                </a:tc>
-                <a:tc>
-                  <a:txBody>
-                    <a:bodyPr/>
-                    <a:lstStyle/>
-                    <a:p>
-                      <a:pPr algn="r"/>
-                      <a:r>
-                        <a:rPr lang="en-IN" sz="1000" b="0">
-                          <a:solidFill>
-                            <a:srgbClr val="1A1A1A"/>
-                          </a:solidFill>
-                          <a:latin typeface="DM Sans"/>
-                        </a:rPr>
-                        <a:t>90%</a:t>
-                      </a:r>
-                    </a:p>
-                  </a:txBody>
-                  <a:tcPr marL="45720" marR="54864" marT="22860" marB="22860" anchor="ctr">
-                    <a:lnL w="0"/>
-                    <a:lnR w="0"/>
-                    <a:lnT w="0"/>
-                    <a:lnB w="9525" cap="flat" cmpd="sng" algn="ctr">
-                      <a:solidFill>
-                        <a:srgbClr val="E0E0E0"/>
-                      </a:solidFill>
-                      <a:prstDash val="solid"/>
-                    </a:lnB>
-                    <a:lnTlToBr w="0"/>
-                    <a:lnBlToTr w="0"/>
-                  </a:tcPr>
-                </a:tc>
-                <a:tc>
-                  <a:txBody>
-                    <a:bodyPr/>
-                    <a:lstStyle/>
-                    <a:p>
-                      <a:pPr algn="r"/>
-                      <a:r>
-                        <a:rPr lang="en-IN" sz="1000" b="1">
-                          <a:solidFill>
-                            <a:srgbClr val="1A1A1A"/>
-                          </a:solidFill>
-                          <a:latin typeface="DM Sans"/>
-                        </a:rPr>
-                        <a:t>92%</a:t>
-                      </a:r>
-                    </a:p>
-                  </a:txBody>
-                  <a:tcPr marL="45720" marR="54864" marT="22860" marB="22860" anchor="ctr">
-                    <a:lnL w="0"/>
-                    <a:lnR w="0"/>
-                    <a:lnT w="0"/>
-                    <a:lnB w="9525" cap="flat" cmpd="sng" algn="ctr">
-                      <a:solidFill>
-                        <a:srgbClr val="E0E0E0"/>
-                      </a:solidFill>
-                      <a:prstDash val="solid"/>
-                    </a:lnB>
-                    <a:lnTlToBr w="0"/>
-                    <a:lnBlToTr w="0"/>
-                  </a:tcPr>
-                </a:tc>
-              </a:tr>
-              <a:tr h="173736">
-                <a:tc gridSpan="6">
-                  <a:txBody>
-                    <a:bodyPr/>
-                    <a:lstStyle/>
-                    <a:p>
-                      <a:pPr algn="l"/>
-                      <a:r>
-                        <a:rPr lang="en-IN" sz="800" b="0">
-                          <a:solidFill>
-                            <a:srgbClr val="EA4722"/>
-                          </a:solidFill>
-                          <a:latin typeface="DM Sans ExtraBold"/>
-                        </a:rPr>
-                        <a:t>THE BENEFITS</a:t>
-                      </a:r>
-                    </a:p>
-                  </a:txBody>
-                  <a:tcPr marL="45720" marR="54864" marT="45720" marB="0" anchor="ctr">
-                    <a:lnL w="0"/>
-                    <a:lnR w="0"/>
-                    <a:lnT w="9525" cap="flat" cmpd="sng" algn="ctr">
-                      <a:solidFill>
-                        <a:srgbClr val="808080"/>
-                      </a:solidFill>
-                      <a:prstDash val="solid"/>
-                    </a:lnT>
-                    <a:lnB w="0"/>
-                    <a:lnTlToBr w="0"/>
-                    <a:lnBlToTr w="0"/>
-                  </a:tcPr>
-                </a:tc>
-                <a:tc hMerge="1">
-                  <a:txBody>
-                    <a:bodyPr/>
-                    <a:lstStyle/>
-                    <a:p>
-                      <a:endParaRPr lang="en-IN"/>
-                    </a:p>
-                  </a:txBody>
-                  <a:tcPr/>
-                </a:tc>
-                <a:tc hMerge="1">
-                  <a:txBody>
-                    <a:bodyPr/>
-                    <a:lstStyle/>
-                    <a:p>
-                      <a:endParaRPr lang="en-IN"/>
-                    </a:p>
-                  </a:txBody>
-                  <a:tcPr/>
-                </a:tc>
-                <a:tc hMerge="1">
-                  <a:txBody>
-                    <a:bodyPr/>
-                    <a:lstStyle/>
-                    <a:p>
-                      <a:endParaRPr lang="en-IN"/>
-                    </a:p>
-                  </a:txBody>
-                  <a:tcPr/>
-                </a:tc>
-                <a:tc hMerge="1">
-                  <a:txBody>
-                    <a:bodyPr/>
-                    <a:lstStyle/>
-                    <a:p>
-                      <a:endParaRPr lang="en-IN"/>
-                    </a:p>
-                  </a:txBody>
-                  <a:tcPr/>
-                </a:tc>
-                <a:tc hMerge="1">
-                  <a:txBody>
-                    <a:bodyPr/>
-                    <a:lstStyle/>
-                    <a:p>
-                      <a:endParaRPr lang="en-IN"/>
-                    </a:p>
-                  </a:txBody>
-                  <a:tcPr/>
-                </a:tc>
-              </a:tr>
-              <a:tr h="187452">
-                <a:tc>
-                  <a:txBody>
-                    <a:bodyPr/>
-                    <a:lstStyle/>
-                    <a:p>
-                      <a:pPr algn="l"/>
-                      <a:r>
-                        <a:rPr lang="en-IN" sz="1000" b="0">
-                          <a:solidFill>
-                            <a:srgbClr val="1A1A1A"/>
-                          </a:solidFill>
-                          <a:latin typeface="DM Sans"/>
-                        </a:rPr>
-                        <a:t>75% off consultation</a:t>
-                      </a:r>
-                    </a:p>
-                  </a:txBody>
-                  <a:tcPr marL="45720" marR="54864" marT="22860" marB="22860" anchor="ctr">
-                    <a:lnL w="0"/>
-                    <a:lnR w="0"/>
-                    <a:lnT w="0"/>
-                    <a:lnB w="9525" cap="flat" cmpd="sng" algn="ctr">
-                      <a:solidFill>
-                        <a:srgbClr val="E0E0E0"/>
-                      </a:solidFill>
-                      <a:prstDash val="solid"/>
-                    </a:lnB>
-                    <a:lnTlToBr w="0"/>
-                    <a:lnBlToTr w="0"/>
-                  </a:tcPr>
-                </a:tc>
-                <a:tc>
-                  <a:txBody>
-                    <a:bodyPr/>
-                    <a:lstStyle/>
-                    <a:p>
-                      <a:pPr algn="r"/>
-                      <a:r>
-                        <a:rPr lang="en-IN" sz="1000" b="0">
-                          <a:solidFill>
-                            <a:srgbClr val="1A1A1A"/>
-                          </a:solidFill>
-                          <a:latin typeface="DM Sans"/>
-                        </a:rPr>
-                        <a:t>78%</a:t>
-                      </a:r>
-                    </a:p>
-                  </a:txBody>
-                  <a:tcPr marL="45720" marR="54864" marT="22860" marB="22860" anchor="ctr">
-                    <a:lnL w="0"/>
-                    <a:lnR w="0"/>
-                    <a:lnT w="0"/>
-                    <a:lnB w="9525" cap="flat" cmpd="sng" algn="ctr">
-                      <a:solidFill>
-                        <a:srgbClr val="E0E0E0"/>
-                      </a:solidFill>
-                      <a:prstDash val="solid"/>
-                    </a:lnB>
-                    <a:lnTlToBr w="0"/>
-                    <a:lnBlToTr w="0"/>
-                  </a:tcPr>
-                </a:tc>
-                <a:tc>
-                  <a:txBody>
-                    <a:bodyPr/>
-                    <a:lstStyle/>
-                    <a:p>
-                      <a:pPr algn="r"/>
-                      <a:r>
-                        <a:rPr lang="en-IN" sz="1000" b="0">
-                          <a:solidFill>
-                            <a:srgbClr val="1A1A1A"/>
-                          </a:solidFill>
-                          <a:latin typeface="DM Sans"/>
-                        </a:rPr>
-                        <a:t>92%</a:t>
-                      </a:r>
-                    </a:p>
-                  </a:txBody>
-                  <a:tcPr marL="45720" marR="54864" marT="22860" marB="22860" anchor="ctr">
-                    <a:lnL w="0"/>
-                    <a:lnR w="0"/>
-                    <a:lnT w="0"/>
-                    <a:lnB w="9525" cap="flat" cmpd="sng" algn="ctr">
-                      <a:solidFill>
-                        <a:srgbClr val="E0E0E0"/>
-                      </a:solidFill>
-                      <a:prstDash val="solid"/>
-                    </a:lnB>
-                    <a:lnTlToBr w="0"/>
-                    <a:lnBlToTr w="0"/>
-                  </a:tcPr>
-                </a:tc>
-                <a:tc>
-                  <a:txBody>
-                    <a:bodyPr/>
-                    <a:lstStyle/>
-                    <a:p>
-                      <a:pPr algn="r"/>
-                      <a:r>
-                        <a:rPr lang="en-IN" sz="1000" b="1">
-                          <a:solidFill>
-                            <a:srgbClr val="EA4722"/>
-                          </a:solidFill>
-                          <a:latin typeface="DM Sans"/>
-                        </a:rPr>
-                        <a:t>27%</a:t>
-                      </a:r>
-                    </a:p>
-                  </a:txBody>
-                  <a:tcPr marL="45720" marR="54864" marT="22860" marB="22860" anchor="ctr">
-                    <a:lnL w="0"/>
-                    <a:lnR w="0"/>
-                    <a:lnT w="0"/>
-                    <a:lnB w="9525" cap="flat" cmpd="sng" algn="ctr">
-                      <a:solidFill>
-                        <a:srgbClr val="E0E0E0"/>
-                      </a:solidFill>
-                      <a:prstDash val="solid"/>
-                    </a:lnB>
-                    <a:lnTlToBr w="0"/>
-                    <a:lnBlToTr w="0"/>
-                  </a:tcPr>
-                </a:tc>
-                <a:tc>
-                  <a:txBody>
-                    <a:bodyPr/>
-                    <a:lstStyle/>
-                    <a:p>
-                      <a:pPr algn="r"/>
-                      <a:r>
-                        <a:rPr lang="en-IN" sz="1000" b="0">
-                          <a:solidFill>
-                            <a:srgbClr val="1A1A1A"/>
-                          </a:solidFill>
-                          <a:latin typeface="DM Sans"/>
-                        </a:rPr>
-                        <a:t>60%</a:t>
-                      </a:r>
-                    </a:p>
-                  </a:txBody>
-                  <a:tcPr marL="45720" marR="54864" marT="22860" marB="22860" anchor="ctr">
-                    <a:lnL w="0"/>
-                    <a:lnR w="0"/>
-                    <a:lnT w="0"/>
-                    <a:lnB w="9525" cap="flat" cmpd="sng" algn="ctr">
-                      <a:solidFill>
-                        <a:srgbClr val="E0E0E0"/>
-                      </a:solidFill>
-                      <a:prstDash val="solid"/>
-                    </a:lnB>
-                    <a:lnTlToBr w="0"/>
-                    <a:lnBlToTr w="0"/>
-                  </a:tcPr>
-                </a:tc>
-                <a:tc>
-                  <a:txBody>
-                    <a:bodyPr/>
-                    <a:lstStyle/>
-                    <a:p>
-                      <a:pPr algn="r"/>
-                      <a:r>
-                        <a:rPr lang="en-IN" sz="1000" b="1">
-                          <a:solidFill>
-                            <a:srgbClr val="1A1A1A"/>
-                          </a:solidFill>
-                          <a:latin typeface="DM Sans"/>
-                        </a:rPr>
-                        <a:t>63%</a:t>
-                      </a:r>
-                    </a:p>
-                  </a:txBody>
-                  <a:tcPr marL="45720" marR="54864" marT="22860" marB="22860" anchor="ctr">
-                    <a:lnL w="0"/>
-                    <a:lnR w="0"/>
-                    <a:lnT w="0"/>
-                    <a:lnB w="9525" cap="flat" cmpd="sng" algn="ctr">
-                      <a:solidFill>
-                        <a:srgbClr val="E0E0E0"/>
-                      </a:solidFill>
-                      <a:prstDash val="solid"/>
-                    </a:lnB>
-                    <a:lnTlToBr w="0"/>
-                    <a:lnBlToTr w="0"/>
-                  </a:tcPr>
-                </a:tc>
-              </a:tr>
-              <a:tr h="187452">
-                <a:tc>
-                  <a:txBody>
-                    <a:bodyPr/>
-                    <a:lstStyle/>
-                    <a:p>
-                      <a:pPr algn="l"/>
-                      <a:r>
-                        <a:rPr lang="en-IN" sz="1000" b="0">
-                          <a:solidFill>
-                            <a:srgbClr val="1A1A1A"/>
-                          </a:solidFill>
-                          <a:latin typeface="DM Sans"/>
-                        </a:rPr>
-                        <a:t>30% off X-ray, CT, MRI</a:t>
-                      </a:r>
-                    </a:p>
-                  </a:txBody>
-                  <a:tcPr marL="45720" marR="54864" marT="22860" marB="22860" anchor="ctr">
-                    <a:lnL w="0"/>
-                    <a:lnR w="0"/>
-                    <a:lnT w="0"/>
-                    <a:lnB w="9525" cap="flat" cmpd="sng" algn="ctr">
-                      <a:solidFill>
-                        <a:srgbClr val="E0E0E0"/>
-                      </a:solidFill>
-                      <a:prstDash val="solid"/>
-                    </a:lnB>
-                    <a:lnTlToBr w="0"/>
-                    <a:lnBlToTr w="0"/>
-                  </a:tcPr>
-                </a:tc>
-                <a:tc>
-                  <a:txBody>
-                    <a:bodyPr/>
-                    <a:lstStyle/>
-                    <a:p>
-                      <a:pPr algn="r"/>
-                      <a:r>
-                        <a:rPr lang="en-IN" sz="1000" b="0">
-                          <a:solidFill>
-                            <a:srgbClr val="1A1A1A"/>
-                          </a:solidFill>
-                          <a:latin typeface="DM Sans"/>
-                        </a:rPr>
-                        <a:t>78%</a:t>
-                      </a:r>
-                    </a:p>
-                  </a:txBody>
-                  <a:tcPr marL="45720" marR="54864" marT="22860" marB="22860" anchor="ctr">
-                    <a:lnL w="0"/>
-                    <a:lnR w="0"/>
-                    <a:lnT w="0"/>
-                    <a:lnB w="9525" cap="flat" cmpd="sng" algn="ctr">
-                      <a:solidFill>
-                        <a:srgbClr val="E0E0E0"/>
-                      </a:solidFill>
-                      <a:prstDash val="solid"/>
-                    </a:lnB>
-                    <a:lnTlToBr w="0"/>
-                    <a:lnBlToTr w="0"/>
-                  </a:tcPr>
-                </a:tc>
-                <a:tc>
-                  <a:txBody>
-                    <a:bodyPr/>
-                    <a:lstStyle/>
-                    <a:p>
-                      <a:pPr algn="r"/>
-                      <a:r>
-                        <a:rPr lang="en-IN" sz="1000" b="0">
-                          <a:solidFill>
-                            <a:srgbClr val="1A1A1A"/>
-                          </a:solidFill>
-                          <a:latin typeface="DM Sans"/>
-                        </a:rPr>
-                        <a:t>77%</a:t>
-                      </a:r>
-                    </a:p>
-                  </a:txBody>
-                  <a:tcPr marL="45720" marR="54864" marT="22860" marB="22860" anchor="ctr">
-                    <a:lnL w="0"/>
-                    <a:lnR w="0"/>
-                    <a:lnT w="0"/>
-                    <a:lnB w="9525" cap="flat" cmpd="sng" algn="ctr">
-                      <a:solidFill>
-                        <a:srgbClr val="E0E0E0"/>
-                      </a:solidFill>
-                      <a:prstDash val="solid"/>
-                    </a:lnB>
-                    <a:lnTlToBr w="0"/>
-                    <a:lnBlToTr w="0"/>
-                  </a:tcPr>
-                </a:tc>
-                <a:tc>
-                  <a:txBody>
-                    <a:bodyPr/>
-                    <a:lstStyle/>
-                    <a:p>
-                      <a:pPr algn="r"/>
-                      <a:r>
-                        <a:rPr lang="en-IN" sz="1000" b="1">
-                          <a:solidFill>
-                            <a:srgbClr val="EA4722"/>
-                          </a:solidFill>
-                          <a:latin typeface="DM Sans"/>
-                        </a:rPr>
-                        <a:t>27%</a:t>
-                      </a:r>
-                    </a:p>
-                  </a:txBody>
-                  <a:tcPr marL="45720" marR="54864" marT="22860" marB="22860" anchor="ctr">
-                    <a:lnL w="0"/>
-                    <a:lnR w="0"/>
-                    <a:lnT w="0"/>
-                    <a:lnB w="9525" cap="flat" cmpd="sng" algn="ctr">
-                      <a:solidFill>
-                        <a:srgbClr val="E0E0E0"/>
-                      </a:solidFill>
-                      <a:prstDash val="solid"/>
-                    </a:lnB>
-                    <a:lnTlToBr w="0"/>
-                    <a:lnBlToTr w="0"/>
-                  </a:tcPr>
-                </a:tc>
-                <a:tc>
-                  <a:txBody>
-                    <a:bodyPr/>
-                    <a:lstStyle/>
-                    <a:p>
-                      <a:pPr algn="r"/>
-                      <a:r>
-                        <a:rPr lang="en-IN" sz="1000" b="0">
-                          <a:solidFill>
-                            <a:srgbClr val="1A1A1A"/>
-                          </a:solidFill>
-                          <a:latin typeface="DM Sans"/>
-                        </a:rPr>
-                        <a:t>60%</a:t>
-                      </a:r>
-                    </a:p>
-                  </a:txBody>
-                  <a:tcPr marL="45720" marR="54864" marT="22860" marB="22860" anchor="ctr">
-                    <a:lnL w="0"/>
-                    <a:lnR w="0"/>
-                    <a:lnT w="0"/>
-                    <a:lnB w="9525" cap="flat" cmpd="sng" algn="ctr">
-                      <a:solidFill>
-                        <a:srgbClr val="E0E0E0"/>
-                      </a:solidFill>
-                      <a:prstDash val="solid"/>
-                    </a:lnB>
-                    <a:lnTlToBr w="0"/>
-                    <a:lnBlToTr w="0"/>
-                  </a:tcPr>
-                </a:tc>
-                <a:tc>
-                  <a:txBody>
-                    <a:bodyPr/>
-                    <a:lstStyle/>
-                    <a:p>
-                      <a:pPr algn="r"/>
-                      <a:r>
-                        <a:rPr lang="en-IN" sz="1000" b="1">
-                          <a:solidFill>
-                            <a:srgbClr val="1A1A1A"/>
-                          </a:solidFill>
-                          <a:latin typeface="DM Sans"/>
-                        </a:rPr>
-                        <a:t>61%</a:t>
-                      </a:r>
-                    </a:p>
-                  </a:txBody>
-                  <a:tcPr marL="45720" marR="54864" marT="22860" marB="22860" anchor="ctr">
-                    <a:lnL w="0"/>
-                    <a:lnR w="0"/>
-                    <a:lnT w="0"/>
-                    <a:lnB w="9525" cap="flat" cmpd="sng" algn="ctr">
-                      <a:solidFill>
-                        <a:srgbClr val="E0E0E0"/>
-                      </a:solidFill>
-                      <a:prstDash val="solid"/>
-                    </a:lnB>
-                    <a:lnTlToBr w="0"/>
-                    <a:lnBlToTr w="0"/>
-                  </a:tcPr>
-                </a:tc>
-              </a:tr>
-              <a:tr h="187452">
-                <a:tc>
-                  <a:txBody>
-                    <a:bodyPr/>
-                    <a:lstStyle/>
-                    <a:p>
-                      <a:pPr algn="l"/>
-                      <a:r>
-                        <a:rPr lang="en-IN" sz="1000" b="0">
-                          <a:solidFill>
-                            <a:srgbClr val="1A1A1A"/>
-                          </a:solidFill>
-                          <a:latin typeface="DM Sans"/>
-                        </a:rPr>
-                        <a:t>Family can use them</a:t>
-                      </a:r>
-                    </a:p>
-                  </a:txBody>
-                  <a:tcPr marL="45720" marR="54864" marT="22860" marB="22860" anchor="ctr">
-                    <a:lnL w="0"/>
-                    <a:lnR w="0"/>
-                    <a:lnT w="0"/>
-                    <a:lnB w="9525" cap="flat" cmpd="sng" algn="ctr">
-                      <a:solidFill>
-                        <a:srgbClr val="E0E0E0"/>
-                      </a:solidFill>
-                      <a:prstDash val="solid"/>
-                    </a:lnB>
-                    <a:lnTlToBr w="0"/>
-                    <a:lnBlToTr w="0"/>
-                  </a:tcPr>
-                </a:tc>
-                <a:tc>
-                  <a:txBody>
-                    <a:bodyPr/>
-                    <a:lstStyle/>
-                    <a:p>
-                      <a:pPr algn="r"/>
-                      <a:r>
-                        <a:rPr lang="en-IN" sz="1000" b="0">
-                          <a:solidFill>
-                            <a:srgbClr val="1A1A1A"/>
-                          </a:solidFill>
-                          <a:latin typeface="DM Sans"/>
-                        </a:rPr>
-                        <a:t>74%</a:t>
-                      </a:r>
-                    </a:p>
-                  </a:txBody>
-                  <a:tcPr marL="45720" marR="54864" marT="22860" marB="22860" anchor="ctr">
-                    <a:lnL w="0"/>
-                    <a:lnR w="0"/>
-                    <a:lnT w="0"/>
-                    <a:lnB w="9525" cap="flat" cmpd="sng" algn="ctr">
-                      <a:solidFill>
-                        <a:srgbClr val="E0E0E0"/>
-                      </a:solidFill>
-                      <a:prstDash val="solid"/>
-                    </a:lnB>
-                    <a:lnTlToBr w="0"/>
-                    <a:lnBlToTr w="0"/>
-                  </a:tcPr>
-                </a:tc>
-                <a:tc>
-                  <a:txBody>
-                    <a:bodyPr/>
-                    <a:lstStyle/>
-                    <a:p>
-                      <a:pPr algn="r"/>
-                      <a:r>
-                        <a:rPr lang="en-IN" sz="1000" b="0">
-                          <a:solidFill>
-                            <a:srgbClr val="1A1A1A"/>
-                          </a:solidFill>
-                          <a:latin typeface="DM Sans"/>
-                        </a:rPr>
-                        <a:t>77%</a:t>
-                      </a:r>
-                    </a:p>
-                  </a:txBody>
-                  <a:tcPr marL="45720" marR="54864" marT="22860" marB="22860" anchor="ctr">
-                    <a:lnL w="0"/>
-                    <a:lnR w="0"/>
-                    <a:lnT w="0"/>
-                    <a:lnB w="9525" cap="flat" cmpd="sng" algn="ctr">
-                      <a:solidFill>
-                        <a:srgbClr val="E0E0E0"/>
-                      </a:solidFill>
-                      <a:prstDash val="solid"/>
-                    </a:lnB>
-                    <a:lnTlToBr w="0"/>
-                    <a:lnBlToTr w="0"/>
-                  </a:tcPr>
-                </a:tc>
-                <a:tc>
-                  <a:txBody>
-                    <a:bodyPr/>
-                    <a:lstStyle/>
-                    <a:p>
-                      <a:pPr algn="r"/>
-                      <a:r>
-                        <a:rPr lang="en-IN" sz="1000" b="0">
-                          <a:solidFill>
-                            <a:srgbClr val="1A1A1A"/>
-                          </a:solidFill>
-                          <a:latin typeface="DM Sans"/>
-                        </a:rPr>
-                        <a:t>64%</a:t>
-                      </a:r>
-                    </a:p>
-                  </a:txBody>
-                  <a:tcPr marL="45720" marR="54864" marT="22860" marB="22860" anchor="ctr">
-                    <a:lnL w="0"/>
-                    <a:lnR w="0"/>
-                    <a:lnT w="0"/>
-                    <a:lnB w="9525" cap="flat" cmpd="sng" algn="ctr">
-                      <a:solidFill>
-                        <a:srgbClr val="E0E0E0"/>
-                      </a:solidFill>
-                      <a:prstDash val="solid"/>
-                    </a:lnB>
-                    <a:lnTlToBr w="0"/>
-                    <a:lnBlToTr w="0"/>
-                  </a:tcPr>
-                </a:tc>
-                <a:tc>
-                  <a:txBody>
-                    <a:bodyPr/>
-                    <a:lstStyle/>
-                    <a:p>
-                      <a:pPr algn="r"/>
-                      <a:r>
-                        <a:rPr lang="en-IN" sz="1000" b="0">
-                          <a:solidFill>
-                            <a:srgbClr val="1A1A1A"/>
-                          </a:solidFill>
-                          <a:latin typeface="DM Sans"/>
-                        </a:rPr>
-                        <a:t>70%</a:t>
-                      </a:r>
-                    </a:p>
-                  </a:txBody>
-                  <a:tcPr marL="45720" marR="54864" marT="22860" marB="22860" anchor="ctr">
-                    <a:lnL w="0"/>
-                    <a:lnR w="0"/>
-                    <a:lnT w="0"/>
-                    <a:lnB w="9525" cap="flat" cmpd="sng" algn="ctr">
-                      <a:solidFill>
-                        <a:srgbClr val="E0E0E0"/>
-                      </a:solidFill>
-                      <a:prstDash val="solid"/>
-                    </a:lnB>
-                    <a:lnTlToBr w="0"/>
-                    <a:lnBlToTr w="0"/>
-                  </a:tcPr>
-                </a:tc>
-                <a:tc>
-                  <a:txBody>
-                    <a:bodyPr/>
-                    <a:lstStyle/>
-                    <a:p>
-                      <a:pPr algn="r"/>
-                      <a:r>
-                        <a:rPr lang="en-IN" sz="1000" b="1">
-                          <a:solidFill>
-                            <a:srgbClr val="1A1A1A"/>
-                          </a:solidFill>
-                          <a:latin typeface="DM Sans"/>
-                        </a:rPr>
-                        <a:t>66%</a:t>
-                      </a:r>
-                    </a:p>
-                  </a:txBody>
-                  <a:tcPr marL="45720" marR="54864" marT="22860" marB="22860" anchor="ctr">
-                    <a:lnL w="0"/>
-                    <a:lnR w="0"/>
-                    <a:lnT w="0"/>
-                    <a:lnB w="9525" cap="flat" cmpd="sng" algn="ctr">
-                      <a:solidFill>
-                        <a:srgbClr val="E0E0E0"/>
-                      </a:solidFill>
-                      <a:prstDash val="solid"/>
-                    </a:lnB>
-                    <a:lnTlToBr w="0"/>
-                    <a:lnBlToTr w="0"/>
-                  </a:tcPr>
-                </a:tc>
-              </a:tr>
-            </a:tbl>
-          </a:graphicData>
-        </a:graphic>
-      </p:graphicFrame>
-      <p:sp>
-        <p:nvSpPr>
-          <p:cNvPr id="22" name="Label WHAT THEY DO">
-            <a:extLst>
-              <a:ext uri="{FF2B5EF4-FFF2-40B4-BE49-F238E27FC236}">
-                <a16:creationId xmlns:a16="http://schemas.microsoft.com/office/drawing/2014/main" id="{00E28BCF-A616-487D-A74F-A1750555F9E9}"/>
-              </a:ext>
-            </a:extLst>
-          </p:cNvPr>
-          <p:cNvSpPr txBox="1"/>
-          <p:nvPr/>
-        </p:nvSpPr>
-        <p:spPr>
-          <a:xfrm>
-            <a:off x="4800600" y="1700784"/>
-            <a:ext cx="3813048" cy="152400"/>
-          </a:xfrm>
-          <a:prstGeom prst="rect">
-            <a:avLst/>
-          </a:prstGeom>
-          <a:noFill/>
-        </p:spPr>
-        <p:txBody>
-          <a:bodyPr vertOverflow="overflow" vert="horz" wrap="square" lIns="0" tIns="0" rIns="0" bIns="0" rtlCol="0" anchor="t" anchorCtr="0">
-            <a:noAutofit/>
-          </a:bodyPr>
-          <a:lstStyle/>
-          <a:p>
-            <a:r>
-              <a:rPr lang="en-GB" sz="900">
-                <a:solidFill>
-                  <a:srgbClr val="000000"/>
-                </a:solidFill>
-                <a:latin typeface="DM Sans ExtraBold"/>
-              </a:rPr>
-              <a:t>WHAT THEY DO  ·  % OF RESPONDENTS</a:t>
-            </a:r>
-            <a:endParaRPr lang="en-IN" sz="900">
-              <a:solidFill>
-                <a:srgbClr val="000000"/>
-              </a:solidFill>
-              <a:latin typeface="DM Sans ExtraBold"/>
-            </a:endParaRPr>
-          </a:p>
-        </p:txBody>
-      </p:sp>
-      <p:graphicFrame>
-        <p:nvGraphicFramePr>
-          <p:cNvPr id="23" name="Table WHAT THEY DO">
-            <a:extLst>
-              <a:ext uri="{FF2B5EF4-FFF2-40B4-BE49-F238E27FC236}">
-                <a16:creationId xmlns:a16="http://schemas.microsoft.com/office/drawing/2014/main" id="{463CAD2E-FEF6-4422-A95C-5F17A77C5A02}"/>
-              </a:ext>
-            </a:extLst>
-          </p:cNvPr>
-          <p:cNvGraphicFramePr>
-            <a:graphicFrameLocks noGrp="1"/>
-          </p:cNvGraphicFramePr>
-          <p:nvPr/>
-        </p:nvGraphicFramePr>
-        <p:xfrm>
-          <a:off x="4800600" y="1883664"/>
-          <a:ext cx="3813048" cy="2212848"/>
-        </p:xfrm>
-        <a:graphic>
-          <a:graphicData uri="http://schemas.openxmlformats.org/drawingml/2006/table">
-            <a:tbl>
-              <a:tblPr/>
-              <a:tblGrid>
-                <a:gridCol w="1600200"/>
-                <a:gridCol w="442569"/>
-                <a:gridCol w="442569"/>
-                <a:gridCol w="442569"/>
-                <a:gridCol w="442569"/>
-                <a:gridCol w="442572"/>
-              </a:tblGrid>
-              <a:tr h="365760">
-                <a:tc>
-                  <a:txBody>
-                    <a:bodyPr/>
-                    <a:lstStyle/>
-                    <a:p>
-                      <a:pPr algn="l"/>
-                      <a:endParaRPr lang="en-IN" sz="900"/>
-                    </a:p>
-                  </a:txBody>
-                  <a:tcPr marL="45720" marR="54864" marT="22860" marB="22860" anchor="ctr">
-                    <a:lnL w="0"/>
-                    <a:lnR w="0"/>
-                    <a:lnT w="0"/>
-                    <a:lnB w="12700" cap="flat" cmpd="sng" algn="ctr">
-                      <a:solidFill>
-                        <a:srgbClr val="1A1A1A"/>
-                      </a:solidFill>
-                      <a:prstDash val="solid"/>
-                    </a:lnB>
-                    <a:lnTlToBr w="0"/>
-                    <a:lnBlToTr w="0"/>
-                  </a:tcPr>
-                </a:tc>
-                <a:tc>
-                  <a:txBody>
-                    <a:bodyPr/>
-                    <a:lstStyle/>
-                    <a:p>
-                      <a:pPr algn="r"/>
-                      <a:r>
-                        <a:rPr lang="en-IN" sz="900" b="0">
-                          <a:solidFill>
-                            <a:srgbClr val="000000"/>
-                          </a:solidFill>
-                          <a:latin typeface="DM Sans ExtraBold"/>
-                        </a:rPr>
-                        <a:t>P-84</a:t>
-                      </a:r>
-                    </a:p>
-                    <a:p>
-                      <a:pPr algn="r"/>
-                      <a:r>
-                        <a:rPr lang="en-IN" sz="1000" b="1">
-                          <a:solidFill>
-                            <a:srgbClr val="EA4722"/>
-                          </a:solidFill>
-                          <a:latin typeface="DM Sans"/>
-                        </a:rPr>
-                        <a:t>23</a:t>
-                      </a:r>
-                    </a:p>
-                  </a:txBody>
-                  <a:tcPr marL="45720" marR="54864" marT="22860" marB="22860" anchor="b">
-                    <a:lnL w="0"/>
-                    <a:lnR w="0"/>
-                    <a:lnT w="0"/>
-                    <a:lnB w="12700" cap="flat" cmpd="sng" algn="ctr">
-                      <a:solidFill>
-                        <a:srgbClr val="1A1A1A"/>
-                      </a:solidFill>
-                      <a:prstDash val="solid"/>
-                    </a:lnB>
-                    <a:lnTlToBr w="0"/>
-                    <a:lnBlToTr w="0"/>
-                  </a:tcPr>
-                </a:tc>
-                <a:tc>
-                  <a:txBody>
-                    <a:bodyPr/>
-                    <a:lstStyle/>
-                    <a:p>
-                      <a:pPr algn="r"/>
-                      <a:r>
-                        <a:rPr lang="en-IN" sz="900" b="0">
-                          <a:solidFill>
-                            <a:srgbClr val="000000"/>
-                          </a:solidFill>
-                          <a:latin typeface="DM Sans ExtraBold"/>
-                        </a:rPr>
-                        <a:t>P-120</a:t>
-                      </a:r>
-                    </a:p>
-                    <a:p>
-                      <a:pPr algn="r"/>
-                      <a:r>
-                        <a:rPr lang="en-IN" sz="1000" b="1">
-                          <a:solidFill>
-                            <a:srgbClr val="EA4722"/>
-                          </a:solidFill>
-                          <a:latin typeface="DM Sans"/>
-                        </a:rPr>
-                        <a:t>13</a:t>
-                      </a:r>
-                    </a:p>
-                  </a:txBody>
-                  <a:tcPr marL="45720" marR="54864" marT="22860" marB="22860" anchor="b">
-                    <a:lnL w="0"/>
-                    <a:lnR w="0"/>
-                    <a:lnT w="0"/>
-                    <a:lnB w="12700" cap="flat" cmpd="sng" algn="ctr">
-                      <a:solidFill>
-                        <a:srgbClr val="1A1A1A"/>
-                      </a:solidFill>
-                      <a:prstDash val="solid"/>
-                    </a:lnB>
-                    <a:lnTlToBr w="0"/>
-                    <a:lnBlToTr w="0"/>
-                  </a:tcPr>
-                </a:tc>
-                <a:tc>
-                  <a:txBody>
-                    <a:bodyPr/>
-                    <a:lstStyle/>
-                    <a:p>
-                      <a:pPr algn="r"/>
-                      <a:r>
-                        <a:rPr lang="en-IN" sz="900" b="0">
-                          <a:solidFill>
-                            <a:srgbClr val="000000"/>
-                          </a:solidFill>
-                          <a:latin typeface="DM Sans ExtraBold"/>
-                        </a:rPr>
-                        <a:t>P-116</a:t>
-                      </a:r>
-                    </a:p>
-                    <a:p>
-                      <a:pPr algn="r"/>
-                      <a:r>
-                        <a:rPr lang="en-IN" sz="1000" b="1">
-                          <a:solidFill>
-                            <a:srgbClr val="EA4722"/>
-                          </a:solidFill>
-                          <a:latin typeface="DM Sans"/>
-                        </a:rPr>
-                        <a:t>11</a:t>
-                      </a:r>
-                    </a:p>
-                  </a:txBody>
-                  <a:tcPr marL="45720" marR="54864" marT="22860" marB="22860" anchor="b">
-                    <a:lnL w="0"/>
-                    <a:lnR w="0"/>
-                    <a:lnT w="0"/>
-                    <a:lnB w="12700" cap="flat" cmpd="sng" algn="ctr">
-                      <a:solidFill>
-                        <a:srgbClr val="1A1A1A"/>
-                      </a:solidFill>
-                      <a:prstDash val="solid"/>
-                    </a:lnB>
-                    <a:lnTlToBr w="0"/>
-                    <a:lnBlToTr w="0"/>
-                  </a:tcPr>
-                </a:tc>
-                <a:tc>
-                  <a:txBody>
-                    <a:bodyPr/>
-                    <a:lstStyle/>
-                    <a:p>
-                      <a:pPr algn="r"/>
-                      <a:r>
-                        <a:rPr lang="en-IN" sz="900" b="0">
-                          <a:solidFill>
-                            <a:srgbClr val="000000"/>
-                          </a:solidFill>
-                          <a:latin typeface="DM Sans ExtraBold"/>
-                        </a:rPr>
-                        <a:t>P-119</a:t>
-                      </a:r>
-                    </a:p>
-                    <a:p>
-                      <a:pPr algn="r"/>
-                      <a:r>
-                        <a:rPr lang="en-IN" sz="1000" b="1">
-                          <a:solidFill>
-                            <a:srgbClr val="EA4722"/>
-                          </a:solidFill>
-                          <a:latin typeface="DM Sans"/>
-                        </a:rPr>
-                        <a:t>10</a:t>
-                      </a:r>
-                    </a:p>
-                  </a:txBody>
-                  <a:tcPr marL="45720" marR="54864" marT="22860" marB="22860" anchor="b">
-                    <a:lnL w="0"/>
-                    <a:lnR w="0"/>
-                    <a:lnT w="0"/>
-                    <a:lnB w="12700" cap="flat" cmpd="sng" algn="ctr">
-                      <a:solidFill>
-                        <a:srgbClr val="1A1A1A"/>
-                      </a:solidFill>
-                      <a:prstDash val="solid"/>
-                    </a:lnB>
-                    <a:lnTlToBr w="0"/>
-                    <a:lnBlToTr w="0"/>
-                  </a:tcPr>
-                </a:tc>
-                <a:tc>
-                  <a:txBody>
-                    <a:bodyPr/>
-                    <a:lstStyle/>
-                    <a:p>
-                      <a:pPr algn="r"/>
-                      <a:r>
-                        <a:rPr lang="en-IN" sz="900" b="0">
-                          <a:solidFill>
-                            <a:srgbClr val="000000"/>
-                          </a:solidFill>
-                          <a:latin typeface="DM Sans ExtraBold"/>
-                        </a:rPr>
-                        <a:t>Total</a:t>
-                      </a:r>
-                    </a:p>
-                    <a:p>
-                      <a:pPr algn="r"/>
-                      <a:r>
-                        <a:rPr lang="en-IN" sz="1000" b="1">
-                          <a:solidFill>
-                            <a:srgbClr val="EA4722"/>
-                          </a:solidFill>
-                          <a:latin typeface="DM Sans"/>
-                        </a:rPr>
-                        <a:t>62</a:t>
-                      </a:r>
-                    </a:p>
-                  </a:txBody>
-                  <a:tcPr marL="45720" marR="54864" marT="22860" marB="22860" anchor="b">
-                    <a:lnL w="0"/>
-                    <a:lnR w="0"/>
-                    <a:lnT w="0"/>
-                    <a:lnB w="12700" cap="flat" cmpd="sng" algn="ctr">
-                      <a:solidFill>
-                        <a:srgbClr val="1A1A1A"/>
-                      </a:solidFill>
-                      <a:prstDash val="solid"/>
-                    </a:lnB>
-                    <a:lnTlToBr w="0"/>
-                    <a:lnBlToTr w="0"/>
-                  </a:tcPr>
-                </a:tc>
-              </a:tr>
-              <a:tr h="173736">
-                <a:tc gridSpan="6">
-                  <a:txBody>
-                    <a:bodyPr/>
-                    <a:lstStyle/>
-                    <a:p>
-                      <a:pPr algn="l"/>
-                      <a:r>
-                        <a:rPr lang="en-IN" sz="800" b="0">
-                          <a:solidFill>
-                            <a:srgbClr val="EA4722"/>
-                          </a:solidFill>
-                          <a:latin typeface="DM Sans ExtraBold"/>
-                        </a:rPr>
-                        <a:t>ACTION</a:t>
-                      </a:r>
-                    </a:p>
-                  </a:txBody>
-                  <a:tcPr marL="45720" marR="54864" marT="45720" marB="0" anchor="ctr">
-                    <a:lnL w="0"/>
-                    <a:lnR w="0"/>
-                    <a:lnT w="0"/>
-                    <a:lnB w="0"/>
-                    <a:lnTlToBr w="0"/>
-                    <a:lnBlToTr w="0"/>
-                  </a:tcPr>
-                </a:tc>
-                <a:tc hMerge="1">
-                  <a:txBody>
-                    <a:bodyPr/>
-                    <a:lstStyle/>
-                    <a:p>
-                      <a:endParaRPr lang="en-IN"/>
-                    </a:p>
-                  </a:txBody>
-                  <a:tcPr/>
-                </a:tc>
-                <a:tc hMerge="1">
-                  <a:txBody>
-                    <a:bodyPr/>
-                    <a:lstStyle/>
-                    <a:p>
-                      <a:endParaRPr lang="en-IN"/>
-                    </a:p>
-                  </a:txBody>
-                  <a:tcPr/>
-                </a:tc>
-                <a:tc hMerge="1">
-                  <a:txBody>
-                    <a:bodyPr/>
-                    <a:lstStyle/>
-                    <a:p>
-                      <a:endParaRPr lang="en-IN"/>
-                    </a:p>
-                  </a:txBody>
-                  <a:tcPr/>
-                </a:tc>
-                <a:tc hMerge="1">
-                  <a:txBody>
-                    <a:bodyPr/>
-                    <a:lstStyle/>
-                    <a:p>
-                      <a:endParaRPr lang="en-IN"/>
-                    </a:p>
-                  </a:txBody>
-                  <a:tcPr/>
-                </a:tc>
-                <a:tc hMerge="1">
-                  <a:txBody>
-                    <a:bodyPr/>
-                    <a:lstStyle/>
-                    <a:p>
-                      <a:endParaRPr lang="en-IN"/>
-                    </a:p>
-                  </a:txBody>
-                  <a:tcPr/>
-                </a:tc>
-              </a:tr>
-              <a:tr h="187452">
-                <a:tc>
-                  <a:txBody>
-                    <a:bodyPr/>
-                    <a:lstStyle/>
-                    <a:p>
-                      <a:pPr algn="l"/>
-                      <a:r>
-                        <a:rPr lang="en-IN" sz="1000" b="0">
-                          <a:solidFill>
-                            <a:srgbClr val="1A1A1A"/>
-                          </a:solidFill>
-                          <a:latin typeface="DM Sans"/>
-                        </a:rPr>
-                        <a:t>Downloaded the app</a:t>
-                      </a:r>
-                    </a:p>
-                  </a:txBody>
-                  <a:tcPr marL="45720" marR="54864" marT="22860" marB="22860" anchor="ctr">
-                    <a:lnL w="0"/>
-                    <a:lnR w="0"/>
-                    <a:lnT w="0"/>
-                    <a:lnB w="9525" cap="flat" cmpd="sng" algn="ctr">
-                      <a:solidFill>
-                        <a:srgbClr val="E0E0E0"/>
-                      </a:solidFill>
-                      <a:prstDash val="solid"/>
-                    </a:lnB>
-                    <a:lnTlToBr w="0"/>
-                    <a:lnBlToTr w="0"/>
-                  </a:tcPr>
-                </a:tc>
-                <a:tc>
-                  <a:txBody>
-                    <a:bodyPr/>
-                    <a:lstStyle/>
-                    <a:p>
-                      <a:pPr algn="r"/>
-                      <a:r>
-                        <a:rPr lang="en-IN" sz="1000" b="0">
-                          <a:solidFill>
-                            <a:srgbClr val="1A1A1A"/>
-                          </a:solidFill>
-                          <a:latin typeface="DM Sans"/>
-                        </a:rPr>
-                        <a:t>30%</a:t>
-                      </a:r>
-                    </a:p>
-                  </a:txBody>
-                  <a:tcPr marL="45720" marR="54864" marT="22860" marB="22860" anchor="ctr">
-                    <a:lnL w="0"/>
-                    <a:lnR w="0"/>
-                    <a:lnT w="0"/>
-                    <a:lnB w="9525" cap="flat" cmpd="sng" algn="ctr">
-                      <a:solidFill>
-                        <a:srgbClr val="E0E0E0"/>
-                      </a:solidFill>
-                      <a:prstDash val="solid"/>
-                    </a:lnB>
-                    <a:lnTlToBr w="0"/>
-                    <a:lnBlToTr w="0"/>
-                  </a:tcPr>
-                </a:tc>
-                <a:tc>
-                  <a:txBody>
-                    <a:bodyPr/>
-                    <a:lstStyle/>
-                    <a:p>
-                      <a:pPr algn="r"/>
-                      <a:r>
-                        <a:rPr lang="en-IN" sz="1000" b="0">
-                          <a:solidFill>
-                            <a:srgbClr val="1A1A1A"/>
-                          </a:solidFill>
-                          <a:latin typeface="DM Sans"/>
-                        </a:rPr>
-                        <a:t>62%</a:t>
-                      </a:r>
-                    </a:p>
-                  </a:txBody>
-                  <a:tcPr marL="45720" marR="54864" marT="22860" marB="22860" anchor="ctr">
-                    <a:lnL w="0"/>
-                    <a:lnR w="0"/>
-                    <a:lnT w="0"/>
-                    <a:lnB w="9525" cap="flat" cmpd="sng" algn="ctr">
-                      <a:solidFill>
-                        <a:srgbClr val="E0E0E0"/>
-                      </a:solidFill>
-                      <a:prstDash val="solid"/>
-                    </a:lnB>
-                    <a:lnTlToBr w="0"/>
-                    <a:lnBlToTr w="0"/>
-                  </a:tcPr>
-                </a:tc>
-                <a:tc>
-                  <a:txBody>
-                    <a:bodyPr/>
-                    <a:lstStyle/>
-                    <a:p>
-                      <a:pPr algn="r"/>
-                      <a:r>
-                        <a:rPr lang="en-IN" sz="1000" b="1">
-                          <a:solidFill>
-                            <a:srgbClr val="EA4722"/>
-                          </a:solidFill>
-                          <a:latin typeface="DM Sans"/>
-                        </a:rPr>
-                        <a:t>0%</a:t>
-                      </a:r>
-                    </a:p>
-                  </a:txBody>
-                  <a:tcPr marL="45720" marR="54864" marT="22860" marB="22860" anchor="ctr">
-                    <a:lnL w="0"/>
-                    <a:lnR w="0"/>
-                    <a:lnT w="0"/>
-                    <a:lnB w="9525" cap="flat" cmpd="sng" algn="ctr">
-                      <a:solidFill>
-                        <a:srgbClr val="E0E0E0"/>
-                      </a:solidFill>
-                      <a:prstDash val="solid"/>
-                    </a:lnB>
-                    <a:lnTlToBr w="0"/>
-                    <a:lnBlToTr w="0"/>
-                  </a:tcPr>
-                </a:tc>
-                <a:tc>
-                  <a:txBody>
-                    <a:bodyPr/>
-                    <a:lstStyle/>
-                    <a:p>
-                      <a:pPr algn="r"/>
-                      <a:r>
-                        <a:rPr lang="en-IN" sz="1000" b="0">
-                          <a:solidFill>
-                            <a:srgbClr val="1A1A1A"/>
-                          </a:solidFill>
-                          <a:latin typeface="DM Sans"/>
-                        </a:rPr>
-                        <a:t>10%</a:t>
-                      </a:r>
-                    </a:p>
-                  </a:txBody>
-                  <a:tcPr marL="45720" marR="54864" marT="22860" marB="22860" anchor="ctr">
-                    <a:lnL w="0"/>
-                    <a:lnR w="0"/>
-                    <a:lnT w="0"/>
-                    <a:lnB w="9525" cap="flat" cmpd="sng" algn="ctr">
-                      <a:solidFill>
-                        <a:srgbClr val="E0E0E0"/>
-                      </a:solidFill>
-                      <a:prstDash val="solid"/>
-                    </a:lnB>
-                    <a:lnTlToBr w="0"/>
-                    <a:lnBlToTr w="0"/>
-                  </a:tcPr>
-                </a:tc>
-                <a:tc>
-                  <a:txBody>
-                    <a:bodyPr/>
-                    <a:lstStyle/>
-                    <a:p>
-                      <a:pPr algn="r"/>
-                      <a:r>
-                        <a:rPr lang="en-IN" sz="1000" b="1">
-                          <a:solidFill>
-                            <a:srgbClr val="1A1A1A"/>
-                          </a:solidFill>
-                          <a:latin typeface="DM Sans"/>
-                        </a:rPr>
-                        <a:t>26%</a:t>
-                      </a:r>
-                    </a:p>
-                  </a:txBody>
-                  <a:tcPr marL="45720" marR="54864" marT="22860" marB="22860" anchor="ctr">
-                    <a:lnL w="0"/>
-                    <a:lnR w="0"/>
-                    <a:lnT w="0"/>
-                    <a:lnB w="9525" cap="flat" cmpd="sng" algn="ctr">
-                      <a:solidFill>
-                        <a:srgbClr val="E0E0E0"/>
-                      </a:solidFill>
-                      <a:prstDash val="solid"/>
-                    </a:lnB>
-                    <a:lnTlToBr w="0"/>
-                    <a:lnBlToTr w="0"/>
-                  </a:tcPr>
-                </a:tc>
-              </a:tr>
-              <a:tr h="187452">
-                <a:tc>
-                  <a:txBody>
-                    <a:bodyPr/>
-                    <a:lstStyle/>
-                    <a:p>
-                      <a:pPr algn="l"/>
-                      <a:r>
-                        <a:rPr lang="en-IN" sz="1000" b="0">
-                          <a:solidFill>
-                            <a:srgbClr val="1A1A1A"/>
-                          </a:solidFill>
-                          <a:latin typeface="DM Sans"/>
-                        </a:rPr>
-                        <a:t>Will visit: Yes</a:t>
-                      </a:r>
-                    </a:p>
-                  </a:txBody>
-                  <a:tcPr marL="45720" marR="54864" marT="22860" marB="22860" anchor="ctr">
-                    <a:lnL w="0"/>
-                    <a:lnR w="0"/>
-                    <a:lnT w="0"/>
-                    <a:lnB w="9525" cap="flat" cmpd="sng" algn="ctr">
-                      <a:solidFill>
-                        <a:srgbClr val="E0E0E0"/>
-                      </a:solidFill>
-                      <a:prstDash val="solid"/>
-                    </a:lnB>
-                    <a:lnTlToBr w="0"/>
-                    <a:lnBlToTr w="0"/>
-                  </a:tcPr>
-                </a:tc>
-                <a:tc>
-                  <a:txBody>
-                    <a:bodyPr/>
-                    <a:lstStyle/>
-                    <a:p>
-                      <a:pPr algn="r"/>
-                      <a:r>
-                        <a:rPr lang="en-IN" sz="1000" b="0">
-                          <a:solidFill>
-                            <a:srgbClr val="1A1A1A"/>
-                          </a:solidFill>
-                          <a:latin typeface="DM Sans"/>
-                        </a:rPr>
-                        <a:t>65%</a:t>
-                      </a:r>
-                    </a:p>
-                  </a:txBody>
-                  <a:tcPr marL="45720" marR="54864" marT="22860" marB="22860" anchor="ctr">
-                    <a:lnL w="0"/>
-                    <a:lnR w="0"/>
-                    <a:lnT w="0"/>
-                    <a:lnB w="9525" cap="flat" cmpd="sng" algn="ctr">
-                      <a:solidFill>
-                        <a:srgbClr val="E0E0E0"/>
-                      </a:solidFill>
-                      <a:prstDash val="solid"/>
-                    </a:lnB>
-                    <a:lnTlToBr w="0"/>
-                    <a:lnBlToTr w="0"/>
-                  </a:tcPr>
-                </a:tc>
-                <a:tc>
-                  <a:txBody>
-                    <a:bodyPr/>
-                    <a:lstStyle/>
-                    <a:p>
-                      <a:pPr algn="r"/>
-                      <a:r>
-                        <a:rPr lang="en-IN" sz="1000" b="0">
-                          <a:solidFill>
-                            <a:srgbClr val="1A1A1A"/>
-                          </a:solidFill>
-                          <a:latin typeface="DM Sans"/>
-                        </a:rPr>
-                        <a:t>85%</a:t>
-                      </a:r>
-                    </a:p>
-                  </a:txBody>
-                  <a:tcPr marL="45720" marR="54864" marT="22860" marB="22860" anchor="ctr">
-                    <a:lnL w="0"/>
-                    <a:lnR w="0"/>
-                    <a:lnT w="0"/>
-                    <a:lnB w="9525" cap="flat" cmpd="sng" algn="ctr">
-                      <a:solidFill>
-                        <a:srgbClr val="E0E0E0"/>
-                      </a:solidFill>
-                      <a:prstDash val="solid"/>
-                    </a:lnB>
-                    <a:lnTlToBr w="0"/>
-                    <a:lnBlToTr w="0"/>
-                  </a:tcPr>
-                </a:tc>
-                <a:tc>
-                  <a:txBody>
-                    <a:bodyPr/>
-                    <a:lstStyle/>
-                    <a:p>
-                      <a:pPr algn="r"/>
-                      <a:r>
-                        <a:rPr lang="en-IN" sz="1000" b="0">
-                          <a:solidFill>
-                            <a:srgbClr val="1A1A1A"/>
-                          </a:solidFill>
-                          <a:latin typeface="DM Sans"/>
-                        </a:rPr>
-                        <a:t>73%</a:t>
-                      </a:r>
-                    </a:p>
-                  </a:txBody>
-                  <a:tcPr marL="45720" marR="54864" marT="22860" marB="22860" anchor="ctr">
-                    <a:lnL w="0"/>
-                    <a:lnR w="0"/>
-                    <a:lnT w="0"/>
-                    <a:lnB w="9525" cap="flat" cmpd="sng" algn="ctr">
-                      <a:solidFill>
-                        <a:srgbClr val="E0E0E0"/>
-                      </a:solidFill>
-                      <a:prstDash val="solid"/>
-                    </a:lnB>
-                    <a:lnTlToBr w="0"/>
-                    <a:lnBlToTr w="0"/>
-                  </a:tcPr>
-                </a:tc>
-                <a:tc>
-                  <a:txBody>
-                    <a:bodyPr/>
-                    <a:lstStyle/>
-                    <a:p>
-                      <a:pPr algn="r"/>
-                      <a:r>
-                        <a:rPr lang="en-IN" sz="1000" b="0">
-                          <a:solidFill>
-                            <a:srgbClr val="1A1A1A"/>
-                          </a:solidFill>
-                          <a:latin typeface="DM Sans"/>
-                        </a:rPr>
-                        <a:t>60%</a:t>
-                      </a:r>
-                    </a:p>
-                  </a:txBody>
-                  <a:tcPr marL="45720" marR="54864" marT="22860" marB="22860" anchor="ctr">
-                    <a:lnL w="0"/>
-                    <a:lnR w="0"/>
-                    <a:lnT w="0"/>
-                    <a:lnB w="9525" cap="flat" cmpd="sng" algn="ctr">
-                      <a:solidFill>
-                        <a:srgbClr val="E0E0E0"/>
-                      </a:solidFill>
-                      <a:prstDash val="solid"/>
-                    </a:lnB>
-                    <a:lnTlToBr w="0"/>
-                    <a:lnBlToTr w="0"/>
-                  </a:tcPr>
-                </a:tc>
-                <a:tc>
-                  <a:txBody>
-                    <a:bodyPr/>
-                    <a:lstStyle/>
-                    <a:p>
-                      <a:pPr algn="r"/>
-                      <a:r>
-                        <a:rPr lang="en-IN" sz="1000" b="1">
-                          <a:solidFill>
-                            <a:srgbClr val="1A1A1A"/>
-                          </a:solidFill>
-                          <a:latin typeface="DM Sans"/>
-                        </a:rPr>
-                        <a:t>66%</a:t>
-                      </a:r>
-                    </a:p>
-                  </a:txBody>
-                  <a:tcPr marL="45720" marR="54864" marT="22860" marB="22860" anchor="ctr">
-                    <a:lnL w="0"/>
-                    <a:lnR w="0"/>
-                    <a:lnT w="0"/>
-                    <a:lnB w="9525" cap="flat" cmpd="sng" algn="ctr">
-                      <a:solidFill>
-                        <a:srgbClr val="E0E0E0"/>
-                      </a:solidFill>
-                      <a:prstDash val="solid"/>
-                    </a:lnB>
-                    <a:lnTlToBr w="0"/>
-                    <a:lnBlToTr w="0"/>
-                  </a:tcPr>
-                </a:tc>
-              </a:tr>
-              <a:tr h="187452">
-                <a:tc>
-                  <a:txBody>
-                    <a:bodyPr/>
-                    <a:lstStyle/>
-                    <a:p>
-                      <a:pPr algn="l"/>
-                      <a:r>
-                        <a:rPr lang="en-IN" sz="1000" b="0">
-                          <a:solidFill>
-                            <a:srgbClr val="1A1A1A"/>
-                          </a:solidFill>
-                          <a:latin typeface="DM Sans"/>
-                        </a:rPr>
-                        <a:t>Will visit: Maybe</a:t>
-                      </a:r>
-                    </a:p>
-                  </a:txBody>
-                  <a:tcPr marL="45720" marR="54864" marT="22860" marB="22860" anchor="ctr">
-                    <a:lnL w="0"/>
-                    <a:lnR w="0"/>
-                    <a:lnT w="0"/>
-                    <a:lnB w="9525" cap="flat" cmpd="sng" algn="ctr">
-                      <a:solidFill>
-                        <a:srgbClr val="E0E0E0"/>
-                      </a:solidFill>
-                      <a:prstDash val="solid"/>
-                    </a:lnB>
-                    <a:lnTlToBr w="0"/>
-                    <a:lnBlToTr w="0"/>
-                  </a:tcPr>
-                </a:tc>
-                <a:tc>
-                  <a:txBody>
-                    <a:bodyPr/>
-                    <a:lstStyle/>
-                    <a:p>
-                      <a:pPr algn="r"/>
-                      <a:r>
-                        <a:rPr lang="en-IN" sz="1000" b="0">
-                          <a:solidFill>
-                            <a:srgbClr val="1A1A1A"/>
-                          </a:solidFill>
-                          <a:latin typeface="DM Sans"/>
-                        </a:rPr>
-                        <a:t>35%</a:t>
-                      </a:r>
-                    </a:p>
-                  </a:txBody>
-                  <a:tcPr marL="45720" marR="54864" marT="22860" marB="22860" anchor="ctr">
-                    <a:lnL w="0"/>
-                    <a:lnR w="0"/>
-                    <a:lnT w="0"/>
-                    <a:lnB w="9525" cap="flat" cmpd="sng" algn="ctr">
-                      <a:solidFill>
-                        <a:srgbClr val="E0E0E0"/>
-                      </a:solidFill>
-                      <a:prstDash val="solid"/>
-                    </a:lnB>
-                    <a:lnTlToBr w="0"/>
-                    <a:lnBlToTr w="0"/>
-                  </a:tcPr>
-                </a:tc>
-                <a:tc>
-                  <a:txBody>
-                    <a:bodyPr/>
-                    <a:lstStyle/>
-                    <a:p>
-                      <a:pPr algn="r"/>
-                      <a:r>
-                        <a:rPr lang="en-IN" sz="1000" b="0">
-                          <a:solidFill>
-                            <a:srgbClr val="1A1A1A"/>
-                          </a:solidFill>
-                          <a:latin typeface="DM Sans"/>
-                        </a:rPr>
-                        <a:t>8%</a:t>
-                      </a:r>
-                    </a:p>
-                  </a:txBody>
-                  <a:tcPr marL="45720" marR="54864" marT="22860" marB="22860" anchor="ctr">
-                    <a:lnL w="0"/>
-                    <a:lnR w="0"/>
-                    <a:lnT w="0"/>
-                    <a:lnB w="9525" cap="flat" cmpd="sng" algn="ctr">
-                      <a:solidFill>
-                        <a:srgbClr val="E0E0E0"/>
-                      </a:solidFill>
-                      <a:prstDash val="solid"/>
-                    </a:lnB>
-                    <a:lnTlToBr w="0"/>
-                    <a:lnBlToTr w="0"/>
-                  </a:tcPr>
-                </a:tc>
-                <a:tc>
-                  <a:txBody>
-                    <a:bodyPr/>
-                    <a:lstStyle/>
-                    <a:p>
-                      <a:pPr algn="r"/>
-                      <a:r>
-                        <a:rPr lang="en-IN" sz="1000" b="0">
-                          <a:solidFill>
-                            <a:srgbClr val="1A1A1A"/>
-                          </a:solidFill>
-                          <a:latin typeface="DM Sans"/>
-                        </a:rPr>
-                        <a:t>27%</a:t>
-                      </a:r>
-                    </a:p>
-                  </a:txBody>
-                  <a:tcPr marL="45720" marR="54864" marT="22860" marB="22860" anchor="ctr">
-                    <a:lnL w="0"/>
-                    <a:lnR w="0"/>
-                    <a:lnT w="0"/>
-                    <a:lnB w="9525" cap="flat" cmpd="sng" algn="ctr">
-                      <a:solidFill>
-                        <a:srgbClr val="E0E0E0"/>
-                      </a:solidFill>
-                      <a:prstDash val="solid"/>
-                    </a:lnB>
-                    <a:lnTlToBr w="0"/>
-                    <a:lnBlToTr w="0"/>
-                  </a:tcPr>
-                </a:tc>
-                <a:tc>
-                  <a:txBody>
-                    <a:bodyPr/>
-                    <a:lstStyle/>
-                    <a:p>
-                      <a:pPr algn="r"/>
-                      <a:r>
-                        <a:rPr lang="en-IN" sz="1000" b="0">
-                          <a:solidFill>
-                            <a:srgbClr val="1A1A1A"/>
-                          </a:solidFill>
-                          <a:latin typeface="DM Sans"/>
-                        </a:rPr>
-                        <a:t>40%</a:t>
-                      </a:r>
-                    </a:p>
-                  </a:txBody>
-                  <a:tcPr marL="45720" marR="54864" marT="22860" marB="22860" anchor="ctr">
-                    <a:lnL w="0"/>
-                    <a:lnR w="0"/>
-                    <a:lnT w="0"/>
-                    <a:lnB w="9525" cap="flat" cmpd="sng" algn="ctr">
-                      <a:solidFill>
-                        <a:srgbClr val="E0E0E0"/>
-                      </a:solidFill>
-                      <a:prstDash val="solid"/>
-                    </a:lnB>
-                    <a:lnTlToBr w="0"/>
-                    <a:lnBlToTr w="0"/>
-                  </a:tcPr>
-                </a:tc>
-                <a:tc>
-                  <a:txBody>
-                    <a:bodyPr/>
-                    <a:lstStyle/>
-                    <a:p>
-                      <a:pPr algn="r"/>
-                      <a:r>
-                        <a:rPr lang="en-IN" sz="1000" b="1">
-                          <a:solidFill>
-                            <a:srgbClr val="1A1A1A"/>
-                          </a:solidFill>
-                          <a:latin typeface="DM Sans"/>
-                        </a:rPr>
-                        <a:t>32%</a:t>
-                      </a:r>
-                    </a:p>
-                  </a:txBody>
-                  <a:tcPr marL="45720" marR="54864" marT="22860" marB="22860" anchor="ctr">
-                    <a:lnL w="0"/>
-                    <a:lnR w="0"/>
-                    <a:lnT w="0"/>
-                    <a:lnB w="9525" cap="flat" cmpd="sng" algn="ctr">
-                      <a:solidFill>
-                        <a:srgbClr val="E0E0E0"/>
-                      </a:solidFill>
-                      <a:prstDash val="solid"/>
-                    </a:lnB>
-                    <a:lnTlToBr w="0"/>
-                    <a:lnBlToTr w="0"/>
-                  </a:tcPr>
-                </a:tc>
-              </a:tr>
-              <a:tr h="187452">
-                <a:tc>
-                  <a:txBody>
-                    <a:bodyPr/>
-                    <a:lstStyle/>
-                    <a:p>
-                      <a:pPr algn="l"/>
-                      <a:r>
-                        <a:rPr lang="en-IN" sz="1000" b="0">
-                          <a:solidFill>
-                            <a:srgbClr val="1A1A1A"/>
-                          </a:solidFill>
-                          <a:latin typeface="DM Sans"/>
-                        </a:rPr>
-                        <a:t>Will visit: No</a:t>
-                      </a:r>
-                    </a:p>
-                  </a:txBody>
-                  <a:tcPr marL="45720" marR="54864" marT="22860" marB="22860" anchor="ctr">
-                    <a:lnL w="0"/>
-                    <a:lnR w="0"/>
-                    <a:lnT w="0"/>
-                    <a:lnB w="9525" cap="flat" cmpd="sng" algn="ctr">
-                      <a:solidFill>
-                        <a:srgbClr val="E0E0E0"/>
-                      </a:solidFill>
-                      <a:prstDash val="solid"/>
-                    </a:lnB>
-                    <a:lnTlToBr w="0"/>
-                    <a:lnBlToTr w="0"/>
-                  </a:tcPr>
-                </a:tc>
-                <a:tc>
-                  <a:txBody>
-                    <a:bodyPr/>
-                    <a:lstStyle/>
-                    <a:p>
-                      <a:pPr algn="r"/>
-                      <a:r>
-                        <a:rPr lang="en-IN" sz="1000" b="0">
-                          <a:solidFill>
-                            <a:srgbClr val="1A1A1A"/>
-                          </a:solidFill>
-                          <a:latin typeface="DM Sans"/>
-                        </a:rPr>
-                        <a:t>0%</a:t>
-                      </a:r>
-                    </a:p>
-                  </a:txBody>
-                  <a:tcPr marL="45720" marR="54864" marT="22860" marB="22860" anchor="ctr">
-                    <a:lnL w="0"/>
-                    <a:lnR w="0"/>
-                    <a:lnT w="0"/>
-                    <a:lnB w="9525" cap="flat" cmpd="sng" algn="ctr">
-                      <a:solidFill>
-                        <a:srgbClr val="E0E0E0"/>
-                      </a:solidFill>
-                      <a:prstDash val="solid"/>
-                    </a:lnB>
-                    <a:lnTlToBr w="0"/>
-                    <a:lnBlToTr w="0"/>
-                  </a:tcPr>
-                </a:tc>
-                <a:tc>
-                  <a:txBody>
-                    <a:bodyPr/>
-                    <a:lstStyle/>
-                    <a:p>
-                      <a:pPr algn="r"/>
-                      <a:r>
-                        <a:rPr lang="en-IN" sz="1000" b="0">
-                          <a:solidFill>
-                            <a:srgbClr val="1A1A1A"/>
-                          </a:solidFill>
-                          <a:latin typeface="DM Sans"/>
-                        </a:rPr>
-                        <a:t>8%</a:t>
-                      </a:r>
-                    </a:p>
-                  </a:txBody>
-                  <a:tcPr marL="45720" marR="54864" marT="22860" marB="22860" anchor="ctr">
-                    <a:lnL w="0"/>
-                    <a:lnR w="0"/>
-                    <a:lnT w="0"/>
-                    <a:lnB w="9525" cap="flat" cmpd="sng" algn="ctr">
-                      <a:solidFill>
-                        <a:srgbClr val="E0E0E0"/>
-                      </a:solidFill>
-                      <a:prstDash val="solid"/>
-                    </a:lnB>
-                    <a:lnTlToBr w="0"/>
-                    <a:lnBlToTr w="0"/>
-                  </a:tcPr>
-                </a:tc>
-                <a:tc>
-                  <a:txBody>
-                    <a:bodyPr/>
-                    <a:lstStyle/>
-                    <a:p>
-                      <a:pPr algn="r"/>
-                      <a:r>
-                        <a:rPr lang="en-IN" sz="1000" b="0">
-                          <a:solidFill>
-                            <a:srgbClr val="1A1A1A"/>
-                          </a:solidFill>
-                          <a:latin typeface="DM Sans"/>
-                        </a:rPr>
-                        <a:t>0%</a:t>
-                      </a:r>
-                    </a:p>
-                  </a:txBody>
-                  <a:tcPr marL="45720" marR="54864" marT="22860" marB="22860" anchor="ctr">
-                    <a:lnL w="0"/>
-                    <a:lnR w="0"/>
-                    <a:lnT w="0"/>
-                    <a:lnB w="9525" cap="flat" cmpd="sng" algn="ctr">
-                      <a:solidFill>
-                        <a:srgbClr val="E0E0E0"/>
-                      </a:solidFill>
-                      <a:prstDash val="solid"/>
-                    </a:lnB>
-                    <a:lnTlToBr w="0"/>
-                    <a:lnBlToTr w="0"/>
-                  </a:tcPr>
-                </a:tc>
-                <a:tc>
-                  <a:txBody>
-                    <a:bodyPr/>
-                    <a:lstStyle/>
-                    <a:p>
-                      <a:pPr algn="r"/>
-                      <a:r>
-                        <a:rPr lang="en-IN" sz="1000" b="0">
-                          <a:solidFill>
-                            <a:srgbClr val="1A1A1A"/>
-                          </a:solidFill>
-                          <a:latin typeface="DM Sans"/>
-                        </a:rPr>
-                        <a:t>0%</a:t>
-                      </a:r>
-                    </a:p>
-                  </a:txBody>
-                  <a:tcPr marL="45720" marR="54864" marT="22860" marB="22860" anchor="ctr">
-                    <a:lnL w="0"/>
-                    <a:lnR w="0"/>
-                    <a:lnT w="0"/>
-                    <a:lnB w="9525" cap="flat" cmpd="sng" algn="ctr">
-                      <a:solidFill>
-                        <a:srgbClr val="E0E0E0"/>
-                      </a:solidFill>
-                      <a:prstDash val="solid"/>
-                    </a:lnB>
-                    <a:lnTlToBr w="0"/>
-                    <a:lnBlToTr w="0"/>
-                  </a:tcPr>
-                </a:tc>
-                <a:tc>
-                  <a:txBody>
-                    <a:bodyPr/>
-                    <a:lstStyle/>
-                    <a:p>
-                      <a:pPr algn="r"/>
-                      <a:r>
-                        <a:rPr lang="en-IN" sz="1000" b="1">
-                          <a:solidFill>
-                            <a:srgbClr val="1A1A1A"/>
-                          </a:solidFill>
-                          <a:latin typeface="DM Sans"/>
-                        </a:rPr>
-                        <a:t>2%</a:t>
-                      </a:r>
-                    </a:p>
-                  </a:txBody>
-                  <a:tcPr marL="45720" marR="54864" marT="22860" marB="22860" anchor="ctr">
-                    <a:lnL w="0"/>
-                    <a:lnR w="0"/>
-                    <a:lnT w="0"/>
-                    <a:lnB w="9525" cap="flat" cmpd="sng" algn="ctr">
-                      <a:solidFill>
-                        <a:srgbClr val="E0E0E0"/>
-                      </a:solidFill>
-                      <a:prstDash val="solid"/>
-                    </a:lnB>
-                    <a:lnTlToBr w="0"/>
-                    <a:lnBlToTr w="0"/>
-                  </a:tcPr>
-                </a:tc>
-              </a:tr>
-              <a:tr h="173736">
-                <a:tc gridSpan="6">
-                  <a:txBody>
-                    <a:bodyPr/>
-                    <a:lstStyle/>
-                    <a:p>
-                      <a:pPr algn="l"/>
-                      <a:r>
-                        <a:rPr lang="en-IN" sz="800" b="0">
-                          <a:solidFill>
-                            <a:srgbClr val="EA4722"/>
-                          </a:solidFill>
-                          <a:latin typeface="DM Sans ExtraBold"/>
-                        </a:rPr>
-                        <a:t>HOW THEY HEARD (OF THOSE WHO KNEW)</a:t>
-                      </a:r>
-                    </a:p>
-                  </a:txBody>
-                  <a:tcPr marL="45720" marR="54864" marT="45720" marB="0" anchor="ctr">
-                    <a:lnL w="0"/>
-                    <a:lnR w="0"/>
-                    <a:lnT w="9525" cap="flat" cmpd="sng" algn="ctr">
-                      <a:solidFill>
-                        <a:srgbClr val="808080"/>
-                      </a:solidFill>
-                      <a:prstDash val="solid"/>
-                    </a:lnT>
-                    <a:lnB w="0"/>
-                    <a:lnTlToBr w="0"/>
-                    <a:lnBlToTr w="0"/>
-                  </a:tcPr>
-                </a:tc>
-                <a:tc hMerge="1">
-                  <a:txBody>
-                    <a:bodyPr/>
-                    <a:lstStyle/>
-                    <a:p>
-                      <a:endParaRPr lang="en-IN"/>
-                    </a:p>
-                  </a:txBody>
-                  <a:tcPr/>
-                </a:tc>
-                <a:tc hMerge="1">
-                  <a:txBody>
-                    <a:bodyPr/>
-                    <a:lstStyle/>
-                    <a:p>
-                      <a:endParaRPr lang="en-IN"/>
-                    </a:p>
-                  </a:txBody>
-                  <a:tcPr/>
-                </a:tc>
-                <a:tc hMerge="1">
-                  <a:txBody>
-                    <a:bodyPr/>
-                    <a:lstStyle/>
-                    <a:p>
-                      <a:endParaRPr lang="en-IN"/>
-                    </a:p>
-                  </a:txBody>
-                  <a:tcPr/>
-                </a:tc>
-                <a:tc hMerge="1">
-                  <a:txBody>
-                    <a:bodyPr/>
-                    <a:lstStyle/>
-                    <a:p>
-                      <a:endParaRPr lang="en-IN"/>
-                    </a:p>
-                  </a:txBody>
-                  <a:tcPr/>
-                </a:tc>
-                <a:tc hMerge="1">
-                  <a:txBody>
-                    <a:bodyPr/>
-                    <a:lstStyle/>
-                    <a:p>
-                      <a:endParaRPr lang="en-IN"/>
-                    </a:p>
-                  </a:txBody>
-                  <a:tcPr/>
-                </a:tc>
-              </a:tr>
-              <a:tr h="187452">
-                <a:tc>
-                  <a:txBody>
-                    <a:bodyPr/>
-                    <a:lstStyle/>
-                    <a:p>
-                      <a:pPr algn="l"/>
-                      <a:r>
-                        <a:rPr lang="en-IN" sz="1000" b="0">
-                          <a:solidFill>
-                            <a:srgbClr val="1A1A1A"/>
-                          </a:solidFill>
-                          <a:latin typeface="DM Sans"/>
-                        </a:rPr>
-                        <a:t>Standee / posters</a:t>
-                      </a:r>
-                    </a:p>
-                  </a:txBody>
-                  <a:tcPr marL="45720" marR="54864" marT="22860" marB="22860" anchor="ctr">
-                    <a:lnL w="0"/>
-                    <a:lnR w="0"/>
-                    <a:lnT w="0"/>
-                    <a:lnB w="9525" cap="flat" cmpd="sng" algn="ctr">
-                      <a:solidFill>
-                        <a:srgbClr val="E0E0E0"/>
-                      </a:solidFill>
-                      <a:prstDash val="solid"/>
-                    </a:lnB>
-                    <a:lnTlToBr w="0"/>
-                    <a:lnBlToTr w="0"/>
-                  </a:tcPr>
-                </a:tc>
-                <a:tc>
-                  <a:txBody>
-                    <a:bodyPr/>
-                    <a:lstStyle/>
-                    <a:p>
-                      <a:pPr algn="r"/>
-                      <a:r>
-                        <a:rPr lang="en-IN" sz="1000" b="0">
-                          <a:solidFill>
-                            <a:srgbClr val="1A1A1A"/>
-                          </a:solidFill>
-                          <a:latin typeface="DM Sans"/>
-                        </a:rPr>
-                        <a:t>83%</a:t>
-                      </a:r>
-                    </a:p>
-                  </a:txBody>
-                  <a:tcPr marL="45720" marR="54864" marT="22860" marB="22860" anchor="ctr">
-                    <a:lnL w="0"/>
-                    <a:lnR w="0"/>
-                    <a:lnT w="0"/>
-                    <a:lnB w="9525" cap="flat" cmpd="sng" algn="ctr">
-                      <a:solidFill>
-                        <a:srgbClr val="E0E0E0"/>
-                      </a:solidFill>
-                      <a:prstDash val="solid"/>
-                    </a:lnB>
-                    <a:lnTlToBr w="0"/>
-                    <a:lnBlToTr w="0"/>
-                  </a:tcPr>
-                </a:tc>
-                <a:tc>
-                  <a:txBody>
-                    <a:bodyPr/>
-                    <a:lstStyle/>
-                    <a:p>
-                      <a:pPr algn="r"/>
-                      <a:r>
-                        <a:rPr lang="en-IN" sz="1000" b="0">
-                          <a:solidFill>
-                            <a:srgbClr val="1A1A1A"/>
-                          </a:solidFill>
-                          <a:latin typeface="DM Sans"/>
-                        </a:rPr>
-                        <a:t>54%</a:t>
-                      </a:r>
-                    </a:p>
-                  </a:txBody>
-                  <a:tcPr marL="45720" marR="54864" marT="22860" marB="22860" anchor="ctr">
-                    <a:lnL w="0"/>
-                    <a:lnR w="0"/>
-                    <a:lnT w="0"/>
-                    <a:lnB w="9525" cap="flat" cmpd="sng" algn="ctr">
-                      <a:solidFill>
-                        <a:srgbClr val="E0E0E0"/>
-                      </a:solidFill>
-                      <a:prstDash val="solid"/>
-                    </a:lnB>
-                    <a:lnTlToBr w="0"/>
-                    <a:lnBlToTr w="0"/>
-                  </a:tcPr>
-                </a:tc>
-                <a:tc>
-                  <a:txBody>
-                    <a:bodyPr/>
-                    <a:lstStyle/>
-                    <a:p>
-                      <a:pPr algn="r"/>
-                      <a:r>
-                        <a:rPr lang="en-IN" sz="1000" b="0">
-                          <a:solidFill>
-                            <a:srgbClr val="1A1A1A"/>
-                          </a:solidFill>
-                          <a:latin typeface="DM Sans"/>
-                        </a:rPr>
-                        <a:t>70%</a:t>
-                      </a:r>
-                    </a:p>
-                  </a:txBody>
-                  <a:tcPr marL="45720" marR="54864" marT="22860" marB="22860" anchor="ctr">
-                    <a:lnL w="0"/>
-                    <a:lnR w="0"/>
-                    <a:lnT w="0"/>
-                    <a:lnB w="9525" cap="flat" cmpd="sng" algn="ctr">
-                      <a:solidFill>
-                        <a:srgbClr val="E0E0E0"/>
-                      </a:solidFill>
-                      <a:prstDash val="solid"/>
-                    </a:lnB>
-                    <a:lnTlToBr w="0"/>
-                    <a:lnBlToTr w="0"/>
-                  </a:tcPr>
-                </a:tc>
-                <a:tc>
-                  <a:txBody>
-                    <a:bodyPr/>
-                    <a:lstStyle/>
-                    <a:p>
-                      <a:pPr algn="r"/>
-                      <a:r>
-                        <a:rPr lang="en-IN" sz="1000" b="0">
-                          <a:solidFill>
-                            <a:srgbClr val="1A1A1A"/>
-                          </a:solidFill>
-                          <a:latin typeface="DM Sans"/>
-                        </a:rPr>
-                        <a:t>40%</a:t>
-                      </a:r>
-                    </a:p>
-                  </a:txBody>
-                  <a:tcPr marL="45720" marR="54864" marT="22860" marB="22860" anchor="ctr">
-                    <a:lnL w="0"/>
-                    <a:lnR w="0"/>
-                    <a:lnT w="0"/>
-                    <a:lnB w="9525" cap="flat" cmpd="sng" algn="ctr">
-                      <a:solidFill>
-                        <a:srgbClr val="E0E0E0"/>
-                      </a:solidFill>
-                      <a:prstDash val="solid"/>
-                    </a:lnB>
-                    <a:lnTlToBr w="0"/>
-                    <a:lnBlToTr w="0"/>
-                  </a:tcPr>
-                </a:tc>
-                <a:tc>
-                  <a:txBody>
-                    <a:bodyPr/>
-                    <a:lstStyle/>
-                    <a:p>
-                      <a:pPr algn="r"/>
-                      <a:r>
-                        <a:rPr lang="en-IN" sz="1000" b="1">
-                          <a:solidFill>
-                            <a:srgbClr val="1A1A1A"/>
-                          </a:solidFill>
-                          <a:latin typeface="DM Sans"/>
-                        </a:rPr>
-                        <a:t>63%</a:t>
-                      </a:r>
-                    </a:p>
-                  </a:txBody>
-                  <a:tcPr marL="45720" marR="54864" marT="22860" marB="22860" anchor="ctr">
-                    <a:lnL w="0"/>
-                    <a:lnR w="0"/>
-                    <a:lnT w="0"/>
-                    <a:lnB w="9525" cap="flat" cmpd="sng" algn="ctr">
-                      <a:solidFill>
-                        <a:srgbClr val="E0E0E0"/>
-                      </a:solidFill>
-                      <a:prstDash val="solid"/>
-                    </a:lnB>
-                    <a:lnTlToBr w="0"/>
-                    <a:lnBlToTr w="0"/>
-                  </a:tcPr>
-                </a:tc>
-              </a:tr>
-              <a:tr h="187452">
-                <a:tc>
-                  <a:txBody>
-                    <a:bodyPr/>
-                    <a:lstStyle/>
-                    <a:p>
-                      <a:pPr algn="l"/>
-                      <a:r>
-                        <a:rPr lang="en-IN" sz="1000" b="0">
-                          <a:solidFill>
-                            <a:srgbClr val="1A1A1A"/>
-                          </a:solidFill>
-                          <a:latin typeface="DM Sans"/>
-                        </a:rPr>
-                        <a:t>Colleague</a:t>
-                      </a:r>
-                    </a:p>
-                  </a:txBody>
-                  <a:tcPr marL="45720" marR="54864" marT="22860" marB="22860" anchor="ctr">
-                    <a:lnL w="0"/>
-                    <a:lnR w="0"/>
-                    <a:lnT w="0"/>
-                    <a:lnB w="9525" cap="flat" cmpd="sng" algn="ctr">
-                      <a:solidFill>
-                        <a:srgbClr val="E0E0E0"/>
-                      </a:solidFill>
-                      <a:prstDash val="solid"/>
-                    </a:lnB>
-                    <a:lnTlToBr w="0"/>
-                    <a:lnBlToTr w="0"/>
-                  </a:tcPr>
-                </a:tc>
-                <a:tc>
-                  <a:txBody>
-                    <a:bodyPr/>
-                    <a:lstStyle/>
-                    <a:p>
-                      <a:pPr algn="r"/>
-                      <a:r>
-                        <a:rPr lang="en-IN" sz="1000" b="0">
-                          <a:solidFill>
-                            <a:srgbClr val="1A1A1A"/>
-                          </a:solidFill>
-                          <a:latin typeface="DM Sans"/>
-                        </a:rPr>
-                        <a:t>0%</a:t>
-                      </a:r>
-                    </a:p>
-                  </a:txBody>
-                  <a:tcPr marL="45720" marR="54864" marT="22860" marB="22860" anchor="ctr">
-                    <a:lnL w="0"/>
-                    <a:lnR w="0"/>
-                    <a:lnT w="0"/>
-                    <a:lnB w="9525" cap="flat" cmpd="sng" algn="ctr">
-                      <a:solidFill>
-                        <a:srgbClr val="E0E0E0"/>
-                      </a:solidFill>
-                      <a:prstDash val="solid"/>
-                    </a:lnB>
-                    <a:lnTlToBr w="0"/>
-                    <a:lnBlToTr w="0"/>
-                  </a:tcPr>
-                </a:tc>
-                <a:tc>
-                  <a:txBody>
-                    <a:bodyPr/>
-                    <a:lstStyle/>
-                    <a:p>
-                      <a:pPr algn="r"/>
-                      <a:r>
-                        <a:rPr lang="en-IN" sz="1000" b="0">
-                          <a:solidFill>
-                            <a:srgbClr val="1A1A1A"/>
-                          </a:solidFill>
-                          <a:latin typeface="DM Sans"/>
-                        </a:rPr>
-                        <a:t>38%</a:t>
-                      </a:r>
-                    </a:p>
-                  </a:txBody>
-                  <a:tcPr marL="45720" marR="54864" marT="22860" marB="22860" anchor="ctr">
-                    <a:lnL w="0"/>
-                    <a:lnR w="0"/>
-                    <a:lnT w="0"/>
-                    <a:lnB w="9525" cap="flat" cmpd="sng" algn="ctr">
-                      <a:solidFill>
-                        <a:srgbClr val="E0E0E0"/>
-                      </a:solidFill>
-                      <a:prstDash val="solid"/>
-                    </a:lnB>
-                    <a:lnTlToBr w="0"/>
-                    <a:lnBlToTr w="0"/>
-                  </a:tcPr>
-                </a:tc>
-                <a:tc>
-                  <a:txBody>
-                    <a:bodyPr/>
-                    <a:lstStyle/>
-                    <a:p>
-                      <a:pPr algn="r"/>
-                      <a:r>
-                        <a:rPr lang="en-IN" sz="1000" b="0">
-                          <a:solidFill>
-                            <a:srgbClr val="1A1A1A"/>
-                          </a:solidFill>
-                          <a:latin typeface="DM Sans"/>
-                        </a:rPr>
-                        <a:t>30%</a:t>
-                      </a:r>
-                    </a:p>
-                  </a:txBody>
-                  <a:tcPr marL="45720" marR="54864" marT="22860" marB="22860" anchor="ctr">
-                    <a:lnL w="0"/>
-                    <a:lnR w="0"/>
-                    <a:lnT w="0"/>
-                    <a:lnB w="9525" cap="flat" cmpd="sng" algn="ctr">
-                      <a:solidFill>
-                        <a:srgbClr val="E0E0E0"/>
-                      </a:solidFill>
-                      <a:prstDash val="solid"/>
-                    </a:lnB>
-                    <a:lnTlToBr w="0"/>
-                    <a:lnBlToTr w="0"/>
-                  </a:tcPr>
-                </a:tc>
-                <a:tc>
-                  <a:txBody>
-                    <a:bodyPr/>
-                    <a:lstStyle/>
-                    <a:p>
-                      <a:pPr algn="r"/>
-                      <a:r>
-                        <a:rPr lang="en-IN" sz="1000" b="0">
-                          <a:solidFill>
-                            <a:srgbClr val="1A1A1A"/>
-                          </a:solidFill>
-                          <a:latin typeface="DM Sans"/>
-                        </a:rPr>
-                        <a:t>40%</a:t>
-                      </a:r>
-                    </a:p>
-                  </a:txBody>
-                  <a:tcPr marL="45720" marR="54864" marT="22860" marB="22860" anchor="ctr">
-                    <a:lnL w="0"/>
-                    <a:lnR w="0"/>
-                    <a:lnT w="0"/>
-                    <a:lnB w="9525" cap="flat" cmpd="sng" algn="ctr">
-                      <a:solidFill>
-                        <a:srgbClr val="E0E0E0"/>
-                      </a:solidFill>
-                      <a:prstDash val="solid"/>
-                    </a:lnB>
-                    <a:lnTlToBr w="0"/>
-                    <a:lnBlToTr w="0"/>
-                  </a:tcPr>
-                </a:tc>
-                <a:tc>
-                  <a:txBody>
-                    <a:bodyPr/>
-                    <a:lstStyle/>
-                    <a:p>
-                      <a:pPr algn="r"/>
-                      <a:r>
-                        <a:rPr lang="en-IN" sz="1000" b="1">
-                          <a:solidFill>
-                            <a:srgbClr val="1A1A1A"/>
-                          </a:solidFill>
-                          <a:latin typeface="DM Sans"/>
-                        </a:rPr>
-                        <a:t>22%</a:t>
-                      </a:r>
-                    </a:p>
-                  </a:txBody>
-                  <a:tcPr marL="45720" marR="54864" marT="22860" marB="22860" anchor="ctr">
-                    <a:lnL w="0"/>
-                    <a:lnR w="0"/>
-                    <a:lnT w="0"/>
-                    <a:lnB w="9525" cap="flat" cmpd="sng" algn="ctr">
-                      <a:solidFill>
-                        <a:srgbClr val="E0E0E0"/>
-                      </a:solidFill>
-                      <a:prstDash val="solid"/>
-                    </a:lnB>
-                    <a:lnTlToBr w="0"/>
-                    <a:lnBlToTr w="0"/>
-                  </a:tcPr>
-                </a:tc>
-              </a:tr>
-              <a:tr h="187452">
-                <a:tc>
-                  <a:txBody>
-                    <a:bodyPr/>
-                    <a:lstStyle/>
-                    <a:p>
-                      <a:pPr algn="l"/>
-                      <a:r>
-                        <a:rPr lang="en-IN" sz="1000" b="0">
-                          <a:solidFill>
-                            <a:srgbClr val="1A1A1A"/>
-                          </a:solidFill>
-                          <a:latin typeface="DM Sans"/>
-                        </a:rPr>
-                        <a:t>Office email</a:t>
-                      </a:r>
-                    </a:p>
-                  </a:txBody>
-                  <a:tcPr marL="45720" marR="54864" marT="22860" marB="22860" anchor="ctr">
-                    <a:lnL w="0"/>
-                    <a:lnR w="0"/>
-                    <a:lnT w="0"/>
-                    <a:lnB w="9525" cap="flat" cmpd="sng" algn="ctr">
-                      <a:solidFill>
-                        <a:srgbClr val="E0E0E0"/>
-                      </a:solidFill>
-                      <a:prstDash val="solid"/>
-                    </a:lnB>
-                    <a:lnTlToBr w="0"/>
-                    <a:lnBlToTr w="0"/>
-                  </a:tcPr>
-                </a:tc>
-                <a:tc>
-                  <a:txBody>
-                    <a:bodyPr/>
-                    <a:lstStyle/>
-                    <a:p>
-                      <a:pPr algn="r"/>
-                      <a:r>
-                        <a:rPr lang="en-IN" sz="1000" b="0">
-                          <a:solidFill>
-                            <a:srgbClr val="1A1A1A"/>
-                          </a:solidFill>
-                          <a:latin typeface="DM Sans"/>
-                        </a:rPr>
-                        <a:t>17%</a:t>
-                      </a:r>
-                    </a:p>
-                  </a:txBody>
-                  <a:tcPr marL="45720" marR="54864" marT="22860" marB="22860" anchor="ctr">
-                    <a:lnL w="0"/>
-                    <a:lnR w="0"/>
-                    <a:lnT w="0"/>
-                    <a:lnB w="9525" cap="flat" cmpd="sng" algn="ctr">
-                      <a:solidFill>
-                        <a:srgbClr val="E0E0E0"/>
-                      </a:solidFill>
-                      <a:prstDash val="solid"/>
-                    </a:lnB>
-                    <a:lnTlToBr w="0"/>
-                    <a:lnBlToTr w="0"/>
-                  </a:tcPr>
-                </a:tc>
-                <a:tc>
-                  <a:txBody>
-                    <a:bodyPr/>
-                    <a:lstStyle/>
-                    <a:p>
-                      <a:pPr algn="r"/>
-                      <a:r>
-                        <a:rPr lang="en-IN" sz="1000" b="0">
-                          <a:solidFill>
-                            <a:srgbClr val="1A1A1A"/>
-                          </a:solidFill>
-                          <a:latin typeface="DM Sans"/>
-                        </a:rPr>
-                        <a:t>8%</a:t>
-                      </a:r>
-                    </a:p>
-                  </a:txBody>
-                  <a:tcPr marL="45720" marR="54864" marT="22860" marB="22860" anchor="ctr">
-                    <a:lnL w="0"/>
-                    <a:lnR w="0"/>
-                    <a:lnT w="0"/>
-                    <a:lnB w="9525" cap="flat" cmpd="sng" algn="ctr">
-                      <a:solidFill>
-                        <a:srgbClr val="E0E0E0"/>
-                      </a:solidFill>
-                      <a:prstDash val="solid"/>
-                    </a:lnB>
-                    <a:lnTlToBr w="0"/>
-                    <a:lnBlToTr w="0"/>
-                  </a:tcPr>
-                </a:tc>
-                <a:tc>
-                  <a:txBody>
-                    <a:bodyPr/>
-                    <a:lstStyle/>
-                    <a:p>
-                      <a:pPr algn="r"/>
-                      <a:r>
-                        <a:rPr lang="en-IN" sz="1000" b="0">
-                          <a:solidFill>
-                            <a:srgbClr val="1A1A1A"/>
-                          </a:solidFill>
-                          <a:latin typeface="DM Sans"/>
-                        </a:rPr>
-                        <a:t>0%</a:t>
-                      </a:r>
-                    </a:p>
-                  </a:txBody>
-                  <a:tcPr marL="45720" marR="54864" marT="22860" marB="22860" anchor="ctr">
-                    <a:lnL w="0"/>
-                    <a:lnR w="0"/>
-                    <a:lnT w="0"/>
-                    <a:lnB w="9525" cap="flat" cmpd="sng" algn="ctr">
-                      <a:solidFill>
-                        <a:srgbClr val="E0E0E0"/>
-                      </a:solidFill>
-                      <a:prstDash val="solid"/>
-                    </a:lnB>
-                    <a:lnTlToBr w="0"/>
-                    <a:lnBlToTr w="0"/>
-                  </a:tcPr>
-                </a:tc>
-                <a:tc>
-                  <a:txBody>
-                    <a:bodyPr/>
-                    <a:lstStyle/>
-                    <a:p>
-                      <a:pPr algn="r"/>
-                      <a:r>
-                        <a:rPr lang="en-IN" sz="1000" b="0">
-                          <a:solidFill>
-                            <a:srgbClr val="1A1A1A"/>
-                          </a:solidFill>
-                          <a:latin typeface="DM Sans"/>
-                        </a:rPr>
-                        <a:t>10%</a:t>
-                      </a:r>
-                    </a:p>
-                  </a:txBody>
-                  <a:tcPr marL="45720" marR="54864" marT="22860" marB="22860" anchor="ctr">
-                    <a:lnL w="0"/>
-                    <a:lnR w="0"/>
-                    <a:lnT w="0"/>
-                    <a:lnB w="9525" cap="flat" cmpd="sng" algn="ctr">
-                      <a:solidFill>
-                        <a:srgbClr val="E0E0E0"/>
-                      </a:solidFill>
-                      <a:prstDash val="solid"/>
-                    </a:lnB>
-                    <a:lnTlToBr w="0"/>
-                    <a:lnBlToTr w="0"/>
-                  </a:tcPr>
-                </a:tc>
-                <a:tc>
-                  <a:txBody>
-                    <a:bodyPr/>
-                    <a:lstStyle/>
-                    <a:p>
-                      <a:pPr algn="r"/>
-                      <a:r>
-                        <a:rPr lang="en-IN" sz="1000" b="1">
-                          <a:solidFill>
-                            <a:srgbClr val="1A1A1A"/>
-                          </a:solidFill>
-                          <a:latin typeface="DM Sans"/>
-                        </a:rPr>
-                        <a:t>12%</a:t>
-                      </a:r>
-                    </a:p>
-                  </a:txBody>
-                  <a:tcPr marL="45720" marR="54864" marT="22860" marB="22860" anchor="ctr">
-                    <a:lnL w="0"/>
-                    <a:lnR w="0"/>
-                    <a:lnT w="0"/>
-                    <a:lnB w="9525" cap="flat" cmpd="sng" algn="ctr">
-                      <a:solidFill>
-                        <a:srgbClr val="E0E0E0"/>
-                      </a:solidFill>
-                      <a:prstDash val="solid"/>
-                    </a:lnB>
-                    <a:lnTlToBr w="0"/>
-                    <a:lnBlToTr w="0"/>
-                  </a:tcPr>
-                </a:tc>
-              </a:tr>
-              <a:tr h="187452">
-                <a:tc>
-                  <a:txBody>
-                    <a:bodyPr/>
-                    <a:lstStyle/>
-                    <a:p>
-                      <a:pPr algn="l"/>
-                      <a:r>
-                        <a:rPr lang="en-IN" sz="1000" b="0">
-                          <a:solidFill>
-                            <a:srgbClr val="1A1A1A"/>
-                          </a:solidFill>
-                          <a:latin typeface="DM Sans"/>
-                        </a:rPr>
-                        <a:t>Social media</a:t>
-                      </a:r>
-                    </a:p>
-                  </a:txBody>
-                  <a:tcPr marL="45720" marR="54864" marT="22860" marB="22860" anchor="ctr">
-                    <a:lnL w="0"/>
-                    <a:lnR w="0"/>
-                    <a:lnT w="0"/>
-                    <a:lnB w="9525" cap="flat" cmpd="sng" algn="ctr">
-                      <a:solidFill>
-                        <a:srgbClr val="E0E0E0"/>
-                      </a:solidFill>
-                      <a:prstDash val="solid"/>
-                    </a:lnB>
-                    <a:lnTlToBr w="0"/>
-                    <a:lnBlToTr w="0"/>
-                  </a:tcPr>
-                </a:tc>
-                <a:tc>
-                  <a:txBody>
-                    <a:bodyPr/>
-                    <a:lstStyle/>
-                    <a:p>
-                      <a:pPr algn="r"/>
-                      <a:r>
-                        <a:rPr lang="en-IN" sz="1000" b="0">
-                          <a:solidFill>
-                            <a:srgbClr val="1A1A1A"/>
-                          </a:solidFill>
-                          <a:latin typeface="DM Sans"/>
-                        </a:rPr>
-                        <a:t>0%</a:t>
-                      </a:r>
-                    </a:p>
-                  </a:txBody>
-                  <a:tcPr marL="45720" marR="54864" marT="22860" marB="22860" anchor="ctr">
-                    <a:lnL w="0"/>
-                    <a:lnR w="0"/>
-                    <a:lnT w="0"/>
-                    <a:lnB w="9525" cap="flat" cmpd="sng" algn="ctr">
-                      <a:solidFill>
-                        <a:srgbClr val="E0E0E0"/>
-                      </a:solidFill>
-                      <a:prstDash val="solid"/>
-                    </a:lnB>
-                    <a:lnTlToBr w="0"/>
-                    <a:lnBlToTr w="0"/>
-                  </a:tcPr>
-                </a:tc>
-                <a:tc>
-                  <a:txBody>
-                    <a:bodyPr/>
-                    <a:lstStyle/>
-                    <a:p>
-                      <a:pPr algn="r"/>
-                      <a:r>
-                        <a:rPr lang="en-IN" sz="1000" b="0">
-                          <a:solidFill>
-                            <a:srgbClr val="1A1A1A"/>
-                          </a:solidFill>
-                          <a:latin typeface="DM Sans"/>
-                        </a:rPr>
-                        <a:t>0%</a:t>
-                      </a:r>
-                    </a:p>
-                  </a:txBody>
-                  <a:tcPr marL="45720" marR="54864" marT="22860" marB="22860" anchor="ctr">
-                    <a:lnL w="0"/>
-                    <a:lnR w="0"/>
-                    <a:lnT w="0"/>
-                    <a:lnB w="9525" cap="flat" cmpd="sng" algn="ctr">
-                      <a:solidFill>
-                        <a:srgbClr val="E0E0E0"/>
-                      </a:solidFill>
-                      <a:prstDash val="solid"/>
-                    </a:lnB>
-                    <a:lnTlToBr w="0"/>
-                    <a:lnBlToTr w="0"/>
-                  </a:tcPr>
-                </a:tc>
-                <a:tc>
-                  <a:txBody>
-                    <a:bodyPr/>
-                    <a:lstStyle/>
-                    <a:p>
-                      <a:pPr algn="r"/>
-                      <a:r>
-                        <a:rPr lang="en-IN" sz="1000" b="0">
-                          <a:solidFill>
-                            <a:srgbClr val="1A1A1A"/>
-                          </a:solidFill>
-                          <a:latin typeface="DM Sans"/>
-                        </a:rPr>
-                        <a:t>0%</a:t>
-                      </a:r>
-                    </a:p>
-                  </a:txBody>
-                  <a:tcPr marL="45720" marR="54864" marT="22860" marB="22860" anchor="ctr">
-                    <a:lnL w="0"/>
-                    <a:lnR w="0"/>
-                    <a:lnT w="0"/>
-                    <a:lnB w="9525" cap="flat" cmpd="sng" algn="ctr">
-                      <a:solidFill>
-                        <a:srgbClr val="E0E0E0"/>
-                      </a:solidFill>
-                      <a:prstDash val="solid"/>
-                    </a:lnB>
-                    <a:lnTlToBr w="0"/>
-                    <a:lnBlToTr w="0"/>
-                  </a:tcPr>
-                </a:tc>
-                <a:tc>
-                  <a:txBody>
-                    <a:bodyPr/>
-                    <a:lstStyle/>
-                    <a:p>
-                      <a:pPr algn="r"/>
-                      <a:r>
-                        <a:rPr lang="en-IN" sz="1000" b="0">
-                          <a:solidFill>
-                            <a:srgbClr val="1A1A1A"/>
-                          </a:solidFill>
-                          <a:latin typeface="DM Sans"/>
-                        </a:rPr>
-                        <a:t>10%</a:t>
-                      </a:r>
-                    </a:p>
-                  </a:txBody>
-                  <a:tcPr marL="45720" marR="54864" marT="22860" marB="22860" anchor="ctr">
-                    <a:lnL w="0"/>
-                    <a:lnR w="0"/>
-                    <a:lnT w="0"/>
-                    <a:lnB w="9525" cap="flat" cmpd="sng" algn="ctr">
-                      <a:solidFill>
-                        <a:srgbClr val="E0E0E0"/>
-                      </a:solidFill>
-                      <a:prstDash val="solid"/>
-                    </a:lnB>
-                    <a:lnTlToBr w="0"/>
-                    <a:lnBlToTr w="0"/>
-                  </a:tcPr>
-                </a:tc>
-                <a:tc>
-                  <a:txBody>
-                    <a:bodyPr/>
-                    <a:lstStyle/>
-                    <a:p>
-                      <a:pPr algn="r"/>
-                      <a:r>
-                        <a:rPr lang="en-IN" sz="1000" b="1">
-                          <a:solidFill>
-                            <a:srgbClr val="1A1A1A"/>
-                          </a:solidFill>
-                          <a:latin typeface="DM Sans"/>
-                        </a:rPr>
-                        <a:t>3%</a:t>
-                      </a:r>
-                    </a:p>
-                  </a:txBody>
-                  <a:tcPr marL="45720" marR="54864" marT="22860" marB="22860" anchor="ctr">
-                    <a:lnL w="0"/>
-                    <a:lnR w="0"/>
-                    <a:lnT w="0"/>
-                    <a:lnB w="9525" cap="flat" cmpd="sng" algn="ctr">
-                      <a:solidFill>
-                        <a:srgbClr val="E0E0E0"/>
-                      </a:solidFill>
-                      <a:prstDash val="solid"/>
-                    </a:lnB>
-                    <a:lnTlToBr w="0"/>
-                    <a:lnBlToTr w="0"/>
-                  </a:tcPr>
-                </a:tc>
-              </a:tr>
-            </a:tbl>
-          </a:graphicData>
-        </a:graphic>
-      </p:graphicFrame>
-      <p:pic>
-        <p:nvPicPr>
-          <p:cNvPr id="4" name="Picture 3" descr="footer-gradient.png">
-            <a:extLst>
-              <a:ext uri="{FF2B5EF4-FFF2-40B4-BE49-F238E27FC236}">
-                <a16:creationId xmlns:a16="http://schemas.microsoft.com/office/drawing/2014/main" id="{07CD63EE-4FCA-0F03-55C7-9D4648F89DDE}"/>
-              </a:ext>
-            </a:extLst>
-          </p:cNvPr>
-          <p:cNvPicPr>
-            <a:picLocks noChangeAspect="1"/>
-          </p:cNvPicPr>
-          <p:nvPr/>
-        </p:nvPicPr>
-        <p:blipFill>
-          <a:blip r:embed="rId2"/>
-          <a:stretch>
-            <a:fillRect/>
-          </a:stretch>
-        </p:blipFill>
-        <p:spPr>
-          <a:xfrm>
-            <a:off x="0" y="5056632"/>
-            <a:ext cx="9144000" cy="91440"/>
-          </a:xfrm>
-          <a:prstGeom prst="rect">
-            <a:avLst/>
-          </a:prstGeom>
-        </p:spPr>
-      </p:pic>
-      <p:pic>
-        <p:nvPicPr>
-          <p:cNvPr id="12" name="Picture 11" descr="accent-bar.png">
-            <a:extLst>
-              <a:ext uri="{FF2B5EF4-FFF2-40B4-BE49-F238E27FC236}">
-                <a16:creationId xmlns:a16="http://schemas.microsoft.com/office/drawing/2014/main" id="{4E66AF87-7625-E3CB-46A7-267C6F1CC086}"/>
-              </a:ext>
-            </a:extLst>
-          </p:cNvPr>
-          <p:cNvPicPr>
-            <a:picLocks noChangeAspect="1"/>
-          </p:cNvPicPr>
-          <p:nvPr/>
-        </p:nvPicPr>
-        <p:blipFill>
-          <a:blip r:embed="rId3"/>
-          <a:stretch>
-            <a:fillRect/>
-          </a:stretch>
-        </p:blipFill>
-        <p:spPr>
-          <a:xfrm>
-            <a:off x="398780" y="670347"/>
-            <a:ext cx="8430260" cy="54864"/>
-          </a:xfrm>
-          <a:prstGeom prst="rect">
-            <a:avLst/>
-          </a:prstGeom>
-        </p:spPr>
-      </p:pic>
-      <p:sp>
-        <p:nvSpPr>
-          <p:cNvPr id="17" name="Footnote">
-            <a:extLst>
-              <a:ext uri="{FF2B5EF4-FFF2-40B4-BE49-F238E27FC236}">
-                <a16:creationId xmlns:a16="http://schemas.microsoft.com/office/drawing/2014/main" id="{57594894-A9EE-466D-9DA8-5594E62C7334}"/>
-              </a:ext>
-            </a:extLst>
-          </p:cNvPr>
-          <p:cNvSpPr txBox="1"/>
-          <p:nvPr/>
-        </p:nvSpPr>
-        <p:spPr>
-          <a:xfrm>
-            <a:off x="533400" y="4800600"/>
+            <a:off x="533400" y="4791456"/>
             <a:ext cx="8077200" cy="150000"/>
           </a:xfrm>
           <a:prstGeom prst="rect">
@@ -9653,7 +7588,7 @@
                 </a:solidFill>
                 <a:latin typeface="DM Sans"/>
               </a:rPr>
-              <a:t>Ranges are the lowest and highest building. Orange marks a real gap, not chance (p &lt; 0.05). Total includes 5 responses from P-135 and P-113.</a:t>
+              <a:t>10 to 23 people per building, so small gaps can be chance. The P-116 gaps on discounts and the app are not. All includes 5 people from P-135 and P-113.</a:t>
             </a:r>
           </a:p>
         </p:txBody>
